--- a/DDI COLLEGE FOOTBALL PRESENTATION.pptx
+++ b/DDI COLLEGE FOOTBALL PRESENTATION.pptx
@@ -8,13 +8,14 @@
     <p:sldId id="256" r:id="rId2"/>
     <p:sldId id="257" r:id="rId3"/>
     <p:sldId id="258" r:id="rId4"/>
-    <p:sldId id="259" r:id="rId5"/>
-    <p:sldId id="260" r:id="rId6"/>
-    <p:sldId id="261" r:id="rId7"/>
-    <p:sldId id="262" r:id="rId8"/>
-    <p:sldId id="263" r:id="rId9"/>
-    <p:sldId id="264" r:id="rId10"/>
-    <p:sldId id="265" r:id="rId11"/>
+    <p:sldId id="266" r:id="rId5"/>
+    <p:sldId id="259" r:id="rId6"/>
+    <p:sldId id="260" r:id="rId7"/>
+    <p:sldId id="261" r:id="rId8"/>
+    <p:sldId id="262" r:id="rId9"/>
+    <p:sldId id="263" r:id="rId10"/>
+    <p:sldId id="264" r:id="rId11"/>
+    <p:sldId id="265" r:id="rId12"/>
   </p:sldIdLst>
   <p:sldSz cx="12192000" cy="6858000"/>
   <p:notesSz cx="6858000" cy="9144000"/>
@@ -291,7 +292,7 @@
           <a:p>
             <a:fld id="{2B93048E-CC0C-4803-95C5-DC3A91AF7B00}" type="datetimeFigureOut">
               <a:rPr lang="en-US" smtClean="0"/>
-              <a:t>3/3/2026</a:t>
+              <a:t>3/4/2026</a:t>
             </a:fld>
             <a:endParaRPr lang="en-US"/>
           </a:p>
@@ -558,7 +559,7 @@
           <a:p>
             <a:fld id="{2B93048E-CC0C-4803-95C5-DC3A91AF7B00}" type="datetimeFigureOut">
               <a:rPr lang="en-US" smtClean="0"/>
-              <a:t>3/3/2026</a:t>
+              <a:t>3/4/2026</a:t>
             </a:fld>
             <a:endParaRPr lang="en-US"/>
           </a:p>
@@ -789,7 +790,7 @@
           <a:p>
             <a:fld id="{2B93048E-CC0C-4803-95C5-DC3A91AF7B00}" type="datetimeFigureOut">
               <a:rPr lang="en-US" smtClean="0"/>
-              <a:t>3/3/2026</a:t>
+              <a:t>3/4/2026</a:t>
             </a:fld>
             <a:endParaRPr lang="en-US"/>
           </a:p>
@@ -1099,7 +1100,7 @@
           <a:p>
             <a:fld id="{2B93048E-CC0C-4803-95C5-DC3A91AF7B00}" type="datetimeFigureOut">
               <a:rPr lang="en-US" smtClean="0"/>
-              <a:t>3/3/2026</a:t>
+              <a:t>3/4/2026</a:t>
             </a:fld>
             <a:endParaRPr lang="en-US"/>
           </a:p>
@@ -1572,7 +1573,7 @@
           <a:p>
             <a:fld id="{2B93048E-CC0C-4803-95C5-DC3A91AF7B00}" type="datetimeFigureOut">
               <a:rPr lang="en-US" smtClean="0"/>
-              <a:t>3/3/2026</a:t>
+              <a:t>3/4/2026</a:t>
             </a:fld>
             <a:endParaRPr lang="en-US"/>
           </a:p>
@@ -2119,7 +2120,7 @@
           <a:p>
             <a:fld id="{2B93048E-CC0C-4803-95C5-DC3A91AF7B00}" type="datetimeFigureOut">
               <a:rPr lang="en-US" smtClean="0"/>
-              <a:t>3/3/2026</a:t>
+              <a:t>3/4/2026</a:t>
             </a:fld>
             <a:endParaRPr lang="en-US"/>
           </a:p>
@@ -2893,7 +2894,7 @@
           <a:p>
             <a:fld id="{2B93048E-CC0C-4803-95C5-DC3A91AF7B00}" type="datetimeFigureOut">
               <a:rPr lang="en-US" smtClean="0"/>
-              <a:t>3/3/2026</a:t>
+              <a:t>3/4/2026</a:t>
             </a:fld>
             <a:endParaRPr lang="en-US"/>
           </a:p>
@@ -3068,7 +3069,7 @@
           <a:p>
             <a:fld id="{2B93048E-CC0C-4803-95C5-DC3A91AF7B00}" type="datetimeFigureOut">
               <a:rPr lang="en-US" smtClean="0"/>
-              <a:t>3/3/2026</a:t>
+              <a:t>3/4/2026</a:t>
             </a:fld>
             <a:endParaRPr lang="en-US"/>
           </a:p>
@@ -3291,7 +3292,7 @@
           <a:p>
             <a:fld id="{2B93048E-CC0C-4803-95C5-DC3A91AF7B00}" type="datetimeFigureOut">
               <a:rPr lang="en-US" smtClean="0"/>
-              <a:t>3/3/2026</a:t>
+              <a:t>3/4/2026</a:t>
             </a:fld>
             <a:endParaRPr lang="en-US"/>
           </a:p>
@@ -3471,7 +3472,7 @@
           <a:p>
             <a:fld id="{2B93048E-CC0C-4803-95C5-DC3A91AF7B00}" type="datetimeFigureOut">
               <a:rPr lang="en-US" smtClean="0"/>
-              <a:t>3/3/2026</a:t>
+              <a:t>3/4/2026</a:t>
             </a:fld>
             <a:endParaRPr lang="en-US"/>
           </a:p>
@@ -3760,7 +3761,7 @@
           <a:p>
             <a:fld id="{2B93048E-CC0C-4803-95C5-DC3A91AF7B00}" type="datetimeFigureOut">
               <a:rPr lang="en-US" smtClean="0"/>
-              <a:t>3/3/2026</a:t>
+              <a:t>3/4/2026</a:t>
             </a:fld>
             <a:endParaRPr lang="en-US"/>
           </a:p>
@@ -4002,7 +4003,7 @@
           <a:p>
             <a:fld id="{2B93048E-CC0C-4803-95C5-DC3A91AF7B00}" type="datetimeFigureOut">
               <a:rPr lang="en-US" smtClean="0"/>
-              <a:t>3/3/2026</a:t>
+              <a:t>3/4/2026</a:t>
             </a:fld>
             <a:endParaRPr lang="en-US"/>
           </a:p>
@@ -4381,7 +4382,7 @@
           <a:p>
             <a:fld id="{2B93048E-CC0C-4803-95C5-DC3A91AF7B00}" type="datetimeFigureOut">
               <a:rPr lang="en-US" smtClean="0"/>
-              <a:t>3/3/2026</a:t>
+              <a:t>3/4/2026</a:t>
             </a:fld>
             <a:endParaRPr lang="en-US"/>
           </a:p>
@@ -4499,7 +4500,7 @@
           <a:p>
             <a:fld id="{2B93048E-CC0C-4803-95C5-DC3A91AF7B00}" type="datetimeFigureOut">
               <a:rPr lang="en-US" smtClean="0"/>
-              <a:t>3/3/2026</a:t>
+              <a:t>3/4/2026</a:t>
             </a:fld>
             <a:endParaRPr lang="en-US"/>
           </a:p>
@@ -4594,7 +4595,7 @@
           <a:p>
             <a:fld id="{2B93048E-CC0C-4803-95C5-DC3A91AF7B00}" type="datetimeFigureOut">
               <a:rPr lang="en-US" smtClean="0"/>
-              <a:t>3/3/2026</a:t>
+              <a:t>3/4/2026</a:t>
             </a:fld>
             <a:endParaRPr lang="en-US"/>
           </a:p>
@@ -4843,7 +4844,7 @@
           <a:p>
             <a:fld id="{2B93048E-CC0C-4803-95C5-DC3A91AF7B00}" type="datetimeFigureOut">
               <a:rPr lang="en-US" smtClean="0"/>
-              <a:t>3/3/2026</a:t>
+              <a:t>3/4/2026</a:t>
             </a:fld>
             <a:endParaRPr lang="en-US"/>
           </a:p>
@@ -5100,7 +5101,7 @@
           <a:p>
             <a:fld id="{2B93048E-CC0C-4803-95C5-DC3A91AF7B00}" type="datetimeFigureOut">
               <a:rPr lang="en-US" smtClean="0"/>
-              <a:t>3/3/2026</a:t>
+              <a:t>3/4/2026</a:t>
             </a:fld>
             <a:endParaRPr lang="en-US"/>
           </a:p>
@@ -5343,7 +5344,7 @@
           <a:p>
             <a:fld id="{2B93048E-CC0C-4803-95C5-DC3A91AF7B00}" type="datetimeFigureOut">
               <a:rPr lang="en-US" smtClean="0"/>
-              <a:t>3/3/2026</a:t>
+              <a:t>3/4/2026</a:t>
             </a:fld>
             <a:endParaRPr lang="en-US"/>
           </a:p>
@@ -5845,6 +5846,113 @@
           <p:cNvPr id="2" name="Title 1">
             <a:extLst>
               <a:ext uri="{FF2B5EF4-FFF2-40B4-BE49-F238E27FC236}">
+                <a16:creationId xmlns:a16="http://schemas.microsoft.com/office/drawing/2014/main" id="{7CF3045E-86D8-F178-F55A-5251FF28A34E}"/>
+              </a:ext>
+            </a:extLst>
+          </p:cNvPr>
+          <p:cNvSpPr>
+            <a:spLocks noGrp="1"/>
+          </p:cNvSpPr>
+          <p:nvPr>
+            <p:ph type="title"/>
+          </p:nvPr>
+        </p:nvSpPr>
+        <p:spPr>
+          <a:xfrm>
+            <a:off x="1790700" y="731243"/>
+            <a:ext cx="8610600" cy="1293028"/>
+          </a:xfrm>
+        </p:spPr>
+        <p:txBody>
+          <a:bodyPr/>
+          <a:lstStyle/>
+          <a:p>
+            <a:pPr algn="ctr"/>
+            <a:r>
+              <a:rPr lang="en-US" dirty="0"/>
+              <a:t>Iowa vs </a:t>
+            </a:r>
+            <a:r>
+              <a:rPr lang="en-US" dirty="0" err="1"/>
+              <a:t>nebraska</a:t>
+            </a:r>
+            <a:endParaRPr lang="en-US" dirty="0"/>
+          </a:p>
+        </p:txBody>
+      </p:sp>
+      <p:pic>
+        <p:nvPicPr>
+          <p:cNvPr id="9" name="Content Placeholder 8">
+            <a:extLst>
+              <a:ext uri="{FF2B5EF4-FFF2-40B4-BE49-F238E27FC236}">
+                <a16:creationId xmlns:a16="http://schemas.microsoft.com/office/drawing/2014/main" id="{6D8104A5-492A-B867-1588-DA822D386C46}"/>
+              </a:ext>
+            </a:extLst>
+          </p:cNvPr>
+          <p:cNvPicPr>
+            <a:picLocks noGrp="1" noChangeAspect="1"/>
+          </p:cNvPicPr>
+          <p:nvPr>
+            <p:ph idx="1"/>
+          </p:nvPr>
+        </p:nvPicPr>
+        <p:blipFill>
+          <a:blip r:embed="rId2">
+            <a:extLst>
+              <a:ext uri="{28A0092B-C50C-407E-A947-70E740481C1C}">
+                <a14:useLocalDpi xmlns:a14="http://schemas.microsoft.com/office/drawing/2010/main" val="0"/>
+              </a:ext>
+            </a:extLst>
+          </a:blip>
+          <a:stretch>
+            <a:fillRect/>
+          </a:stretch>
+        </p:blipFill>
+        <p:spPr>
+          <a:xfrm>
+            <a:off x="2016176" y="1801825"/>
+            <a:ext cx="8046395" cy="4693731"/>
+          </a:xfrm>
+          <a:prstGeom prst="rect">
+            <a:avLst/>
+          </a:prstGeom>
+        </p:spPr>
+      </p:pic>
+    </p:spTree>
+    <p:extLst>
+      <p:ext uri="{BB962C8B-B14F-4D97-AF65-F5344CB8AC3E}">
+        <p14:creationId xmlns:p14="http://schemas.microsoft.com/office/powerpoint/2010/main" val="2586013981"/>
+      </p:ext>
+    </p:extLst>
+  </p:cSld>
+  <p:clrMapOvr>
+    <a:masterClrMapping/>
+  </p:clrMapOvr>
+</p:sld>
+</file>
+
+<file path=ppt/slides/slide11.xml><?xml version="1.0" encoding="utf-8"?>
+<p:sld xmlns:a="http://schemas.openxmlformats.org/drawingml/2006/main" xmlns:r="http://schemas.openxmlformats.org/officeDocument/2006/relationships" xmlns:p="http://schemas.openxmlformats.org/presentationml/2006/main">
+  <p:cSld>
+    <p:spTree>
+      <p:nvGrpSpPr>
+        <p:cNvPr id="1" name=""/>
+        <p:cNvGrpSpPr/>
+        <p:nvPr/>
+      </p:nvGrpSpPr>
+      <p:grpSpPr>
+        <a:xfrm>
+          <a:off x="0" y="0"/>
+          <a:ext cx="0" cy="0"/>
+          <a:chOff x="0" y="0"/>
+          <a:chExt cx="0" cy="0"/>
+        </a:xfrm>
+      </p:grpSpPr>
+      <p:sp>
+        <p:nvSpPr>
+          <p:cNvPr id="2" name="Title 1">
+            <a:extLst>
+              <a:ext uri="{FF2B5EF4-FFF2-40B4-BE49-F238E27FC236}">
                 <a16:creationId xmlns:a16="http://schemas.microsoft.com/office/drawing/2014/main" id="{87CC76A8-3F01-5C0D-B40B-3DE65526991C}"/>
               </a:ext>
             </a:extLst>
@@ -6106,6 +6214,99 @@
           <p:cNvPr id="2" name="Title 1">
             <a:extLst>
               <a:ext uri="{FF2B5EF4-FFF2-40B4-BE49-F238E27FC236}">
+                <a16:creationId xmlns:a16="http://schemas.microsoft.com/office/drawing/2014/main" id="{C66ADF12-678F-CFC9-0215-5A46B60ABF62}"/>
+              </a:ext>
+            </a:extLst>
+          </p:cNvPr>
+          <p:cNvSpPr>
+            <a:spLocks noGrp="1"/>
+          </p:cNvSpPr>
+          <p:nvPr>
+            <p:ph type="title"/>
+          </p:nvPr>
+        </p:nvSpPr>
+        <p:spPr/>
+        <p:txBody>
+          <a:bodyPr/>
+          <a:lstStyle/>
+          <a:p>
+            <a:endParaRPr lang="en-US"/>
+          </a:p>
+        </p:txBody>
+      </p:sp>
+      <p:pic>
+        <p:nvPicPr>
+          <p:cNvPr id="5" name="Content Placeholder 4">
+            <a:extLst>
+              <a:ext uri="{FF2B5EF4-FFF2-40B4-BE49-F238E27FC236}">
+                <a16:creationId xmlns:a16="http://schemas.microsoft.com/office/drawing/2014/main" id="{7297645F-CA10-B69B-4B87-C30023A71EE8}"/>
+              </a:ext>
+            </a:extLst>
+          </p:cNvPr>
+          <p:cNvPicPr>
+            <a:picLocks noGrp="1" noChangeAspect="1"/>
+          </p:cNvPicPr>
+          <p:nvPr>
+            <p:ph idx="1"/>
+          </p:nvPr>
+        </p:nvPicPr>
+        <p:blipFill>
+          <a:blip r:embed="rId2">
+            <a:extLst>
+              <a:ext uri="{28A0092B-C50C-407E-A947-70E740481C1C}">
+                <a14:useLocalDpi xmlns:a14="http://schemas.microsoft.com/office/drawing/2010/main" val="0"/>
+              </a:ext>
+            </a:extLst>
+          </a:blip>
+          <a:stretch>
+            <a:fillRect/>
+          </a:stretch>
+        </p:blipFill>
+        <p:spPr>
+          <a:xfrm>
+            <a:off x="0" y="-1"/>
+            <a:ext cx="12192000" cy="6844481"/>
+          </a:xfrm>
+          <a:prstGeom prst="rect">
+            <a:avLst/>
+          </a:prstGeom>
+        </p:spPr>
+      </p:pic>
+    </p:spTree>
+    <p:extLst>
+      <p:ext uri="{BB962C8B-B14F-4D97-AF65-F5344CB8AC3E}">
+        <p14:creationId xmlns:p14="http://schemas.microsoft.com/office/powerpoint/2010/main" val="1776411503"/>
+      </p:ext>
+    </p:extLst>
+  </p:cSld>
+  <p:clrMapOvr>
+    <a:masterClrMapping/>
+  </p:clrMapOvr>
+</p:sld>
+</file>
+
+<file path=ppt/slides/slide5.xml><?xml version="1.0" encoding="utf-8"?>
+<p:sld xmlns:a="http://schemas.openxmlformats.org/drawingml/2006/main" xmlns:r="http://schemas.openxmlformats.org/officeDocument/2006/relationships" xmlns:p="http://schemas.openxmlformats.org/presentationml/2006/main">
+  <p:cSld>
+    <p:spTree>
+      <p:nvGrpSpPr>
+        <p:cNvPr id="1" name=""/>
+        <p:cNvGrpSpPr/>
+        <p:nvPr/>
+      </p:nvGrpSpPr>
+      <p:grpSpPr>
+        <a:xfrm>
+          <a:off x="0" y="0"/>
+          <a:ext cx="0" cy="0"/>
+          <a:chOff x="0" y="0"/>
+          <a:chExt cx="0" cy="0"/>
+        </a:xfrm>
+      </p:grpSpPr>
+      <p:sp>
+        <p:nvSpPr>
+          <p:cNvPr id="2" name="Title 1">
+            <a:extLst>
+              <a:ext uri="{FF2B5EF4-FFF2-40B4-BE49-F238E27FC236}">
                 <a16:creationId xmlns:a16="http://schemas.microsoft.com/office/drawing/2014/main" id="{EFF0FFF1-386B-4BE8-576D-B328CDE26BCF}"/>
               </a:ext>
             </a:extLst>
@@ -6221,7 +6422,7 @@
 </p:sld>
 </file>
 
-<file path=ppt/slides/slide5.xml><?xml version="1.0" encoding="utf-8"?>
+<file path=ppt/slides/slide6.xml><?xml version="1.0" encoding="utf-8"?>
 <p:sld xmlns:a="http://schemas.openxmlformats.org/drawingml/2006/main" xmlns:r="http://schemas.openxmlformats.org/officeDocument/2006/relationships" xmlns:p="http://schemas.openxmlformats.org/presentationml/2006/main">
   <p:cSld>
     <p:spTree>
@@ -6267,15 +6468,7 @@
             <a:pPr algn="ctr"/>
             <a:r>
               <a:rPr lang="en-US" dirty="0"/>
-              <a:t>Best VS </a:t>
-            </a:r>
-            <a:r>
-              <a:rPr lang="en-US" dirty="0" err="1"/>
-              <a:t>WoRSt</a:t>
-            </a:r>
-            <a:r>
-              <a:rPr lang="en-US" dirty="0"/>
-              <a:t> Offense</a:t>
+              <a:t>Best VS Worst Offense</a:t>
             </a:r>
           </a:p>
         </p:txBody>
@@ -6331,7 +6524,7 @@
 </p:sld>
 </file>
 
-<file path=ppt/slides/slide6.xml><?xml version="1.0" encoding="utf-8"?>
+<file path=ppt/slides/slide7.xml><?xml version="1.0" encoding="utf-8"?>
 <p:sld xmlns:a="http://schemas.openxmlformats.org/drawingml/2006/main" xmlns:r="http://schemas.openxmlformats.org/officeDocument/2006/relationships" xmlns:p="http://schemas.openxmlformats.org/presentationml/2006/main">
   <p:cSld>
     <p:spTree>
@@ -6431,108 +6624,6 @@
 </p:sld>
 </file>
 
-<file path=ppt/slides/slide7.xml><?xml version="1.0" encoding="utf-8"?>
-<p:sld xmlns:a="http://schemas.openxmlformats.org/drawingml/2006/main" xmlns:r="http://schemas.openxmlformats.org/officeDocument/2006/relationships" xmlns:p="http://schemas.openxmlformats.org/presentationml/2006/main">
-  <p:cSld>
-    <p:spTree>
-      <p:nvGrpSpPr>
-        <p:cNvPr id="1" name=""/>
-        <p:cNvGrpSpPr/>
-        <p:nvPr/>
-      </p:nvGrpSpPr>
-      <p:grpSpPr>
-        <a:xfrm>
-          <a:off x="0" y="0"/>
-          <a:ext cx="0" cy="0"/>
-          <a:chOff x="0" y="0"/>
-          <a:chExt cx="0" cy="0"/>
-        </a:xfrm>
-      </p:grpSpPr>
-      <p:sp>
-        <p:nvSpPr>
-          <p:cNvPr id="2" name="Title 1">
-            <a:extLst>
-              <a:ext uri="{FF2B5EF4-FFF2-40B4-BE49-F238E27FC236}">
-                <a16:creationId xmlns:a16="http://schemas.microsoft.com/office/drawing/2014/main" id="{30661C63-F03E-38C3-6F72-CCC250FE0FBB}"/>
-              </a:ext>
-            </a:extLst>
-          </p:cNvPr>
-          <p:cNvSpPr>
-            <a:spLocks noGrp="1"/>
-          </p:cNvSpPr>
-          <p:nvPr>
-            <p:ph type="title"/>
-          </p:nvPr>
-        </p:nvSpPr>
-        <p:spPr>
-          <a:xfrm>
-            <a:off x="1613941" y="639315"/>
-            <a:ext cx="8610600" cy="1293028"/>
-          </a:xfrm>
-        </p:spPr>
-        <p:txBody>
-          <a:bodyPr/>
-          <a:lstStyle/>
-          <a:p>
-            <a:pPr algn="ctr"/>
-            <a:r>
-              <a:rPr lang="en-US" dirty="0"/>
-              <a:t>IOWA</a:t>
-            </a:r>
-          </a:p>
-        </p:txBody>
-      </p:sp>
-      <p:pic>
-        <p:nvPicPr>
-          <p:cNvPr id="9" name="Content Placeholder 8">
-            <a:extLst>
-              <a:ext uri="{FF2B5EF4-FFF2-40B4-BE49-F238E27FC236}">
-                <a16:creationId xmlns:a16="http://schemas.microsoft.com/office/drawing/2014/main" id="{3A2615B3-D697-ADA9-3EEB-C246FA04DA55}"/>
-              </a:ext>
-            </a:extLst>
-          </p:cNvPr>
-          <p:cNvPicPr>
-            <a:picLocks noGrp="1" noChangeAspect="1"/>
-          </p:cNvPicPr>
-          <p:nvPr>
-            <p:ph idx="1"/>
-          </p:nvPr>
-        </p:nvPicPr>
-        <p:blipFill>
-          <a:blip r:embed="rId2">
-            <a:extLst>
-              <a:ext uri="{28A0092B-C50C-407E-A947-70E740481C1C}">
-                <a14:useLocalDpi xmlns:a14="http://schemas.microsoft.com/office/drawing/2010/main" val="0"/>
-              </a:ext>
-            </a:extLst>
-          </a:blip>
-          <a:stretch>
-            <a:fillRect/>
-          </a:stretch>
-        </p:blipFill>
-        <p:spPr>
-          <a:xfrm>
-            <a:off x="1496785" y="2193925"/>
-            <a:ext cx="9198429" cy="4024313"/>
-          </a:xfrm>
-          <a:prstGeom prst="rect">
-            <a:avLst/>
-          </a:prstGeom>
-        </p:spPr>
-      </p:pic>
-    </p:spTree>
-    <p:extLst>
-      <p:ext uri="{BB962C8B-B14F-4D97-AF65-F5344CB8AC3E}">
-        <p14:creationId xmlns:p14="http://schemas.microsoft.com/office/powerpoint/2010/main" val="438428870"/>
-      </p:ext>
-    </p:extLst>
-  </p:cSld>
-  <p:clrMapOvr>
-    <a:masterClrMapping/>
-  </p:clrMapOvr>
-</p:sld>
-</file>
-
 <file path=ppt/slides/slide8.xml><?xml version="1.0" encoding="utf-8"?>
 <p:sld xmlns:a="http://schemas.openxmlformats.org/drawingml/2006/main" xmlns:r="http://schemas.openxmlformats.org/officeDocument/2006/relationships" xmlns:p="http://schemas.openxmlformats.org/presentationml/2006/main">
   <p:cSld>
@@ -6555,7 +6646,7 @@
           <p:cNvPr id="2" name="Title 1">
             <a:extLst>
               <a:ext uri="{FF2B5EF4-FFF2-40B4-BE49-F238E27FC236}">
-                <a16:creationId xmlns:a16="http://schemas.microsoft.com/office/drawing/2014/main" id="{E3CFCE53-7AA0-B96F-5431-B82A677D133E}"/>
+                <a16:creationId xmlns:a16="http://schemas.microsoft.com/office/drawing/2014/main" id="{30661C63-F03E-38C3-6F72-CCC250FE0FBB}"/>
               </a:ext>
             </a:extLst>
           </p:cNvPr>
@@ -6568,7 +6659,7 @@
         </p:nvSpPr>
         <p:spPr>
           <a:xfrm>
-            <a:off x="1524000" y="639315"/>
+            <a:off x="1613941" y="639315"/>
             <a:ext cx="8610600" cy="1293028"/>
           </a:xfrm>
         </p:spPr>
@@ -6579,49 +6670,53 @@
             <a:pPr algn="ctr"/>
             <a:r>
               <a:rPr lang="en-US" dirty="0"/>
-              <a:t>WIN PERCENTAGE</a:t>
-            </a:r>
-          </a:p>
-        </p:txBody>
-      </p:sp>
-      <p:sp>
-        <p:nvSpPr>
-          <p:cNvPr id="3" name="Content Placeholder 2">
+              <a:t>IOWA</a:t>
+            </a:r>
+          </a:p>
+        </p:txBody>
+      </p:sp>
+      <p:pic>
+        <p:nvPicPr>
+          <p:cNvPr id="9" name="Content Placeholder 8">
             <a:extLst>
               <a:ext uri="{FF2B5EF4-FFF2-40B4-BE49-F238E27FC236}">
-                <a16:creationId xmlns:a16="http://schemas.microsoft.com/office/drawing/2014/main" id="{7E0BE363-136E-6CD3-E649-453F7876FD59}"/>
+                <a16:creationId xmlns:a16="http://schemas.microsoft.com/office/drawing/2014/main" id="{3A2615B3-D697-ADA9-3EEB-C246FA04DA55}"/>
               </a:ext>
             </a:extLst>
           </p:cNvPr>
-          <p:cNvSpPr>
-            <a:spLocks noGrp="1"/>
-          </p:cNvSpPr>
+          <p:cNvPicPr>
+            <a:picLocks noGrp="1" noChangeAspect="1"/>
+          </p:cNvPicPr>
           <p:nvPr>
             <p:ph idx="1"/>
           </p:nvPr>
-        </p:nvSpPr>
-        <p:spPr/>
-        <p:txBody>
-          <a:bodyPr/>
-          <a:lstStyle/>
-          <a:p>
-            <a:r>
-              <a:rPr lang="en-US" dirty="0"/>
-              <a:t>Median Win Percentage is 52.09%</a:t>
-            </a:r>
-          </a:p>
-          <a:p>
-            <a:r>
-              <a:rPr lang="en-US" dirty="0"/>
-              <a:t>Iowa’s is 68.03%</a:t>
-            </a:r>
-          </a:p>
-        </p:txBody>
-      </p:sp>
+        </p:nvPicPr>
+        <p:blipFill>
+          <a:blip r:embed="rId2">
+            <a:extLst>
+              <a:ext uri="{28A0092B-C50C-407E-A947-70E740481C1C}">
+                <a14:useLocalDpi xmlns:a14="http://schemas.microsoft.com/office/drawing/2010/main" val="0"/>
+              </a:ext>
+            </a:extLst>
+          </a:blip>
+          <a:stretch>
+            <a:fillRect/>
+          </a:stretch>
+        </p:blipFill>
+        <p:spPr>
+          <a:xfrm>
+            <a:off x="1496785" y="2193925"/>
+            <a:ext cx="9198429" cy="4024313"/>
+          </a:xfrm>
+          <a:prstGeom prst="rect">
+            <a:avLst/>
+          </a:prstGeom>
+        </p:spPr>
+      </p:pic>
     </p:spTree>
     <p:extLst>
       <p:ext uri="{BB962C8B-B14F-4D97-AF65-F5344CB8AC3E}">
-        <p14:creationId xmlns:p14="http://schemas.microsoft.com/office/powerpoint/2010/main" val="1523411130"/>
+        <p14:creationId xmlns:p14="http://schemas.microsoft.com/office/powerpoint/2010/main" val="438428870"/>
       </p:ext>
     </p:extLst>
   </p:cSld>
@@ -6653,7 +6748,7 @@
           <p:cNvPr id="2" name="Title 1">
             <a:extLst>
               <a:ext uri="{FF2B5EF4-FFF2-40B4-BE49-F238E27FC236}">
-                <a16:creationId xmlns:a16="http://schemas.microsoft.com/office/drawing/2014/main" id="{7CF3045E-86D8-F178-F55A-5251FF28A34E}"/>
+                <a16:creationId xmlns:a16="http://schemas.microsoft.com/office/drawing/2014/main" id="{E3CFCE53-7AA0-B96F-5431-B82A677D133E}"/>
               </a:ext>
             </a:extLst>
           </p:cNvPr>
@@ -6666,7 +6761,7 @@
         </p:nvSpPr>
         <p:spPr>
           <a:xfrm>
-            <a:off x="1790700" y="731243"/>
+            <a:off x="1524000" y="639315"/>
             <a:ext cx="8610600" cy="1293028"/>
           </a:xfrm>
         </p:spPr>
@@ -6677,58 +6772,49 @@
             <a:pPr algn="ctr"/>
             <a:r>
               <a:rPr lang="en-US" dirty="0"/>
-              <a:t>Iowa vs </a:t>
-            </a:r>
-            <a:r>
-              <a:rPr lang="en-US" dirty="0" err="1"/>
-              <a:t>nebraska</a:t>
-            </a:r>
-            <a:endParaRPr lang="en-US" dirty="0"/>
-          </a:p>
-        </p:txBody>
-      </p:sp>
-      <p:pic>
-        <p:nvPicPr>
-          <p:cNvPr id="9" name="Content Placeholder 8">
+              <a:t>WIN PERCENTAGE</a:t>
+            </a:r>
+          </a:p>
+        </p:txBody>
+      </p:sp>
+      <p:sp>
+        <p:nvSpPr>
+          <p:cNvPr id="3" name="Content Placeholder 2">
             <a:extLst>
               <a:ext uri="{FF2B5EF4-FFF2-40B4-BE49-F238E27FC236}">
-                <a16:creationId xmlns:a16="http://schemas.microsoft.com/office/drawing/2014/main" id="{6D8104A5-492A-B867-1588-DA822D386C46}"/>
+                <a16:creationId xmlns:a16="http://schemas.microsoft.com/office/drawing/2014/main" id="{7E0BE363-136E-6CD3-E649-453F7876FD59}"/>
               </a:ext>
             </a:extLst>
           </p:cNvPr>
-          <p:cNvPicPr>
-            <a:picLocks noGrp="1" noChangeAspect="1"/>
-          </p:cNvPicPr>
+          <p:cNvSpPr>
+            <a:spLocks noGrp="1"/>
+          </p:cNvSpPr>
           <p:nvPr>
             <p:ph idx="1"/>
           </p:nvPr>
-        </p:nvPicPr>
-        <p:blipFill>
-          <a:blip r:embed="rId2">
-            <a:extLst>
-              <a:ext uri="{28A0092B-C50C-407E-A947-70E740481C1C}">
-                <a14:useLocalDpi xmlns:a14="http://schemas.microsoft.com/office/drawing/2010/main" val="0"/>
-              </a:ext>
-            </a:extLst>
-          </a:blip>
-          <a:stretch>
-            <a:fillRect/>
-          </a:stretch>
-        </p:blipFill>
-        <p:spPr>
-          <a:xfrm>
-            <a:off x="2016176" y="1801825"/>
-            <a:ext cx="8046395" cy="4693731"/>
-          </a:xfrm>
-          <a:prstGeom prst="rect">
-            <a:avLst/>
-          </a:prstGeom>
-        </p:spPr>
-      </p:pic>
+        </p:nvSpPr>
+        <p:spPr/>
+        <p:txBody>
+          <a:bodyPr/>
+          <a:lstStyle/>
+          <a:p>
+            <a:r>
+              <a:rPr lang="en-US" dirty="0"/>
+              <a:t>Median Win Percentage is 52.09%</a:t>
+            </a:r>
+          </a:p>
+          <a:p>
+            <a:r>
+              <a:rPr lang="en-US" dirty="0"/>
+              <a:t>Iowa’s is 68.03%</a:t>
+            </a:r>
+          </a:p>
+        </p:txBody>
+      </p:sp>
     </p:spTree>
     <p:extLst>
       <p:ext uri="{BB962C8B-B14F-4D97-AF65-F5344CB8AC3E}">
-        <p14:creationId xmlns:p14="http://schemas.microsoft.com/office/powerpoint/2010/main" val="2586013981"/>
+        <p14:creationId xmlns:p14="http://schemas.microsoft.com/office/powerpoint/2010/main" val="1523411130"/>
       </p:ext>
     </p:extLst>
   </p:cSld>

--- a/DDI COLLEGE FOOTBALL PRESENTATION.pptx
+++ b/DDI COLLEGE FOOTBALL PRESENTATION.pptx
@@ -4,6 +4,9 @@
   <p:sldMasterIdLst>
     <p:sldMasterId id="2147483672" r:id="rId1"/>
   </p:sldMasterIdLst>
+  <p:notesMasterIdLst>
+    <p:notesMasterId r:id="rId15"/>
+  </p:notesMasterIdLst>
   <p:sldIdLst>
     <p:sldId id="256" r:id="rId2"/>
     <p:sldId id="257" r:id="rId3"/>
@@ -15,7 +18,9 @@
     <p:sldId id="262" r:id="rId9"/>
     <p:sldId id="263" r:id="rId10"/>
     <p:sldId id="264" r:id="rId11"/>
-    <p:sldId id="265" r:id="rId12"/>
+    <p:sldId id="267" r:id="rId12"/>
+    <p:sldId id="268" r:id="rId13"/>
+    <p:sldId id="265" r:id="rId14"/>
   </p:sldIdLst>
   <p:sldSz cx="12192000" cy="6858000"/>
   <p:notesSz cx="6858000" cy="9144000"/>
@@ -120,6 +125,3030 @@
     </p:ext>
   </p:extLst>
 </p:presentation>
+</file>
+
+<file path=ppt/diagrams/colors1.xml><?xml version="1.0" encoding="utf-8"?>
+<dgm:colorsDef xmlns:dgm="http://schemas.openxmlformats.org/drawingml/2006/diagram" xmlns:a="http://schemas.openxmlformats.org/drawingml/2006/main" uniqueId="urn:microsoft.com/office/officeart/2018/5/colors/Iconchunking_neutralbg_colorful1">
+  <dgm:title val=""/>
+  <dgm:desc val=""/>
+  <dgm:catLst>
+    <dgm:cat type="colorful" pri="10100"/>
+  </dgm:catLst>
+  <dgm:styleLbl name="node0">
+    <dgm:fillClrLst meth="repeat">
+      <a:schemeClr val="accent1"/>
+    </dgm:fillClrLst>
+    <dgm:linClrLst meth="repeat">
+      <a:schemeClr val="lt1"/>
+    </dgm:linClrLst>
+    <dgm:effectClrLst/>
+    <dgm:txLinClrLst/>
+    <dgm:txFillClrLst/>
+    <dgm:txEffectClrLst/>
+  </dgm:styleLbl>
+  <dgm:styleLbl name="node1">
+    <dgm:fillClrLst meth="repeat">
+      <a:schemeClr val="accent2"/>
+      <a:schemeClr val="accent3"/>
+      <a:schemeClr val="accent4"/>
+      <a:schemeClr val="accent5"/>
+      <a:schemeClr val="accent6"/>
+    </dgm:fillClrLst>
+    <dgm:linClrLst meth="repeat">
+      <a:schemeClr val="lt1">
+        <a:alpha val="0"/>
+      </a:schemeClr>
+    </dgm:linClrLst>
+    <dgm:effectClrLst/>
+    <dgm:txLinClrLst/>
+    <dgm:txFillClrLst/>
+    <dgm:txEffectClrLst/>
+  </dgm:styleLbl>
+  <dgm:styleLbl name="alignNode1">
+    <dgm:fillClrLst meth="repeat">
+      <a:schemeClr val="accent2"/>
+      <a:schemeClr val="accent3"/>
+      <a:schemeClr val="accent4"/>
+      <a:schemeClr val="accent5"/>
+      <a:schemeClr val="accent6"/>
+    </dgm:fillClrLst>
+    <dgm:linClrLst meth="repeat">
+      <a:schemeClr val="accent2"/>
+      <a:schemeClr val="accent3"/>
+      <a:schemeClr val="accent4"/>
+      <a:schemeClr val="accent5"/>
+      <a:schemeClr val="accent6"/>
+    </dgm:linClrLst>
+    <dgm:effectClrLst/>
+    <dgm:txLinClrLst/>
+    <dgm:txFillClrLst/>
+    <dgm:txEffectClrLst/>
+  </dgm:styleLbl>
+  <dgm:styleLbl name="lnNode1">
+    <dgm:fillClrLst meth="repeat">
+      <a:schemeClr val="accent2"/>
+      <a:schemeClr val="accent3"/>
+      <a:schemeClr val="accent4"/>
+      <a:schemeClr val="accent5"/>
+      <a:schemeClr val="accent6"/>
+    </dgm:fillClrLst>
+    <dgm:linClrLst meth="repeat">
+      <a:schemeClr val="lt1"/>
+    </dgm:linClrLst>
+    <dgm:effectClrLst/>
+    <dgm:txLinClrLst/>
+    <dgm:txFillClrLst/>
+    <dgm:txEffectClrLst/>
+  </dgm:styleLbl>
+  <dgm:styleLbl name="vennNode1">
+    <dgm:fillClrLst meth="repeat">
+      <a:schemeClr val="accent2">
+        <a:alpha val="50000"/>
+      </a:schemeClr>
+      <a:schemeClr val="accent3">
+        <a:alpha val="50000"/>
+      </a:schemeClr>
+      <a:schemeClr val="accent4">
+        <a:alpha val="50000"/>
+      </a:schemeClr>
+      <a:schemeClr val="accent5">
+        <a:alpha val="50000"/>
+      </a:schemeClr>
+      <a:schemeClr val="accent6">
+        <a:alpha val="50000"/>
+      </a:schemeClr>
+    </dgm:fillClrLst>
+    <dgm:linClrLst meth="repeat">
+      <a:schemeClr val="lt1"/>
+    </dgm:linClrLst>
+    <dgm:effectClrLst/>
+    <dgm:txLinClrLst/>
+    <dgm:txFillClrLst/>
+    <dgm:txEffectClrLst/>
+  </dgm:styleLbl>
+  <dgm:styleLbl name="node2">
+    <dgm:fillClrLst>
+      <a:schemeClr val="accent2"/>
+    </dgm:fillClrLst>
+    <dgm:linClrLst meth="repeat">
+      <a:schemeClr val="lt1"/>
+    </dgm:linClrLst>
+    <dgm:effectClrLst/>
+    <dgm:txLinClrLst/>
+    <dgm:txFillClrLst/>
+    <dgm:txEffectClrLst/>
+  </dgm:styleLbl>
+  <dgm:styleLbl name="node3">
+    <dgm:fillClrLst>
+      <a:schemeClr val="accent3"/>
+    </dgm:fillClrLst>
+    <dgm:linClrLst meth="repeat">
+      <a:schemeClr val="lt1"/>
+    </dgm:linClrLst>
+    <dgm:effectClrLst/>
+    <dgm:txLinClrLst/>
+    <dgm:txFillClrLst/>
+    <dgm:txEffectClrLst/>
+  </dgm:styleLbl>
+  <dgm:styleLbl name="node4">
+    <dgm:fillClrLst>
+      <a:schemeClr val="accent4"/>
+    </dgm:fillClrLst>
+    <dgm:linClrLst meth="repeat">
+      <a:schemeClr val="lt1"/>
+    </dgm:linClrLst>
+    <dgm:effectClrLst/>
+    <dgm:txLinClrLst/>
+    <dgm:txFillClrLst/>
+    <dgm:txEffectClrLst/>
+  </dgm:styleLbl>
+  <dgm:styleLbl name="fgImgPlace1">
+    <dgm:fillClrLst meth="repeat">
+      <a:schemeClr val="accent2">
+        <a:tint val="50000"/>
+      </a:schemeClr>
+      <a:schemeClr val="accent3">
+        <a:tint val="50000"/>
+      </a:schemeClr>
+      <a:schemeClr val="accent4">
+        <a:tint val="50000"/>
+      </a:schemeClr>
+      <a:schemeClr val="accent5">
+        <a:tint val="50000"/>
+      </a:schemeClr>
+      <a:schemeClr val="accent6">
+        <a:tint val="50000"/>
+      </a:schemeClr>
+    </dgm:fillClrLst>
+    <dgm:linClrLst meth="repeat">
+      <a:schemeClr val="lt1"/>
+    </dgm:linClrLst>
+    <dgm:effectClrLst/>
+    <dgm:txLinClrLst/>
+    <dgm:txFillClrLst meth="repeat">
+      <a:schemeClr val="lt1"/>
+    </dgm:txFillClrLst>
+    <dgm:txEffectClrLst/>
+  </dgm:styleLbl>
+  <dgm:styleLbl name="alignImgPlace1">
+    <dgm:fillClrLst>
+      <a:schemeClr val="accent1">
+        <a:tint val="50000"/>
+      </a:schemeClr>
+      <a:schemeClr val="accent2">
+        <a:tint val="20000"/>
+      </a:schemeClr>
+    </dgm:fillClrLst>
+    <dgm:linClrLst meth="repeat">
+      <a:schemeClr val="lt1"/>
+    </dgm:linClrLst>
+    <dgm:effectClrLst/>
+    <dgm:txLinClrLst/>
+    <dgm:txFillClrLst meth="repeat">
+      <a:schemeClr val="lt1"/>
+    </dgm:txFillClrLst>
+    <dgm:txEffectClrLst/>
+  </dgm:styleLbl>
+  <dgm:styleLbl name="bgImgPlace1">
+    <dgm:fillClrLst>
+      <a:schemeClr val="accent1">
+        <a:tint val="50000"/>
+      </a:schemeClr>
+      <a:schemeClr val="accent2">
+        <a:tint val="20000"/>
+      </a:schemeClr>
+    </dgm:fillClrLst>
+    <dgm:linClrLst meth="repeat">
+      <a:schemeClr val="lt1"/>
+    </dgm:linClrLst>
+    <dgm:effectClrLst/>
+    <dgm:txLinClrLst/>
+    <dgm:txFillClrLst meth="repeat">
+      <a:schemeClr val="lt1"/>
+    </dgm:txFillClrLst>
+    <dgm:txEffectClrLst/>
+  </dgm:styleLbl>
+  <dgm:styleLbl name="sibTrans2D1">
+    <dgm:fillClrLst meth="repeat">
+      <a:schemeClr val="accent2"/>
+      <a:schemeClr val="accent3"/>
+      <a:schemeClr val="accent4"/>
+      <a:schemeClr val="accent5"/>
+      <a:schemeClr val="accent6"/>
+    </dgm:fillClrLst>
+    <dgm:linClrLst meth="cycle">
+      <a:schemeClr val="lt1"/>
+    </dgm:linClrLst>
+    <dgm:effectClrLst/>
+    <dgm:txLinClrLst/>
+    <dgm:txFillClrLst/>
+    <dgm:txEffectClrLst/>
+  </dgm:styleLbl>
+  <dgm:styleLbl name="fgSibTrans2D1">
+    <dgm:fillClrLst meth="repeat">
+      <a:schemeClr val="accent2"/>
+      <a:schemeClr val="accent3"/>
+      <a:schemeClr val="accent4"/>
+      <a:schemeClr val="accent5"/>
+      <a:schemeClr val="accent6"/>
+    </dgm:fillClrLst>
+    <dgm:linClrLst meth="cycle">
+      <a:schemeClr val="lt1"/>
+    </dgm:linClrLst>
+    <dgm:effectClrLst/>
+    <dgm:txLinClrLst/>
+    <dgm:txFillClrLst meth="repeat">
+      <a:schemeClr val="lt1"/>
+    </dgm:txFillClrLst>
+    <dgm:txEffectClrLst/>
+  </dgm:styleLbl>
+  <dgm:styleLbl name="bgSibTrans2D1">
+    <dgm:fillClrLst meth="repeat">
+      <a:schemeClr val="accent2"/>
+      <a:schemeClr val="accent3"/>
+      <a:schemeClr val="accent4"/>
+      <a:schemeClr val="accent5"/>
+      <a:schemeClr val="accent6"/>
+    </dgm:fillClrLst>
+    <dgm:linClrLst meth="cycle">
+      <a:schemeClr val="lt1"/>
+    </dgm:linClrLst>
+    <dgm:effectClrLst/>
+    <dgm:txLinClrLst/>
+    <dgm:txFillClrLst meth="repeat">
+      <a:schemeClr val="lt1"/>
+    </dgm:txFillClrLst>
+    <dgm:txEffectClrLst/>
+  </dgm:styleLbl>
+  <dgm:styleLbl name="sibTrans1D1">
+    <dgm:fillClrLst meth="repeat">
+      <a:schemeClr val="accent2"/>
+      <a:schemeClr val="accent3"/>
+      <a:schemeClr val="accent4"/>
+      <a:schemeClr val="accent5"/>
+      <a:schemeClr val="accent6"/>
+    </dgm:fillClrLst>
+    <dgm:linClrLst meth="repeat">
+      <a:schemeClr val="accent2"/>
+      <a:schemeClr val="accent3"/>
+      <a:schemeClr val="accent4"/>
+      <a:schemeClr val="accent5"/>
+      <a:schemeClr val="accent6"/>
+    </dgm:linClrLst>
+    <dgm:effectClrLst/>
+    <dgm:txLinClrLst/>
+    <dgm:txFillClrLst meth="repeat">
+      <a:schemeClr val="tx1"/>
+    </dgm:txFillClrLst>
+    <dgm:txEffectClrLst/>
+  </dgm:styleLbl>
+  <dgm:styleLbl name="callout">
+    <dgm:fillClrLst meth="repeat">
+      <a:schemeClr val="accent2"/>
+    </dgm:fillClrLst>
+    <dgm:linClrLst meth="repeat">
+      <a:schemeClr val="accent2">
+        <a:tint val="50000"/>
+      </a:schemeClr>
+    </dgm:linClrLst>
+    <dgm:effectClrLst/>
+    <dgm:txLinClrLst/>
+    <dgm:txFillClrLst meth="repeat">
+      <a:schemeClr val="tx1"/>
+    </dgm:txFillClrLst>
+    <dgm:txEffectClrLst/>
+  </dgm:styleLbl>
+  <dgm:styleLbl name="asst0">
+    <dgm:fillClrLst meth="repeat">
+      <a:schemeClr val="accent1"/>
+    </dgm:fillClrLst>
+    <dgm:linClrLst meth="repeat">
+      <a:schemeClr val="lt1"/>
+    </dgm:linClrLst>
+    <dgm:effectClrLst/>
+    <dgm:txLinClrLst/>
+    <dgm:txFillClrLst/>
+    <dgm:txEffectClrLst/>
+  </dgm:styleLbl>
+  <dgm:styleLbl name="asst1">
+    <dgm:fillClrLst meth="repeat">
+      <a:schemeClr val="accent2"/>
+    </dgm:fillClrLst>
+    <dgm:linClrLst meth="repeat">
+      <a:schemeClr val="lt1"/>
+    </dgm:linClrLst>
+    <dgm:effectClrLst/>
+    <dgm:txLinClrLst/>
+    <dgm:txFillClrLst/>
+    <dgm:txEffectClrLst/>
+  </dgm:styleLbl>
+  <dgm:styleLbl name="asst2">
+    <dgm:fillClrLst>
+      <a:schemeClr val="accent3"/>
+    </dgm:fillClrLst>
+    <dgm:linClrLst meth="repeat">
+      <a:schemeClr val="lt1"/>
+    </dgm:linClrLst>
+    <dgm:effectClrLst/>
+    <dgm:txLinClrLst/>
+    <dgm:txFillClrLst/>
+    <dgm:txEffectClrLst/>
+  </dgm:styleLbl>
+  <dgm:styleLbl name="asst3">
+    <dgm:fillClrLst>
+      <a:schemeClr val="accent4"/>
+    </dgm:fillClrLst>
+    <dgm:linClrLst meth="repeat">
+      <a:schemeClr val="lt1"/>
+    </dgm:linClrLst>
+    <dgm:effectClrLst/>
+    <dgm:txLinClrLst/>
+    <dgm:txFillClrLst/>
+    <dgm:txEffectClrLst/>
+  </dgm:styleLbl>
+  <dgm:styleLbl name="asst4">
+    <dgm:fillClrLst>
+      <a:schemeClr val="accent5"/>
+    </dgm:fillClrLst>
+    <dgm:linClrLst meth="repeat">
+      <a:schemeClr val="lt1"/>
+    </dgm:linClrLst>
+    <dgm:effectClrLst/>
+    <dgm:txLinClrLst/>
+    <dgm:txFillClrLst/>
+    <dgm:txEffectClrLst/>
+  </dgm:styleLbl>
+  <dgm:styleLbl name="parChTrans2D1">
+    <dgm:fillClrLst meth="repeat">
+      <a:schemeClr val="accent2"/>
+    </dgm:fillClrLst>
+    <dgm:linClrLst meth="repeat">
+      <a:schemeClr val="lt1"/>
+    </dgm:linClrLst>
+    <dgm:effectClrLst/>
+    <dgm:txLinClrLst/>
+    <dgm:txFillClrLst meth="repeat">
+      <a:schemeClr val="lt1"/>
+    </dgm:txFillClrLst>
+    <dgm:txEffectClrLst/>
+  </dgm:styleLbl>
+  <dgm:styleLbl name="parChTrans2D2">
+    <dgm:fillClrLst meth="repeat">
+      <a:schemeClr val="accent3"/>
+    </dgm:fillClrLst>
+    <dgm:linClrLst meth="repeat">
+      <a:schemeClr val="lt1"/>
+    </dgm:linClrLst>
+    <dgm:effectClrLst/>
+    <dgm:txLinClrLst/>
+    <dgm:txFillClrLst/>
+    <dgm:txEffectClrLst/>
+  </dgm:styleLbl>
+  <dgm:styleLbl name="parChTrans2D3">
+    <dgm:fillClrLst meth="repeat">
+      <a:schemeClr val="accent4"/>
+    </dgm:fillClrLst>
+    <dgm:linClrLst meth="repeat">
+      <a:schemeClr val="lt1"/>
+    </dgm:linClrLst>
+    <dgm:effectClrLst/>
+    <dgm:txLinClrLst/>
+    <dgm:txFillClrLst/>
+    <dgm:txEffectClrLst/>
+  </dgm:styleLbl>
+  <dgm:styleLbl name="parChTrans2D4">
+    <dgm:fillClrLst meth="repeat">
+      <a:schemeClr val="accent5"/>
+    </dgm:fillClrLst>
+    <dgm:linClrLst meth="repeat">
+      <a:schemeClr val="lt1"/>
+    </dgm:linClrLst>
+    <dgm:effectClrLst/>
+    <dgm:txLinClrLst/>
+    <dgm:txFillClrLst meth="repeat">
+      <a:schemeClr val="lt1"/>
+    </dgm:txFillClrLst>
+    <dgm:txEffectClrLst/>
+  </dgm:styleLbl>
+  <dgm:styleLbl name="parChTrans1D1">
+    <dgm:fillClrLst meth="repeat">
+      <a:schemeClr val="accent2"/>
+    </dgm:fillClrLst>
+    <dgm:linClrLst meth="repeat">
+      <a:schemeClr val="accent1"/>
+    </dgm:linClrLst>
+    <dgm:effectClrLst/>
+    <dgm:txLinClrLst/>
+    <dgm:txFillClrLst meth="repeat">
+      <a:schemeClr val="tx1"/>
+    </dgm:txFillClrLst>
+    <dgm:txEffectClrLst/>
+  </dgm:styleLbl>
+  <dgm:styleLbl name="parChTrans1D2">
+    <dgm:fillClrLst meth="repeat">
+      <a:schemeClr val="accent3">
+        <a:tint val="90000"/>
+      </a:schemeClr>
+    </dgm:fillClrLst>
+    <dgm:linClrLst meth="repeat">
+      <a:schemeClr val="accent2"/>
+    </dgm:linClrLst>
+    <dgm:effectClrLst/>
+    <dgm:txLinClrLst/>
+    <dgm:txFillClrLst meth="repeat">
+      <a:schemeClr val="tx1"/>
+    </dgm:txFillClrLst>
+    <dgm:txEffectClrLst/>
+  </dgm:styleLbl>
+  <dgm:styleLbl name="parChTrans1D3">
+    <dgm:fillClrLst meth="repeat">
+      <a:schemeClr val="accent4">
+        <a:tint val="70000"/>
+      </a:schemeClr>
+    </dgm:fillClrLst>
+    <dgm:linClrLst meth="repeat">
+      <a:schemeClr val="accent3"/>
+    </dgm:linClrLst>
+    <dgm:effectClrLst/>
+    <dgm:txLinClrLst/>
+    <dgm:txFillClrLst meth="repeat">
+      <a:schemeClr val="tx1"/>
+    </dgm:txFillClrLst>
+    <dgm:txEffectClrLst/>
+  </dgm:styleLbl>
+  <dgm:styleLbl name="parChTrans1D4">
+    <dgm:fillClrLst meth="repeat">
+      <a:schemeClr val="accent5">
+        <a:tint val="50000"/>
+      </a:schemeClr>
+    </dgm:fillClrLst>
+    <dgm:linClrLst meth="repeat">
+      <a:schemeClr val="accent4"/>
+    </dgm:linClrLst>
+    <dgm:effectClrLst/>
+    <dgm:txLinClrLst/>
+    <dgm:txFillClrLst meth="repeat">
+      <a:schemeClr val="tx1"/>
+    </dgm:txFillClrLst>
+    <dgm:txEffectClrLst/>
+  </dgm:styleLbl>
+  <dgm:styleLbl name="fgAcc1">
+    <dgm:fillClrLst meth="repeat">
+      <a:schemeClr val="lt1">
+        <a:alpha val="90000"/>
+      </a:schemeClr>
+    </dgm:fillClrLst>
+    <dgm:linClrLst meth="repeat">
+      <a:schemeClr val="accent2"/>
+      <a:schemeClr val="accent3"/>
+      <a:schemeClr val="accent4"/>
+      <a:schemeClr val="accent5"/>
+      <a:schemeClr val="accent6"/>
+    </dgm:linClrLst>
+    <dgm:effectClrLst/>
+    <dgm:txLinClrLst/>
+    <dgm:txFillClrLst meth="repeat">
+      <a:schemeClr val="dk1"/>
+    </dgm:txFillClrLst>
+    <dgm:txEffectClrLst/>
+  </dgm:styleLbl>
+  <dgm:styleLbl name="conFgAcc1">
+    <dgm:fillClrLst meth="repeat">
+      <a:schemeClr val="lt1">
+        <a:alpha val="90000"/>
+      </a:schemeClr>
+    </dgm:fillClrLst>
+    <dgm:linClrLst meth="repeat">
+      <a:schemeClr val="accent2"/>
+      <a:schemeClr val="accent3"/>
+      <a:schemeClr val="accent4"/>
+      <a:schemeClr val="accent5"/>
+      <a:schemeClr val="accent6"/>
+    </dgm:linClrLst>
+    <dgm:effectClrLst/>
+    <dgm:txLinClrLst/>
+    <dgm:txFillClrLst meth="repeat">
+      <a:schemeClr val="dk1"/>
+    </dgm:txFillClrLst>
+    <dgm:txEffectClrLst/>
+  </dgm:styleLbl>
+  <dgm:styleLbl name="alignAcc1">
+    <dgm:fillClrLst meth="repeat">
+      <a:schemeClr val="lt1">
+        <a:alpha val="90000"/>
+      </a:schemeClr>
+    </dgm:fillClrLst>
+    <dgm:linClrLst meth="repeat">
+      <a:schemeClr val="accent2"/>
+      <a:schemeClr val="accent3"/>
+      <a:schemeClr val="accent4"/>
+      <a:schemeClr val="accent5"/>
+      <a:schemeClr val="accent6"/>
+    </dgm:linClrLst>
+    <dgm:effectClrLst/>
+    <dgm:txLinClrLst/>
+    <dgm:txFillClrLst meth="repeat">
+      <a:schemeClr val="dk1"/>
+    </dgm:txFillClrLst>
+    <dgm:txEffectClrLst/>
+  </dgm:styleLbl>
+  <dgm:styleLbl name="trAlignAcc1">
+    <dgm:fillClrLst meth="repeat">
+      <a:schemeClr val="lt1">
+        <a:alpha val="40000"/>
+      </a:schemeClr>
+    </dgm:fillClrLst>
+    <dgm:linClrLst meth="repeat">
+      <a:schemeClr val="accent1"/>
+    </dgm:linClrLst>
+    <dgm:effectClrLst/>
+    <dgm:txLinClrLst/>
+    <dgm:txFillClrLst meth="repeat">
+      <a:schemeClr val="dk1"/>
+    </dgm:txFillClrLst>
+    <dgm:txEffectClrLst/>
+  </dgm:styleLbl>
+  <dgm:styleLbl name="bgAcc1">
+    <dgm:fillClrLst meth="repeat">
+      <a:schemeClr val="lt1">
+        <a:alpha val="90000"/>
+      </a:schemeClr>
+    </dgm:fillClrLst>
+    <dgm:linClrLst meth="repeat">
+      <a:schemeClr val="accent2"/>
+      <a:schemeClr val="accent3"/>
+      <a:schemeClr val="accent4"/>
+      <a:schemeClr val="accent5"/>
+      <a:schemeClr val="accent6"/>
+    </dgm:linClrLst>
+    <dgm:effectClrLst/>
+    <dgm:txLinClrLst/>
+    <dgm:txFillClrLst meth="repeat">
+      <a:schemeClr val="dk1"/>
+    </dgm:txFillClrLst>
+    <dgm:txEffectClrLst/>
+  </dgm:styleLbl>
+  <dgm:styleLbl name="solidFgAcc1">
+    <dgm:fillClrLst meth="repeat">
+      <a:schemeClr val="lt1"/>
+    </dgm:fillClrLst>
+    <dgm:linClrLst meth="repeat">
+      <a:schemeClr val="accent2"/>
+      <a:schemeClr val="accent3"/>
+      <a:schemeClr val="accent4"/>
+      <a:schemeClr val="accent5"/>
+      <a:schemeClr val="accent6"/>
+    </dgm:linClrLst>
+    <dgm:effectClrLst/>
+    <dgm:txLinClrLst/>
+    <dgm:txFillClrLst meth="repeat">
+      <a:schemeClr val="dk1"/>
+    </dgm:txFillClrLst>
+    <dgm:txEffectClrLst/>
+  </dgm:styleLbl>
+  <dgm:styleLbl name="solidAlignAcc1">
+    <dgm:fillClrLst meth="repeat">
+      <a:schemeClr val="lt1"/>
+    </dgm:fillClrLst>
+    <dgm:linClrLst meth="repeat">
+      <a:schemeClr val="accent2"/>
+      <a:schemeClr val="accent3"/>
+      <a:schemeClr val="accent4"/>
+      <a:schemeClr val="accent5"/>
+      <a:schemeClr val="accent6"/>
+    </dgm:linClrLst>
+    <dgm:effectClrLst/>
+    <dgm:txLinClrLst/>
+    <dgm:txFillClrLst meth="repeat">
+      <a:schemeClr val="dk1"/>
+    </dgm:txFillClrLst>
+    <dgm:txEffectClrLst/>
+  </dgm:styleLbl>
+  <dgm:styleLbl name="solidBgAcc1">
+    <dgm:fillClrLst meth="repeat">
+      <a:schemeClr val="lt1"/>
+    </dgm:fillClrLst>
+    <dgm:linClrLst meth="repeat">
+      <a:schemeClr val="accent2"/>
+      <a:schemeClr val="accent3"/>
+      <a:schemeClr val="accent4"/>
+      <a:schemeClr val="accent5"/>
+      <a:schemeClr val="accent6"/>
+    </dgm:linClrLst>
+    <dgm:effectClrLst/>
+    <dgm:txLinClrLst/>
+    <dgm:txFillClrLst meth="repeat">
+      <a:schemeClr val="dk1"/>
+    </dgm:txFillClrLst>
+    <dgm:txEffectClrLst/>
+  </dgm:styleLbl>
+  <dgm:styleLbl name="fgAccFollowNode1">
+    <dgm:fillClrLst meth="repeat">
+      <a:schemeClr val="accent2">
+        <a:tint val="40000"/>
+        <a:alpha val="90000"/>
+      </a:schemeClr>
+      <a:schemeClr val="accent3">
+        <a:tint val="40000"/>
+        <a:alpha val="90000"/>
+      </a:schemeClr>
+      <a:schemeClr val="accent4">
+        <a:tint val="40000"/>
+        <a:alpha val="90000"/>
+      </a:schemeClr>
+      <a:schemeClr val="accent5">
+        <a:tint val="40000"/>
+        <a:alpha val="90000"/>
+      </a:schemeClr>
+      <a:schemeClr val="accent6">
+        <a:tint val="40000"/>
+        <a:alpha val="90000"/>
+      </a:schemeClr>
+    </dgm:fillClrLst>
+    <dgm:linClrLst meth="repeat">
+      <a:schemeClr val="accent2">
+        <a:tint val="40000"/>
+        <a:alpha val="90000"/>
+      </a:schemeClr>
+      <a:schemeClr val="accent3">
+        <a:tint val="40000"/>
+        <a:alpha val="90000"/>
+      </a:schemeClr>
+      <a:schemeClr val="accent4">
+        <a:tint val="40000"/>
+        <a:alpha val="90000"/>
+      </a:schemeClr>
+      <a:schemeClr val="accent5">
+        <a:tint val="40000"/>
+        <a:alpha val="90000"/>
+      </a:schemeClr>
+      <a:schemeClr val="accent6">
+        <a:tint val="40000"/>
+        <a:alpha val="90000"/>
+      </a:schemeClr>
+    </dgm:linClrLst>
+    <dgm:effectClrLst/>
+    <dgm:txLinClrLst/>
+    <dgm:txFillClrLst meth="repeat">
+      <a:schemeClr val="dk1"/>
+    </dgm:txFillClrLst>
+    <dgm:txEffectClrLst/>
+  </dgm:styleLbl>
+  <dgm:styleLbl name="alignAccFollowNode1">
+    <dgm:fillClrLst meth="repeat">
+      <a:schemeClr val="accent2">
+        <a:tint val="40000"/>
+        <a:alpha val="90000"/>
+      </a:schemeClr>
+      <a:schemeClr val="accent3">
+        <a:tint val="40000"/>
+        <a:alpha val="90000"/>
+      </a:schemeClr>
+      <a:schemeClr val="accent4">
+        <a:tint val="40000"/>
+        <a:alpha val="90000"/>
+      </a:schemeClr>
+      <a:schemeClr val="accent5">
+        <a:tint val="40000"/>
+        <a:alpha val="90000"/>
+      </a:schemeClr>
+      <a:schemeClr val="accent6">
+        <a:tint val="40000"/>
+        <a:alpha val="90000"/>
+      </a:schemeClr>
+    </dgm:fillClrLst>
+    <dgm:linClrLst meth="repeat">
+      <a:schemeClr val="accent2">
+        <a:tint val="40000"/>
+        <a:alpha val="90000"/>
+      </a:schemeClr>
+      <a:schemeClr val="accent3">
+        <a:tint val="40000"/>
+        <a:alpha val="90000"/>
+      </a:schemeClr>
+      <a:schemeClr val="accent4">
+        <a:tint val="40000"/>
+        <a:alpha val="90000"/>
+      </a:schemeClr>
+      <a:schemeClr val="accent5">
+        <a:tint val="40000"/>
+        <a:alpha val="90000"/>
+      </a:schemeClr>
+      <a:schemeClr val="accent6">
+        <a:tint val="40000"/>
+        <a:alpha val="90000"/>
+      </a:schemeClr>
+    </dgm:linClrLst>
+    <dgm:effectClrLst/>
+    <dgm:txLinClrLst/>
+    <dgm:txFillClrLst meth="repeat">
+      <a:schemeClr val="dk1"/>
+    </dgm:txFillClrLst>
+    <dgm:txEffectClrLst/>
+  </dgm:styleLbl>
+  <dgm:styleLbl name="bgAccFollowNode1">
+    <dgm:fillClrLst meth="repeat">
+      <a:schemeClr val="accent2">
+        <a:tint val="40000"/>
+        <a:alpha val="90000"/>
+      </a:schemeClr>
+      <a:schemeClr val="accent3">
+        <a:tint val="40000"/>
+        <a:alpha val="90000"/>
+      </a:schemeClr>
+      <a:schemeClr val="accent4">
+        <a:tint val="40000"/>
+        <a:alpha val="90000"/>
+      </a:schemeClr>
+      <a:schemeClr val="accent5">
+        <a:tint val="40000"/>
+        <a:alpha val="90000"/>
+      </a:schemeClr>
+      <a:schemeClr val="accent6">
+        <a:tint val="40000"/>
+        <a:alpha val="90000"/>
+      </a:schemeClr>
+    </dgm:fillClrLst>
+    <dgm:linClrLst meth="repeat">
+      <a:schemeClr val="accent2">
+        <a:tint val="40000"/>
+        <a:alpha val="90000"/>
+      </a:schemeClr>
+      <a:schemeClr val="accent3">
+        <a:tint val="40000"/>
+        <a:alpha val="90000"/>
+      </a:schemeClr>
+      <a:schemeClr val="accent4">
+        <a:tint val="40000"/>
+        <a:alpha val="90000"/>
+      </a:schemeClr>
+      <a:schemeClr val="accent5">
+        <a:tint val="40000"/>
+        <a:alpha val="90000"/>
+      </a:schemeClr>
+      <a:schemeClr val="accent6">
+        <a:tint val="40000"/>
+        <a:alpha val="90000"/>
+      </a:schemeClr>
+    </dgm:linClrLst>
+    <dgm:effectClrLst/>
+    <dgm:txLinClrLst/>
+    <dgm:txFillClrLst meth="repeat">
+      <a:schemeClr val="dk1"/>
+    </dgm:txFillClrLst>
+    <dgm:txEffectClrLst/>
+  </dgm:styleLbl>
+  <dgm:styleLbl name="fgAcc0">
+    <dgm:fillClrLst meth="repeat">
+      <a:schemeClr val="lt1">
+        <a:alpha val="90000"/>
+      </a:schemeClr>
+    </dgm:fillClrLst>
+    <dgm:linClrLst>
+      <a:schemeClr val="accent1"/>
+    </dgm:linClrLst>
+    <dgm:effectClrLst/>
+    <dgm:txLinClrLst/>
+    <dgm:txFillClrLst meth="repeat">
+      <a:schemeClr val="dk1"/>
+    </dgm:txFillClrLst>
+    <dgm:txEffectClrLst/>
+  </dgm:styleLbl>
+  <dgm:styleLbl name="fgAcc2">
+    <dgm:fillClrLst meth="repeat">
+      <a:schemeClr val="lt1">
+        <a:alpha val="90000"/>
+      </a:schemeClr>
+    </dgm:fillClrLst>
+    <dgm:linClrLst>
+      <a:schemeClr val="accent2"/>
+    </dgm:linClrLst>
+    <dgm:effectClrLst/>
+    <dgm:txLinClrLst/>
+    <dgm:txFillClrLst meth="repeat">
+      <a:schemeClr val="dk1"/>
+    </dgm:txFillClrLst>
+    <dgm:txEffectClrLst/>
+  </dgm:styleLbl>
+  <dgm:styleLbl name="fgAcc3">
+    <dgm:fillClrLst meth="repeat">
+      <a:schemeClr val="lt1">
+        <a:alpha val="90000"/>
+      </a:schemeClr>
+    </dgm:fillClrLst>
+    <dgm:linClrLst>
+      <a:schemeClr val="accent3"/>
+    </dgm:linClrLst>
+    <dgm:effectClrLst/>
+    <dgm:txLinClrLst/>
+    <dgm:txFillClrLst meth="repeat">
+      <a:schemeClr val="dk1"/>
+    </dgm:txFillClrLst>
+    <dgm:txEffectClrLst/>
+  </dgm:styleLbl>
+  <dgm:styleLbl name="fgAcc4">
+    <dgm:fillClrLst meth="repeat">
+      <a:schemeClr val="lt1">
+        <a:alpha val="90000"/>
+      </a:schemeClr>
+    </dgm:fillClrLst>
+    <dgm:linClrLst>
+      <a:schemeClr val="accent4"/>
+    </dgm:linClrLst>
+    <dgm:effectClrLst/>
+    <dgm:txLinClrLst/>
+    <dgm:txFillClrLst meth="repeat">
+      <a:schemeClr val="dk1"/>
+    </dgm:txFillClrLst>
+    <dgm:txEffectClrLst/>
+  </dgm:styleLbl>
+  <dgm:styleLbl name="bgShp">
+    <dgm:fillClrLst meth="repeat">
+      <a:schemeClr val="bg1">
+        <a:lumMod val="95000"/>
+      </a:schemeClr>
+    </dgm:fillClrLst>
+    <dgm:linClrLst meth="repeat">
+      <a:schemeClr val="dk1"/>
+    </dgm:linClrLst>
+    <dgm:effectClrLst/>
+    <dgm:txLinClrLst/>
+    <dgm:txFillClrLst meth="repeat">
+      <a:schemeClr val="dk1"/>
+    </dgm:txFillClrLst>
+    <dgm:txEffectClrLst/>
+  </dgm:styleLbl>
+  <dgm:styleLbl name="dkBgShp">
+    <dgm:fillClrLst meth="repeat">
+      <a:schemeClr val="accent2">
+        <a:shade val="90000"/>
+      </a:schemeClr>
+    </dgm:fillClrLst>
+    <dgm:linClrLst meth="repeat">
+      <a:schemeClr val="dk1"/>
+    </dgm:linClrLst>
+    <dgm:effectClrLst/>
+    <dgm:txLinClrLst/>
+    <dgm:txFillClrLst meth="repeat">
+      <a:schemeClr val="lt1"/>
+    </dgm:txFillClrLst>
+    <dgm:txEffectClrLst/>
+  </dgm:styleLbl>
+  <dgm:styleLbl name="trBgShp">
+    <dgm:fillClrLst meth="repeat">
+      <a:schemeClr val="accent1">
+        <a:tint val="50000"/>
+        <a:alpha val="40000"/>
+      </a:schemeClr>
+    </dgm:fillClrLst>
+    <dgm:linClrLst meth="repeat">
+      <a:schemeClr val="accent2"/>
+    </dgm:linClrLst>
+    <dgm:effectClrLst/>
+    <dgm:txLinClrLst/>
+    <dgm:txFillClrLst meth="repeat">
+      <a:schemeClr val="lt1"/>
+    </dgm:txFillClrLst>
+    <dgm:txEffectClrLst/>
+  </dgm:styleLbl>
+  <dgm:styleLbl name="fgShp">
+    <dgm:fillClrLst meth="repeat">
+      <a:schemeClr val="accent2">
+        <a:tint val="40000"/>
+      </a:schemeClr>
+    </dgm:fillClrLst>
+    <dgm:linClrLst meth="repeat">
+      <a:schemeClr val="lt1"/>
+    </dgm:linClrLst>
+    <dgm:effectClrLst/>
+    <dgm:txLinClrLst/>
+    <dgm:txFillClrLst meth="repeat">
+      <a:schemeClr val="dk1"/>
+    </dgm:txFillClrLst>
+    <dgm:txEffectClrLst/>
+  </dgm:styleLbl>
+  <dgm:styleLbl name="revTx">
+    <dgm:fillClrLst meth="repeat">
+      <a:schemeClr val="lt1">
+        <a:alpha val="0"/>
+      </a:schemeClr>
+    </dgm:fillClrLst>
+    <dgm:linClrLst meth="repeat">
+      <a:schemeClr val="dk1">
+        <a:alpha val="0"/>
+      </a:schemeClr>
+    </dgm:linClrLst>
+    <dgm:effectClrLst/>
+    <dgm:txLinClrLst/>
+    <dgm:txFillClrLst meth="repeat">
+      <a:schemeClr val="tx1"/>
+    </dgm:txFillClrLst>
+    <dgm:txEffectClrLst/>
+  </dgm:styleLbl>
+</dgm:colorsDef>
+</file>
+
+<file path=ppt/diagrams/data1.xml><?xml version="1.0" encoding="utf-8"?>
+<dgm:dataModel xmlns:dgm="http://schemas.openxmlformats.org/drawingml/2006/diagram" xmlns:a="http://schemas.openxmlformats.org/drawingml/2006/main">
+  <dgm:ptLst>
+    <dgm:pt modelId="{CAAB5980-0878-4DFD-8351-9FF5F794D82E}" type="doc">
+      <dgm:prSet loTypeId="urn:microsoft.com/office/officeart/2018/2/layout/IconLabelList" loCatId="icon" qsTypeId="urn:microsoft.com/office/officeart/2005/8/quickstyle/simple1" qsCatId="simple" csTypeId="urn:microsoft.com/office/officeart/2018/5/colors/Iconchunking_neutralbg_colorful1" csCatId="colorful" phldr="1"/>
+      <dgm:spPr/>
+      <dgm:t>
+        <a:bodyPr/>
+        <a:lstStyle/>
+        <a:p>
+          <a:endParaRPr lang="en-US"/>
+        </a:p>
+      </dgm:t>
+    </dgm:pt>
+    <dgm:pt modelId="{7F19A18A-3811-4BE4-8C25-6409AEBE4139}">
+      <dgm:prSet/>
+      <dgm:spPr/>
+      <dgm:t>
+        <a:bodyPr/>
+        <a:lstStyle/>
+        <a:p>
+          <a:r>
+            <a:rPr lang="en-US"/>
+            <a:t>Median Win Percentage is 52.09%</a:t>
+          </a:r>
+        </a:p>
+      </dgm:t>
+    </dgm:pt>
+    <dgm:pt modelId="{49E8EAE6-CA9E-402F-B29D-66E11B15F7B9}" type="parTrans" cxnId="{6A8B702C-F7F8-4BAB-AF5A-2E3EB584C86C}">
+      <dgm:prSet/>
+      <dgm:spPr/>
+      <dgm:t>
+        <a:bodyPr/>
+        <a:lstStyle/>
+        <a:p>
+          <a:endParaRPr lang="en-US"/>
+        </a:p>
+      </dgm:t>
+    </dgm:pt>
+    <dgm:pt modelId="{7D1DD667-1BB6-423E-86C0-24CC8A9BD690}" type="sibTrans" cxnId="{6A8B702C-F7F8-4BAB-AF5A-2E3EB584C86C}">
+      <dgm:prSet/>
+      <dgm:spPr/>
+      <dgm:t>
+        <a:bodyPr/>
+        <a:lstStyle/>
+        <a:p>
+          <a:endParaRPr lang="en-US"/>
+        </a:p>
+      </dgm:t>
+    </dgm:pt>
+    <dgm:pt modelId="{950B280E-0C5E-4C1C-A589-8C19842C8D0D}">
+      <dgm:prSet/>
+      <dgm:spPr/>
+      <dgm:t>
+        <a:bodyPr/>
+        <a:lstStyle/>
+        <a:p>
+          <a:r>
+            <a:rPr lang="en-US"/>
+            <a:t>Iowa’s is 68.03%</a:t>
+          </a:r>
+        </a:p>
+      </dgm:t>
+    </dgm:pt>
+    <dgm:pt modelId="{F3486443-1180-4108-B1E6-EB46BF2DDD58}" type="parTrans" cxnId="{E7ACD135-C16D-40EC-8985-4F42584DD789}">
+      <dgm:prSet/>
+      <dgm:spPr/>
+      <dgm:t>
+        <a:bodyPr/>
+        <a:lstStyle/>
+        <a:p>
+          <a:endParaRPr lang="en-US"/>
+        </a:p>
+      </dgm:t>
+    </dgm:pt>
+    <dgm:pt modelId="{2F9B87ED-E4B8-4990-8FEE-45EE25A599F1}" type="sibTrans" cxnId="{E7ACD135-C16D-40EC-8985-4F42584DD789}">
+      <dgm:prSet/>
+      <dgm:spPr/>
+      <dgm:t>
+        <a:bodyPr/>
+        <a:lstStyle/>
+        <a:p>
+          <a:endParaRPr lang="en-US"/>
+        </a:p>
+      </dgm:t>
+    </dgm:pt>
+    <dgm:pt modelId="{1699ABA7-3244-4749-968F-C05A51A4F179}" type="pres">
+      <dgm:prSet presAssocID="{CAAB5980-0878-4DFD-8351-9FF5F794D82E}" presName="root" presStyleCnt="0">
+        <dgm:presLayoutVars>
+          <dgm:dir/>
+          <dgm:resizeHandles val="exact"/>
+        </dgm:presLayoutVars>
+      </dgm:prSet>
+      <dgm:spPr/>
+    </dgm:pt>
+    <dgm:pt modelId="{D819F77B-4033-4269-9D20-BB42D0916F6B}" type="pres">
+      <dgm:prSet presAssocID="{7F19A18A-3811-4BE4-8C25-6409AEBE4139}" presName="compNode" presStyleCnt="0"/>
+      <dgm:spPr/>
+    </dgm:pt>
+    <dgm:pt modelId="{103034AC-56F5-4B44-846C-73DD2E1C58E3}" type="pres">
+      <dgm:prSet presAssocID="{7F19A18A-3811-4BE4-8C25-6409AEBE4139}" presName="iconRect" presStyleLbl="node1" presStyleIdx="0" presStyleCnt="2"/>
+      <dgm:spPr>
+        <a:blipFill>
+          <a:blip xmlns:r="http://schemas.openxmlformats.org/officeDocument/2006/relationships" r:embed="rId1">
+            <a:extLst>
+              <a:ext uri="{28A0092B-C50C-407E-A947-70E740481C1C}">
+                <a14:useLocalDpi xmlns:a14="http://schemas.microsoft.com/office/drawing/2010/main" val="0"/>
+              </a:ext>
+              <a:ext uri="{96DAC541-7B7A-43D3-8B79-37D633B846F1}">
+                <asvg:svgBlip xmlns:asvg="http://schemas.microsoft.com/office/drawing/2016/SVG/main" r:embed="rId2"/>
+              </a:ext>
+            </a:extLst>
+          </a:blip>
+          <a:stretch>
+            <a:fillRect/>
+          </a:stretch>
+        </a:blipFill>
+        <a:ln>
+          <a:noFill/>
+        </a:ln>
+      </dgm:spPr>
+      <dgm:extLst>
+        <a:ext uri="{E40237B7-FDA0-4F09-8148-C483321AD2D9}">
+          <dgm14:cNvPr xmlns:dgm14="http://schemas.microsoft.com/office/drawing/2010/diagram" id="0" name="" descr="Medal"/>
+        </a:ext>
+      </dgm:extLst>
+    </dgm:pt>
+    <dgm:pt modelId="{3259D555-9F73-4BDA-8B10-F9FF9D1C1ED6}" type="pres">
+      <dgm:prSet presAssocID="{7F19A18A-3811-4BE4-8C25-6409AEBE4139}" presName="spaceRect" presStyleCnt="0"/>
+      <dgm:spPr/>
+    </dgm:pt>
+    <dgm:pt modelId="{3A745E43-11E4-4557-B9C0-E141E45EA32A}" type="pres">
+      <dgm:prSet presAssocID="{7F19A18A-3811-4BE4-8C25-6409AEBE4139}" presName="textRect" presStyleLbl="revTx" presStyleIdx="0" presStyleCnt="2">
+        <dgm:presLayoutVars>
+          <dgm:chMax val="1"/>
+          <dgm:chPref val="1"/>
+        </dgm:presLayoutVars>
+      </dgm:prSet>
+      <dgm:spPr/>
+    </dgm:pt>
+    <dgm:pt modelId="{CB2C6684-FDA9-4B39-9AF8-241C08216CAE}" type="pres">
+      <dgm:prSet presAssocID="{7D1DD667-1BB6-423E-86C0-24CC8A9BD690}" presName="sibTrans" presStyleCnt="0"/>
+      <dgm:spPr/>
+    </dgm:pt>
+    <dgm:pt modelId="{6619B34D-1FC0-46AD-ADD3-9FC1355DAF97}" type="pres">
+      <dgm:prSet presAssocID="{950B280E-0C5E-4C1C-A589-8C19842C8D0D}" presName="compNode" presStyleCnt="0"/>
+      <dgm:spPr/>
+    </dgm:pt>
+    <dgm:pt modelId="{D2F92E68-1D4F-4456-91FB-2F8A479F3689}" type="pres">
+      <dgm:prSet presAssocID="{950B280E-0C5E-4C1C-A589-8C19842C8D0D}" presName="iconRect" presStyleLbl="node1" presStyleIdx="1" presStyleCnt="2"/>
+      <dgm:spPr>
+        <a:blipFill>
+          <a:blip xmlns:r="http://schemas.openxmlformats.org/officeDocument/2006/relationships" r:embed="rId3">
+            <a:extLst>
+              <a:ext uri="{28A0092B-C50C-407E-A947-70E740481C1C}">
+                <a14:useLocalDpi xmlns:a14="http://schemas.microsoft.com/office/drawing/2010/main" val="0"/>
+              </a:ext>
+              <a:ext uri="{96DAC541-7B7A-43D3-8B79-37D633B846F1}">
+                <asvg:svgBlip xmlns:asvg="http://schemas.microsoft.com/office/drawing/2016/SVG/main" r:embed="rId4"/>
+              </a:ext>
+            </a:extLst>
+          </a:blip>
+          <a:stretch>
+            <a:fillRect/>
+          </a:stretch>
+        </a:blipFill>
+        <a:ln>
+          <a:noFill/>
+        </a:ln>
+      </dgm:spPr>
+      <dgm:extLst>
+        <a:ext uri="{E40237B7-FDA0-4F09-8148-C483321AD2D9}">
+          <dgm14:cNvPr xmlns:dgm14="http://schemas.microsoft.com/office/drawing/2010/diagram" id="0" name="" descr="Cupcake"/>
+        </a:ext>
+      </dgm:extLst>
+    </dgm:pt>
+    <dgm:pt modelId="{F0F88C58-F5EF-42DE-9992-45EDD10CA27A}" type="pres">
+      <dgm:prSet presAssocID="{950B280E-0C5E-4C1C-A589-8C19842C8D0D}" presName="spaceRect" presStyleCnt="0"/>
+      <dgm:spPr/>
+    </dgm:pt>
+    <dgm:pt modelId="{812A46B1-7C12-4421-B290-901E6D9096E4}" type="pres">
+      <dgm:prSet presAssocID="{950B280E-0C5E-4C1C-A589-8C19842C8D0D}" presName="textRect" presStyleLbl="revTx" presStyleIdx="1" presStyleCnt="2">
+        <dgm:presLayoutVars>
+          <dgm:chMax val="1"/>
+          <dgm:chPref val="1"/>
+        </dgm:presLayoutVars>
+      </dgm:prSet>
+      <dgm:spPr/>
+    </dgm:pt>
+  </dgm:ptLst>
+  <dgm:cxnLst>
+    <dgm:cxn modelId="{6A8B702C-F7F8-4BAB-AF5A-2E3EB584C86C}" srcId="{CAAB5980-0878-4DFD-8351-9FF5F794D82E}" destId="{7F19A18A-3811-4BE4-8C25-6409AEBE4139}" srcOrd="0" destOrd="0" parTransId="{49E8EAE6-CA9E-402F-B29D-66E11B15F7B9}" sibTransId="{7D1DD667-1BB6-423E-86C0-24CC8A9BD690}"/>
+    <dgm:cxn modelId="{E7ACD135-C16D-40EC-8985-4F42584DD789}" srcId="{CAAB5980-0878-4DFD-8351-9FF5F794D82E}" destId="{950B280E-0C5E-4C1C-A589-8C19842C8D0D}" srcOrd="1" destOrd="0" parTransId="{F3486443-1180-4108-B1E6-EB46BF2DDD58}" sibTransId="{2F9B87ED-E4B8-4990-8FEE-45EE25A599F1}"/>
+    <dgm:cxn modelId="{9E01C060-1DF0-44F1-96BE-340B211418BF}" type="presOf" srcId="{7F19A18A-3811-4BE4-8C25-6409AEBE4139}" destId="{3A745E43-11E4-4557-B9C0-E141E45EA32A}" srcOrd="0" destOrd="0" presId="urn:microsoft.com/office/officeart/2018/2/layout/IconLabelList"/>
+    <dgm:cxn modelId="{6B326F85-6B36-4CE5-8543-1D9C8AE0062E}" type="presOf" srcId="{CAAB5980-0878-4DFD-8351-9FF5F794D82E}" destId="{1699ABA7-3244-4749-968F-C05A51A4F179}" srcOrd="0" destOrd="0" presId="urn:microsoft.com/office/officeart/2018/2/layout/IconLabelList"/>
+    <dgm:cxn modelId="{719748D0-C44D-44DB-9756-2D85258B6CD7}" type="presOf" srcId="{950B280E-0C5E-4C1C-A589-8C19842C8D0D}" destId="{812A46B1-7C12-4421-B290-901E6D9096E4}" srcOrd="0" destOrd="0" presId="urn:microsoft.com/office/officeart/2018/2/layout/IconLabelList"/>
+    <dgm:cxn modelId="{F58AB46B-DE0D-41FA-81E5-1B45B2FC8749}" type="presParOf" srcId="{1699ABA7-3244-4749-968F-C05A51A4F179}" destId="{D819F77B-4033-4269-9D20-BB42D0916F6B}" srcOrd="0" destOrd="0" presId="urn:microsoft.com/office/officeart/2018/2/layout/IconLabelList"/>
+    <dgm:cxn modelId="{1B421B6D-0913-4917-BFC9-9C626A1A6F25}" type="presParOf" srcId="{D819F77B-4033-4269-9D20-BB42D0916F6B}" destId="{103034AC-56F5-4B44-846C-73DD2E1C58E3}" srcOrd="0" destOrd="0" presId="urn:microsoft.com/office/officeart/2018/2/layout/IconLabelList"/>
+    <dgm:cxn modelId="{FB48281A-64CD-43D8-8E14-0CEC1A8621CF}" type="presParOf" srcId="{D819F77B-4033-4269-9D20-BB42D0916F6B}" destId="{3259D555-9F73-4BDA-8B10-F9FF9D1C1ED6}" srcOrd="1" destOrd="0" presId="urn:microsoft.com/office/officeart/2018/2/layout/IconLabelList"/>
+    <dgm:cxn modelId="{ADD4A236-CB19-4066-8520-0A3406703F97}" type="presParOf" srcId="{D819F77B-4033-4269-9D20-BB42D0916F6B}" destId="{3A745E43-11E4-4557-B9C0-E141E45EA32A}" srcOrd="2" destOrd="0" presId="urn:microsoft.com/office/officeart/2018/2/layout/IconLabelList"/>
+    <dgm:cxn modelId="{8A5BE2F6-34E6-46ED-B12E-83C417479B45}" type="presParOf" srcId="{1699ABA7-3244-4749-968F-C05A51A4F179}" destId="{CB2C6684-FDA9-4B39-9AF8-241C08216CAE}" srcOrd="1" destOrd="0" presId="urn:microsoft.com/office/officeart/2018/2/layout/IconLabelList"/>
+    <dgm:cxn modelId="{CAAA0A5B-CF7F-4CE4-A7D7-F126214E0AAF}" type="presParOf" srcId="{1699ABA7-3244-4749-968F-C05A51A4F179}" destId="{6619B34D-1FC0-46AD-ADD3-9FC1355DAF97}" srcOrd="2" destOrd="0" presId="urn:microsoft.com/office/officeart/2018/2/layout/IconLabelList"/>
+    <dgm:cxn modelId="{9DC7BB5D-77FE-4EC0-94BF-4F9FB1448712}" type="presParOf" srcId="{6619B34D-1FC0-46AD-ADD3-9FC1355DAF97}" destId="{D2F92E68-1D4F-4456-91FB-2F8A479F3689}" srcOrd="0" destOrd="0" presId="urn:microsoft.com/office/officeart/2018/2/layout/IconLabelList"/>
+    <dgm:cxn modelId="{C19B39DB-4C74-49FF-B346-B3B0A1B3E45E}" type="presParOf" srcId="{6619B34D-1FC0-46AD-ADD3-9FC1355DAF97}" destId="{F0F88C58-F5EF-42DE-9992-45EDD10CA27A}" srcOrd="1" destOrd="0" presId="urn:microsoft.com/office/officeart/2018/2/layout/IconLabelList"/>
+    <dgm:cxn modelId="{94D3E02A-7DE7-430E-BBDB-4F79E1C3ECFB}" type="presParOf" srcId="{6619B34D-1FC0-46AD-ADD3-9FC1355DAF97}" destId="{812A46B1-7C12-4421-B290-901E6D9096E4}" srcOrd="2" destOrd="0" presId="urn:microsoft.com/office/officeart/2018/2/layout/IconLabelList"/>
+  </dgm:cxnLst>
+  <dgm:bg/>
+  <dgm:whole/>
+  <dgm:extLst>
+    <a:ext uri="http://schemas.microsoft.com/office/drawing/2008/diagram">
+      <dsp:dataModelExt xmlns:dsp="http://schemas.microsoft.com/office/drawing/2008/diagram" relId="rId6" minVer="http://schemas.openxmlformats.org/drawingml/2006/diagram"/>
+    </a:ext>
+  </dgm:extLst>
+</dgm:dataModel>
+</file>
+
+<file path=ppt/diagrams/drawing1.xml><?xml version="1.0" encoding="utf-8"?>
+<dsp:drawing xmlns:dgm="http://schemas.openxmlformats.org/drawingml/2006/diagram" xmlns:dsp="http://schemas.microsoft.com/office/drawing/2008/diagram" xmlns:a="http://schemas.openxmlformats.org/drawingml/2006/main">
+  <dsp:spTree>
+    <dsp:nvGrpSpPr>
+      <dsp:cNvPr id="0" name=""/>
+      <dsp:cNvGrpSpPr/>
+    </dsp:nvGrpSpPr>
+    <dsp:grpSpPr/>
+    <dsp:sp modelId="{103034AC-56F5-4B44-846C-73DD2E1C58E3}">
+      <dsp:nvSpPr>
+        <dsp:cNvPr id="0" name=""/>
+        <dsp:cNvSpPr/>
+      </dsp:nvSpPr>
+      <dsp:spPr>
+        <a:xfrm>
+          <a:off x="1900200" y="197854"/>
+          <a:ext cx="1944000" cy="1944000"/>
+        </a:xfrm>
+        <a:prstGeom prst="rect">
+          <a:avLst/>
+        </a:prstGeom>
+        <a:blipFill>
+          <a:blip xmlns:r="http://schemas.openxmlformats.org/officeDocument/2006/relationships" r:embed="rId1">
+            <a:extLst>
+              <a:ext uri="{28A0092B-C50C-407E-A947-70E740481C1C}">
+                <a14:useLocalDpi xmlns:a14="http://schemas.microsoft.com/office/drawing/2010/main" val="0"/>
+              </a:ext>
+              <a:ext uri="{96DAC541-7B7A-43D3-8B79-37D633B846F1}">
+                <asvg:svgBlip xmlns:asvg="http://schemas.microsoft.com/office/drawing/2016/SVG/main" r:embed="rId2"/>
+              </a:ext>
+            </a:extLst>
+          </a:blip>
+          <a:stretch>
+            <a:fillRect/>
+          </a:stretch>
+        </a:blipFill>
+        <a:ln w="12700" cap="flat" cmpd="sng" algn="ctr">
+          <a:noFill/>
+          <a:prstDash val="solid"/>
+        </a:ln>
+        <a:effectLst/>
+      </dsp:spPr>
+      <dsp:style>
+        <a:lnRef idx="2">
+          <a:scrgbClr r="0" g="0" b="0"/>
+        </a:lnRef>
+        <a:fillRef idx="1">
+          <a:scrgbClr r="0" g="0" b="0"/>
+        </a:fillRef>
+        <a:effectRef idx="0">
+          <a:scrgbClr r="0" g="0" b="0"/>
+        </a:effectRef>
+        <a:fontRef idx="minor">
+          <a:schemeClr val="lt1"/>
+        </a:fontRef>
+      </dsp:style>
+    </dsp:sp>
+    <dsp:sp modelId="{3A745E43-11E4-4557-B9C0-E141E45EA32A}">
+      <dsp:nvSpPr>
+        <dsp:cNvPr id="0" name=""/>
+        <dsp:cNvSpPr/>
+      </dsp:nvSpPr>
+      <dsp:spPr>
+        <a:xfrm>
+          <a:off x="712199" y="2612207"/>
+          <a:ext cx="4320000" cy="720000"/>
+        </a:xfrm>
+        <a:prstGeom prst="rect">
+          <a:avLst/>
+        </a:prstGeom>
+        <a:noFill/>
+        <a:ln>
+          <a:noFill/>
+        </a:ln>
+        <a:effectLst/>
+      </dsp:spPr>
+      <dsp:style>
+        <a:lnRef idx="0">
+          <a:scrgbClr r="0" g="0" b="0"/>
+        </a:lnRef>
+        <a:fillRef idx="0">
+          <a:scrgbClr r="0" g="0" b="0"/>
+        </a:fillRef>
+        <a:effectRef idx="0">
+          <a:scrgbClr r="0" g="0" b="0"/>
+        </a:effectRef>
+        <a:fontRef idx="minor"/>
+      </dsp:style>
+      <dsp:txBody>
+        <a:bodyPr spcFirstLastPara="0" vert="horz" wrap="square" lIns="0" tIns="0" rIns="0" bIns="0" numCol="1" spcCol="1270" anchor="t" anchorCtr="0">
+          <a:noAutofit/>
+        </a:bodyPr>
+        <a:lstStyle/>
+        <a:p>
+          <a:pPr marL="0" lvl="0" indent="0" algn="ctr" defTabSz="1111250">
+            <a:lnSpc>
+              <a:spcPct val="90000"/>
+            </a:lnSpc>
+            <a:spcBef>
+              <a:spcPct val="0"/>
+            </a:spcBef>
+            <a:spcAft>
+              <a:spcPct val="35000"/>
+            </a:spcAft>
+            <a:buNone/>
+          </a:pPr>
+          <a:r>
+            <a:rPr lang="en-US" sz="2500" kern="1200"/>
+            <a:t>Median Win Percentage is 52.09%</a:t>
+          </a:r>
+        </a:p>
+      </dsp:txBody>
+      <dsp:txXfrm>
+        <a:off x="712199" y="2612207"/>
+        <a:ext cx="4320000" cy="720000"/>
+      </dsp:txXfrm>
+    </dsp:sp>
+    <dsp:sp modelId="{D2F92E68-1D4F-4456-91FB-2F8A479F3689}">
+      <dsp:nvSpPr>
+        <dsp:cNvPr id="0" name=""/>
+        <dsp:cNvSpPr/>
+      </dsp:nvSpPr>
+      <dsp:spPr>
+        <a:xfrm>
+          <a:off x="6976200" y="197854"/>
+          <a:ext cx="1944000" cy="1944000"/>
+        </a:xfrm>
+        <a:prstGeom prst="rect">
+          <a:avLst/>
+        </a:prstGeom>
+        <a:blipFill>
+          <a:blip xmlns:r="http://schemas.openxmlformats.org/officeDocument/2006/relationships" r:embed="rId3">
+            <a:extLst>
+              <a:ext uri="{28A0092B-C50C-407E-A947-70E740481C1C}">
+                <a14:useLocalDpi xmlns:a14="http://schemas.microsoft.com/office/drawing/2010/main" val="0"/>
+              </a:ext>
+              <a:ext uri="{96DAC541-7B7A-43D3-8B79-37D633B846F1}">
+                <asvg:svgBlip xmlns:asvg="http://schemas.microsoft.com/office/drawing/2016/SVG/main" r:embed="rId4"/>
+              </a:ext>
+            </a:extLst>
+          </a:blip>
+          <a:stretch>
+            <a:fillRect/>
+          </a:stretch>
+        </a:blipFill>
+        <a:ln w="12700" cap="flat" cmpd="sng" algn="ctr">
+          <a:noFill/>
+          <a:prstDash val="solid"/>
+        </a:ln>
+        <a:effectLst/>
+      </dsp:spPr>
+      <dsp:style>
+        <a:lnRef idx="2">
+          <a:scrgbClr r="0" g="0" b="0"/>
+        </a:lnRef>
+        <a:fillRef idx="1">
+          <a:scrgbClr r="0" g="0" b="0"/>
+        </a:fillRef>
+        <a:effectRef idx="0">
+          <a:scrgbClr r="0" g="0" b="0"/>
+        </a:effectRef>
+        <a:fontRef idx="minor">
+          <a:schemeClr val="lt1"/>
+        </a:fontRef>
+      </dsp:style>
+    </dsp:sp>
+    <dsp:sp modelId="{812A46B1-7C12-4421-B290-901E6D9096E4}">
+      <dsp:nvSpPr>
+        <dsp:cNvPr id="0" name=""/>
+        <dsp:cNvSpPr/>
+      </dsp:nvSpPr>
+      <dsp:spPr>
+        <a:xfrm>
+          <a:off x="5788200" y="2612207"/>
+          <a:ext cx="4320000" cy="720000"/>
+        </a:xfrm>
+        <a:prstGeom prst="rect">
+          <a:avLst/>
+        </a:prstGeom>
+        <a:noFill/>
+        <a:ln>
+          <a:noFill/>
+        </a:ln>
+        <a:effectLst/>
+      </dsp:spPr>
+      <dsp:style>
+        <a:lnRef idx="0">
+          <a:scrgbClr r="0" g="0" b="0"/>
+        </a:lnRef>
+        <a:fillRef idx="0">
+          <a:scrgbClr r="0" g="0" b="0"/>
+        </a:fillRef>
+        <a:effectRef idx="0">
+          <a:scrgbClr r="0" g="0" b="0"/>
+        </a:effectRef>
+        <a:fontRef idx="minor"/>
+      </dsp:style>
+      <dsp:txBody>
+        <a:bodyPr spcFirstLastPara="0" vert="horz" wrap="square" lIns="0" tIns="0" rIns="0" bIns="0" numCol="1" spcCol="1270" anchor="t" anchorCtr="0">
+          <a:noAutofit/>
+        </a:bodyPr>
+        <a:lstStyle/>
+        <a:p>
+          <a:pPr marL="0" lvl="0" indent="0" algn="ctr" defTabSz="1111250">
+            <a:lnSpc>
+              <a:spcPct val="90000"/>
+            </a:lnSpc>
+            <a:spcBef>
+              <a:spcPct val="0"/>
+            </a:spcBef>
+            <a:spcAft>
+              <a:spcPct val="35000"/>
+            </a:spcAft>
+            <a:buNone/>
+          </a:pPr>
+          <a:r>
+            <a:rPr lang="en-US" sz="2500" kern="1200"/>
+            <a:t>Iowa’s is 68.03%</a:t>
+          </a:r>
+        </a:p>
+      </dsp:txBody>
+      <dsp:txXfrm>
+        <a:off x="5788200" y="2612207"/>
+        <a:ext cx="4320000" cy="720000"/>
+      </dsp:txXfrm>
+    </dsp:sp>
+  </dsp:spTree>
+</dsp:drawing>
+</file>
+
+<file path=ppt/diagrams/layout1.xml><?xml version="1.0" encoding="utf-8"?>
+<dgm:layoutDef xmlns:dgm="http://schemas.openxmlformats.org/drawingml/2006/diagram" xmlns:a="http://schemas.openxmlformats.org/drawingml/2006/main" uniqueId="urn:microsoft.com/office/officeart/2018/2/layout/IconLabelList">
+  <dgm:title val="Icon Label List"/>
+  <dgm:desc val="Use to show non-sequential or grouped chunks of information accompanied by a related visuals. Works best with icons or small pictures with short text captions."/>
+  <dgm:catLst>
+    <dgm:cat type="icon" pri="500"/>
+  </dgm:catLst>
+  <dgm:sampData useDef="1">
+    <dgm:dataModel>
+      <dgm:ptLst/>
+      <dgm:bg/>
+      <dgm:whole/>
+    </dgm:dataModel>
+  </dgm:sampData>
+  <dgm:styleData useDef="1">
+    <dgm:dataModel>
+      <dgm:ptLst/>
+      <dgm:bg/>
+      <dgm:whole/>
+    </dgm:dataModel>
+  </dgm:styleData>
+  <dgm:clrData useDef="1">
+    <dgm:dataModel>
+      <dgm:ptLst/>
+      <dgm:bg/>
+      <dgm:whole/>
+    </dgm:dataModel>
+  </dgm:clrData>
+  <dgm:layoutNode name="root">
+    <dgm:varLst>
+      <dgm:dir/>
+      <dgm:resizeHandles val="exact"/>
+    </dgm:varLst>
+    <dgm:choose name="Name0">
+      <dgm:if name="Name1" axis="self" func="var" arg="dir" op="equ" val="norm">
+        <dgm:alg type="snake">
+          <dgm:param type="grDir" val="tL"/>
+          <dgm:param type="flowDir" val="row"/>
+          <dgm:param type="contDir" val="sameDir"/>
+          <dgm:param type="off" val="ctr"/>
+          <dgm:param type="vertAlign" val="mid"/>
+          <dgm:param type="horzAlign" val="ctr"/>
+        </dgm:alg>
+      </dgm:if>
+      <dgm:else name="Name2">
+        <dgm:alg type="snake">
+          <dgm:param type="grDir" val="tR"/>
+          <dgm:param type="flowDir" val="row"/>
+          <dgm:param type="contDir" val="sameDir"/>
+          <dgm:param type="off" val="ctr"/>
+          <dgm:param type="vertAlign" val="mid"/>
+          <dgm:param type="horzAlign" val="ctr"/>
+        </dgm:alg>
+      </dgm:else>
+    </dgm:choose>
+    <dgm:shape xmlns:r="http://schemas.openxmlformats.org/officeDocument/2006/relationships" r:blip="">
+      <dgm:adjLst/>
+    </dgm:shape>
+    <dgm:presOf/>
+    <dgm:choose name="Name3">
+      <dgm:if name="Name4" axis="ch" ptType="node" func="cnt" op="lte" val="2">
+        <dgm:constrLst>
+          <dgm:constr type="h" for="ch" forName="compNode" refType="h" fact="0.4"/>
+          <dgm:constr type="w" for="ch" forName="compNode" val="120"/>
+          <dgm:constr type="w" for="ch" forName="sibTrans" refType="w" refFor="ch" refForName="compNode" fact="0.175"/>
+          <dgm:constr type="sp" refType="w" refFor="ch" refForName="compNode" op="equ" fact="0.25"/>
+          <dgm:constr type="primFontSz" for="des" ptType="node" op="equ" val="50"/>
+          <dgm:constr type="h" for="des" forName="compNode" op="equ"/>
+          <dgm:constr type="h" for="des" forName="textRect" op="equ"/>
+        </dgm:constrLst>
+      </dgm:if>
+      <dgm:if name="Name5" axis="ch" ptType="node" func="cnt" op="lte" val="4">
+        <dgm:constrLst>
+          <dgm:constr type="h" for="ch" forName="compNode" refType="h" fact="0.4"/>
+          <dgm:constr type="w" for="ch" forName="compNode" refType="w"/>
+          <dgm:constr type="w" for="ch" forName="sibTrans" refType="w" refFor="ch" refForName="compNode" fact="0.175"/>
+          <dgm:constr type="sp" refType="w" refFor="ch" refForName="compNode" op="equ" fact="0.25"/>
+          <dgm:constr type="primFontSz" for="des" ptType="node" op="equ" val="36"/>
+          <dgm:constr type="h" for="des" forName="compNode" op="equ"/>
+          <dgm:constr type="h" for="des" forName="textRect" op="equ"/>
+        </dgm:constrLst>
+      </dgm:if>
+      <dgm:else name="Name6">
+        <dgm:constrLst>
+          <dgm:constr type="h" for="ch" forName="compNode" refType="h" fact="0.4"/>
+          <dgm:constr type="w" for="ch" forName="compNode" refType="w"/>
+          <dgm:constr type="w" for="ch" forName="sibTrans" refType="w" refFor="ch" refForName="compNode" fact="0.175"/>
+          <dgm:constr type="sp" refType="w" refFor="ch" refForName="compNode" op="equ" fact="0.25"/>
+          <dgm:constr type="primFontSz" for="des" ptType="node" op="equ" val="24"/>
+          <dgm:constr type="h" for="des" forName="compNode" op="equ"/>
+          <dgm:constr type="h" for="des" forName="textRect" op="equ"/>
+        </dgm:constrLst>
+      </dgm:else>
+    </dgm:choose>
+    <dgm:ruleLst>
+      <dgm:rule type="w" for="ch" forName="compNode" val="50" fact="NaN" max="NaN"/>
+    </dgm:ruleLst>
+    <dgm:forEach name="Name7" axis="ch" ptType="node">
+      <dgm:layoutNode name="compNode">
+        <dgm:alg type="composite"/>
+        <dgm:shape xmlns:r="http://schemas.openxmlformats.org/officeDocument/2006/relationships" r:blip="">
+          <dgm:adjLst/>
+        </dgm:shape>
+        <dgm:presOf axis="self"/>
+        <dgm:constrLst>
+          <dgm:constr type="w" for="ch" forName="iconRect" refType="w" fact="0.45"/>
+          <dgm:constr type="h" for="ch" forName="iconRect" refType="w" refFor="ch" refForName="iconRect"/>
+          <dgm:constr type="ctrX" for="ch" forName="iconRect" refType="w" fact="0.5"/>
+          <dgm:constr type="t" for="ch" forName="iconRect"/>
+          <dgm:constr type="h" for="ch" forName="spaceRect" refType="h" fact="0.15"/>
+          <dgm:constr type="w" for="ch" forName="spaceRect" refType="w"/>
+          <dgm:constr type="l" for="ch" forName="spaceRect"/>
+          <dgm:constr type="t" for="ch" forName="spaceRect" refType="b" refFor="ch" refForName="iconRect"/>
+          <dgm:constr type="h" for="ch" forName="textRect" val="20"/>
+          <dgm:constr type="w" for="ch" forName="textRect" refType="w"/>
+          <dgm:constr type="l" for="ch" forName="textRect"/>
+          <dgm:constr type="t" for="ch" forName="textRect" refType="b" refFor="ch" refForName="spaceRect"/>
+        </dgm:constrLst>
+        <dgm:ruleLst>
+          <dgm:rule type="h" val="INF" fact="NaN" max="NaN"/>
+        </dgm:ruleLst>
+        <dgm:layoutNode name="iconRect" styleLbl="node1">
+          <dgm:alg type="sp"/>
+          <dgm:shape xmlns:r="http://schemas.openxmlformats.org/officeDocument/2006/relationships" type="rect" r:blip="" blipPhldr="1">
+            <dgm:adjLst/>
+          </dgm:shape>
+          <dgm:presOf/>
+          <dgm:constrLst/>
+          <dgm:ruleLst/>
+        </dgm:layoutNode>
+        <dgm:layoutNode name="spaceRect">
+          <dgm:alg type="sp"/>
+          <dgm:shape xmlns:r="http://schemas.openxmlformats.org/officeDocument/2006/relationships" r:blip="">
+            <dgm:adjLst/>
+          </dgm:shape>
+          <dgm:presOf/>
+          <dgm:constrLst/>
+          <dgm:ruleLst/>
+        </dgm:layoutNode>
+        <dgm:layoutNode name="textRect" styleLbl="revTx">
+          <dgm:varLst>
+            <dgm:chMax val="1"/>
+            <dgm:chPref val="1"/>
+          </dgm:varLst>
+          <dgm:alg type="tx">
+            <dgm:param type="txAnchorVert" val="t"/>
+          </dgm:alg>
+          <dgm:shape xmlns:r="http://schemas.openxmlformats.org/officeDocument/2006/relationships" type="rect" r:blip="">
+            <dgm:adjLst/>
+          </dgm:shape>
+          <dgm:presOf axis="self" ptType="node"/>
+          <dgm:constrLst>
+            <dgm:constr type="lMarg"/>
+            <dgm:constr type="rMarg"/>
+            <dgm:constr type="tMarg"/>
+            <dgm:constr type="bMarg"/>
+          </dgm:constrLst>
+          <dgm:ruleLst>
+            <dgm:rule type="primFontSz" val="11" fact="NaN" max="NaN"/>
+            <dgm:rule type="h" val="INF" fact="NaN" max="NaN"/>
+          </dgm:ruleLst>
+        </dgm:layoutNode>
+      </dgm:layoutNode>
+      <dgm:forEach name="Name8" axis="followSib" ptType="sibTrans" cnt="1">
+        <dgm:layoutNode name="sibTrans">
+          <dgm:alg type="sp"/>
+          <dgm:shape xmlns:r="http://schemas.openxmlformats.org/officeDocument/2006/relationships" r:blip="">
+            <dgm:adjLst/>
+          </dgm:shape>
+          <dgm:presOf axis="self"/>
+          <dgm:constrLst/>
+          <dgm:ruleLst/>
+        </dgm:layoutNode>
+      </dgm:forEach>
+    </dgm:forEach>
+  </dgm:layoutNode>
+  <dgm:extLst>
+    <a:ext uri="{68A01E43-0DF5-4B5B-8FA6-DAF915123BFB}">
+      <dgm1612:lstStyle xmlns:dgm1612="http://schemas.microsoft.com/office/drawing/2016/12/diagram">
+        <a:lvl1pPr>
+          <a:lnSpc>
+            <a:spcPct val="100000"/>
+          </a:lnSpc>
+        </a:lvl1pPr>
+      </dgm1612:lstStyle>
+    </a:ext>
+  </dgm:extLst>
+</dgm:layoutDef>
+</file>
+
+<file path=ppt/diagrams/quickStyle1.xml><?xml version="1.0" encoding="utf-8"?>
+<dgm:styleDef xmlns:dgm="http://schemas.openxmlformats.org/drawingml/2006/diagram" xmlns:a="http://schemas.openxmlformats.org/drawingml/2006/main" uniqueId="urn:microsoft.com/office/officeart/2005/8/quickstyle/simple1">
+  <dgm:title val=""/>
+  <dgm:desc val=""/>
+  <dgm:catLst>
+    <dgm:cat type="simple" pri="10100"/>
+  </dgm:catLst>
+  <dgm:scene3d>
+    <a:camera prst="orthographicFront"/>
+    <a:lightRig rig="threePt" dir="t"/>
+  </dgm:scene3d>
+  <dgm:styleLbl name="node0">
+    <dgm:scene3d>
+      <a:camera prst="orthographicFront"/>
+      <a:lightRig rig="threePt" dir="t"/>
+    </dgm:scene3d>
+    <dgm:sp3d/>
+    <dgm:txPr/>
+    <dgm:style>
+      <a:lnRef idx="2">
+        <a:scrgbClr r="0" g="0" b="0"/>
+      </a:lnRef>
+      <a:fillRef idx="1">
+        <a:scrgbClr r="0" g="0" b="0"/>
+      </a:fillRef>
+      <a:effectRef idx="0">
+        <a:scrgbClr r="0" g="0" b="0"/>
+      </a:effectRef>
+      <a:fontRef idx="minor">
+        <a:schemeClr val="lt1"/>
+      </a:fontRef>
+    </dgm:style>
+  </dgm:styleLbl>
+  <dgm:styleLbl name="lnNode1">
+    <dgm:scene3d>
+      <a:camera prst="orthographicFront"/>
+      <a:lightRig rig="threePt" dir="t"/>
+    </dgm:scene3d>
+    <dgm:sp3d/>
+    <dgm:txPr/>
+    <dgm:style>
+      <a:lnRef idx="2">
+        <a:scrgbClr r="0" g="0" b="0"/>
+      </a:lnRef>
+      <a:fillRef idx="1">
+        <a:scrgbClr r="0" g="0" b="0"/>
+      </a:fillRef>
+      <a:effectRef idx="0">
+        <a:scrgbClr r="0" g="0" b="0"/>
+      </a:effectRef>
+      <a:fontRef idx="minor">
+        <a:schemeClr val="lt1"/>
+      </a:fontRef>
+    </dgm:style>
+  </dgm:styleLbl>
+  <dgm:styleLbl name="vennNode1">
+    <dgm:scene3d>
+      <a:camera prst="orthographicFront"/>
+      <a:lightRig rig="threePt" dir="t"/>
+    </dgm:scene3d>
+    <dgm:sp3d/>
+    <dgm:txPr/>
+    <dgm:style>
+      <a:lnRef idx="2">
+        <a:scrgbClr r="0" g="0" b="0"/>
+      </a:lnRef>
+      <a:fillRef idx="1">
+        <a:scrgbClr r="0" g="0" b="0"/>
+      </a:fillRef>
+      <a:effectRef idx="0">
+        <a:scrgbClr r="0" g="0" b="0"/>
+      </a:effectRef>
+      <a:fontRef idx="minor">
+        <a:schemeClr val="tx1"/>
+      </a:fontRef>
+    </dgm:style>
+  </dgm:styleLbl>
+  <dgm:styleLbl name="alignNode1">
+    <dgm:scene3d>
+      <a:camera prst="orthographicFront"/>
+      <a:lightRig rig="threePt" dir="t"/>
+    </dgm:scene3d>
+    <dgm:sp3d/>
+    <dgm:txPr/>
+    <dgm:style>
+      <a:lnRef idx="2">
+        <a:scrgbClr r="0" g="0" b="0"/>
+      </a:lnRef>
+      <a:fillRef idx="1">
+        <a:scrgbClr r="0" g="0" b="0"/>
+      </a:fillRef>
+      <a:effectRef idx="0">
+        <a:scrgbClr r="0" g="0" b="0"/>
+      </a:effectRef>
+      <a:fontRef idx="minor">
+        <a:schemeClr val="lt1"/>
+      </a:fontRef>
+    </dgm:style>
+  </dgm:styleLbl>
+  <dgm:styleLbl name="node1">
+    <dgm:scene3d>
+      <a:camera prst="orthographicFront"/>
+      <a:lightRig rig="threePt" dir="t"/>
+    </dgm:scene3d>
+    <dgm:sp3d/>
+    <dgm:txPr/>
+    <dgm:style>
+      <a:lnRef idx="2">
+        <a:scrgbClr r="0" g="0" b="0"/>
+      </a:lnRef>
+      <a:fillRef idx="1">
+        <a:scrgbClr r="0" g="0" b="0"/>
+      </a:fillRef>
+      <a:effectRef idx="0">
+        <a:scrgbClr r="0" g="0" b="0"/>
+      </a:effectRef>
+      <a:fontRef idx="minor">
+        <a:schemeClr val="lt1"/>
+      </a:fontRef>
+    </dgm:style>
+  </dgm:styleLbl>
+  <dgm:styleLbl name="node2">
+    <dgm:scene3d>
+      <a:camera prst="orthographicFront"/>
+      <a:lightRig rig="threePt" dir="t"/>
+    </dgm:scene3d>
+    <dgm:sp3d/>
+    <dgm:txPr/>
+    <dgm:style>
+      <a:lnRef idx="2">
+        <a:scrgbClr r="0" g="0" b="0"/>
+      </a:lnRef>
+      <a:fillRef idx="1">
+        <a:scrgbClr r="0" g="0" b="0"/>
+      </a:fillRef>
+      <a:effectRef idx="0">
+        <a:scrgbClr r="0" g="0" b="0"/>
+      </a:effectRef>
+      <a:fontRef idx="minor">
+        <a:schemeClr val="lt1"/>
+      </a:fontRef>
+    </dgm:style>
+  </dgm:styleLbl>
+  <dgm:styleLbl name="node3">
+    <dgm:scene3d>
+      <a:camera prst="orthographicFront"/>
+      <a:lightRig rig="threePt" dir="t"/>
+    </dgm:scene3d>
+    <dgm:sp3d/>
+    <dgm:txPr/>
+    <dgm:style>
+      <a:lnRef idx="2">
+        <a:scrgbClr r="0" g="0" b="0"/>
+      </a:lnRef>
+      <a:fillRef idx="1">
+        <a:scrgbClr r="0" g="0" b="0"/>
+      </a:fillRef>
+      <a:effectRef idx="0">
+        <a:scrgbClr r="0" g="0" b="0"/>
+      </a:effectRef>
+      <a:fontRef idx="minor">
+        <a:schemeClr val="lt1"/>
+      </a:fontRef>
+    </dgm:style>
+  </dgm:styleLbl>
+  <dgm:styleLbl name="node4">
+    <dgm:scene3d>
+      <a:camera prst="orthographicFront"/>
+      <a:lightRig rig="threePt" dir="t"/>
+    </dgm:scene3d>
+    <dgm:sp3d/>
+    <dgm:txPr/>
+    <dgm:style>
+      <a:lnRef idx="2">
+        <a:scrgbClr r="0" g="0" b="0"/>
+      </a:lnRef>
+      <a:fillRef idx="1">
+        <a:scrgbClr r="0" g="0" b="0"/>
+      </a:fillRef>
+      <a:effectRef idx="0">
+        <a:scrgbClr r="0" g="0" b="0"/>
+      </a:effectRef>
+      <a:fontRef idx="minor">
+        <a:schemeClr val="lt1"/>
+      </a:fontRef>
+    </dgm:style>
+  </dgm:styleLbl>
+  <dgm:styleLbl name="fgImgPlace1">
+    <dgm:scene3d>
+      <a:camera prst="orthographicFront"/>
+      <a:lightRig rig="threePt" dir="t"/>
+    </dgm:scene3d>
+    <dgm:sp3d/>
+    <dgm:txPr/>
+    <dgm:style>
+      <a:lnRef idx="2">
+        <a:scrgbClr r="0" g="0" b="0"/>
+      </a:lnRef>
+      <a:fillRef idx="1">
+        <a:scrgbClr r="0" g="0" b="0"/>
+      </a:fillRef>
+      <a:effectRef idx="0">
+        <a:scrgbClr r="0" g="0" b="0"/>
+      </a:effectRef>
+      <a:fontRef idx="minor"/>
+    </dgm:style>
+  </dgm:styleLbl>
+  <dgm:styleLbl name="alignImgPlace1">
+    <dgm:scene3d>
+      <a:camera prst="orthographicFront"/>
+      <a:lightRig rig="threePt" dir="t"/>
+    </dgm:scene3d>
+    <dgm:sp3d/>
+    <dgm:txPr/>
+    <dgm:style>
+      <a:lnRef idx="2">
+        <a:scrgbClr r="0" g="0" b="0"/>
+      </a:lnRef>
+      <a:fillRef idx="1">
+        <a:scrgbClr r="0" g="0" b="0"/>
+      </a:fillRef>
+      <a:effectRef idx="0">
+        <a:scrgbClr r="0" g="0" b="0"/>
+      </a:effectRef>
+      <a:fontRef idx="minor"/>
+    </dgm:style>
+  </dgm:styleLbl>
+  <dgm:styleLbl name="bgImgPlace1">
+    <dgm:scene3d>
+      <a:camera prst="orthographicFront"/>
+      <a:lightRig rig="threePt" dir="t"/>
+    </dgm:scene3d>
+    <dgm:sp3d/>
+    <dgm:txPr/>
+    <dgm:style>
+      <a:lnRef idx="2">
+        <a:scrgbClr r="0" g="0" b="0"/>
+      </a:lnRef>
+      <a:fillRef idx="1">
+        <a:scrgbClr r="0" g="0" b="0"/>
+      </a:fillRef>
+      <a:effectRef idx="0">
+        <a:scrgbClr r="0" g="0" b="0"/>
+      </a:effectRef>
+      <a:fontRef idx="minor"/>
+    </dgm:style>
+  </dgm:styleLbl>
+  <dgm:styleLbl name="sibTrans2D1">
+    <dgm:scene3d>
+      <a:camera prst="orthographicFront"/>
+      <a:lightRig rig="threePt" dir="t"/>
+    </dgm:scene3d>
+    <dgm:sp3d/>
+    <dgm:txPr/>
+    <dgm:style>
+      <a:lnRef idx="0">
+        <a:scrgbClr r="0" g="0" b="0"/>
+      </a:lnRef>
+      <a:fillRef idx="1">
+        <a:scrgbClr r="0" g="0" b="0"/>
+      </a:fillRef>
+      <a:effectRef idx="0">
+        <a:scrgbClr r="0" g="0" b="0"/>
+      </a:effectRef>
+      <a:fontRef idx="minor">
+        <a:schemeClr val="lt1"/>
+      </a:fontRef>
+    </dgm:style>
+  </dgm:styleLbl>
+  <dgm:styleLbl name="fgSibTrans2D1">
+    <dgm:scene3d>
+      <a:camera prst="orthographicFront"/>
+      <a:lightRig rig="threePt" dir="t"/>
+    </dgm:scene3d>
+    <dgm:sp3d/>
+    <dgm:txPr/>
+    <dgm:style>
+      <a:lnRef idx="0">
+        <a:scrgbClr r="0" g="0" b="0"/>
+      </a:lnRef>
+      <a:fillRef idx="1">
+        <a:scrgbClr r="0" g="0" b="0"/>
+      </a:fillRef>
+      <a:effectRef idx="0">
+        <a:scrgbClr r="0" g="0" b="0"/>
+      </a:effectRef>
+      <a:fontRef idx="minor">
+        <a:schemeClr val="lt1"/>
+      </a:fontRef>
+    </dgm:style>
+  </dgm:styleLbl>
+  <dgm:styleLbl name="bgSibTrans2D1">
+    <dgm:scene3d>
+      <a:camera prst="orthographicFront"/>
+      <a:lightRig rig="threePt" dir="t"/>
+    </dgm:scene3d>
+    <dgm:sp3d/>
+    <dgm:txPr/>
+    <dgm:style>
+      <a:lnRef idx="0">
+        <a:scrgbClr r="0" g="0" b="0"/>
+      </a:lnRef>
+      <a:fillRef idx="1">
+        <a:scrgbClr r="0" g="0" b="0"/>
+      </a:fillRef>
+      <a:effectRef idx="0">
+        <a:scrgbClr r="0" g="0" b="0"/>
+      </a:effectRef>
+      <a:fontRef idx="minor">
+        <a:schemeClr val="lt1"/>
+      </a:fontRef>
+    </dgm:style>
+  </dgm:styleLbl>
+  <dgm:styleLbl name="sibTrans1D1">
+    <dgm:scene3d>
+      <a:camera prst="orthographicFront"/>
+      <a:lightRig rig="threePt" dir="t"/>
+    </dgm:scene3d>
+    <dgm:sp3d/>
+    <dgm:txPr/>
+    <dgm:style>
+      <a:lnRef idx="1">
+        <a:scrgbClr r="0" g="0" b="0"/>
+      </a:lnRef>
+      <a:fillRef idx="0">
+        <a:scrgbClr r="0" g="0" b="0"/>
+      </a:fillRef>
+      <a:effectRef idx="0">
+        <a:scrgbClr r="0" g="0" b="0"/>
+      </a:effectRef>
+      <a:fontRef idx="minor"/>
+    </dgm:style>
+  </dgm:styleLbl>
+  <dgm:styleLbl name="callout">
+    <dgm:scene3d>
+      <a:camera prst="orthographicFront"/>
+      <a:lightRig rig="threePt" dir="t"/>
+    </dgm:scene3d>
+    <dgm:sp3d/>
+    <dgm:txPr/>
+    <dgm:style>
+      <a:lnRef idx="2">
+        <a:scrgbClr r="0" g="0" b="0"/>
+      </a:lnRef>
+      <a:fillRef idx="1">
+        <a:scrgbClr r="0" g="0" b="0"/>
+      </a:fillRef>
+      <a:effectRef idx="0">
+        <a:scrgbClr r="0" g="0" b="0"/>
+      </a:effectRef>
+      <a:fontRef idx="minor"/>
+    </dgm:style>
+  </dgm:styleLbl>
+  <dgm:styleLbl name="asst0">
+    <dgm:scene3d>
+      <a:camera prst="orthographicFront"/>
+      <a:lightRig rig="threePt" dir="t"/>
+    </dgm:scene3d>
+    <dgm:sp3d/>
+    <dgm:txPr/>
+    <dgm:style>
+      <a:lnRef idx="2">
+        <a:scrgbClr r="0" g="0" b="0"/>
+      </a:lnRef>
+      <a:fillRef idx="1">
+        <a:scrgbClr r="0" g="0" b="0"/>
+      </a:fillRef>
+      <a:effectRef idx="0">
+        <a:scrgbClr r="0" g="0" b="0"/>
+      </a:effectRef>
+      <a:fontRef idx="minor">
+        <a:schemeClr val="lt1"/>
+      </a:fontRef>
+    </dgm:style>
+  </dgm:styleLbl>
+  <dgm:styleLbl name="asst1">
+    <dgm:scene3d>
+      <a:camera prst="orthographicFront"/>
+      <a:lightRig rig="threePt" dir="t"/>
+    </dgm:scene3d>
+    <dgm:sp3d/>
+    <dgm:txPr/>
+    <dgm:style>
+      <a:lnRef idx="2">
+        <a:scrgbClr r="0" g="0" b="0"/>
+      </a:lnRef>
+      <a:fillRef idx="1">
+        <a:scrgbClr r="0" g="0" b="0"/>
+      </a:fillRef>
+      <a:effectRef idx="0">
+        <a:scrgbClr r="0" g="0" b="0"/>
+      </a:effectRef>
+      <a:fontRef idx="minor">
+        <a:schemeClr val="lt1"/>
+      </a:fontRef>
+    </dgm:style>
+  </dgm:styleLbl>
+  <dgm:styleLbl name="asst2">
+    <dgm:scene3d>
+      <a:camera prst="orthographicFront"/>
+      <a:lightRig rig="threePt" dir="t"/>
+    </dgm:scene3d>
+    <dgm:sp3d/>
+    <dgm:txPr/>
+    <dgm:style>
+      <a:lnRef idx="2">
+        <a:scrgbClr r="0" g="0" b="0"/>
+      </a:lnRef>
+      <a:fillRef idx="1">
+        <a:scrgbClr r="0" g="0" b="0"/>
+      </a:fillRef>
+      <a:effectRef idx="0">
+        <a:scrgbClr r="0" g="0" b="0"/>
+      </a:effectRef>
+      <a:fontRef idx="minor">
+        <a:schemeClr val="lt1"/>
+      </a:fontRef>
+    </dgm:style>
+  </dgm:styleLbl>
+  <dgm:styleLbl name="asst3">
+    <dgm:scene3d>
+      <a:camera prst="orthographicFront"/>
+      <a:lightRig rig="threePt" dir="t"/>
+    </dgm:scene3d>
+    <dgm:sp3d/>
+    <dgm:txPr/>
+    <dgm:style>
+      <a:lnRef idx="2">
+        <a:scrgbClr r="0" g="0" b="0"/>
+      </a:lnRef>
+      <a:fillRef idx="1">
+        <a:scrgbClr r="0" g="0" b="0"/>
+      </a:fillRef>
+      <a:effectRef idx="0">
+        <a:scrgbClr r="0" g="0" b="0"/>
+      </a:effectRef>
+      <a:fontRef idx="minor">
+        <a:schemeClr val="lt1"/>
+      </a:fontRef>
+    </dgm:style>
+  </dgm:styleLbl>
+  <dgm:styleLbl name="asst4">
+    <dgm:scene3d>
+      <a:camera prst="orthographicFront"/>
+      <a:lightRig rig="threePt" dir="t"/>
+    </dgm:scene3d>
+    <dgm:sp3d/>
+    <dgm:txPr/>
+    <dgm:style>
+      <a:lnRef idx="2">
+        <a:scrgbClr r="0" g="0" b="0"/>
+      </a:lnRef>
+      <a:fillRef idx="1">
+        <a:scrgbClr r="0" g="0" b="0"/>
+      </a:fillRef>
+      <a:effectRef idx="0">
+        <a:scrgbClr r="0" g="0" b="0"/>
+      </a:effectRef>
+      <a:fontRef idx="minor">
+        <a:schemeClr val="lt1"/>
+      </a:fontRef>
+    </dgm:style>
+  </dgm:styleLbl>
+  <dgm:styleLbl name="parChTrans2D1">
+    <dgm:scene3d>
+      <a:camera prst="orthographicFront"/>
+      <a:lightRig rig="threePt" dir="t"/>
+    </dgm:scene3d>
+    <dgm:sp3d/>
+    <dgm:txPr/>
+    <dgm:style>
+      <a:lnRef idx="2">
+        <a:scrgbClr r="0" g="0" b="0"/>
+      </a:lnRef>
+      <a:fillRef idx="1">
+        <a:scrgbClr r="0" g="0" b="0"/>
+      </a:fillRef>
+      <a:effectRef idx="0">
+        <a:scrgbClr r="0" g="0" b="0"/>
+      </a:effectRef>
+      <a:fontRef idx="minor">
+        <a:schemeClr val="lt1"/>
+      </a:fontRef>
+    </dgm:style>
+  </dgm:styleLbl>
+  <dgm:styleLbl name="parChTrans2D2">
+    <dgm:scene3d>
+      <a:camera prst="orthographicFront"/>
+      <a:lightRig rig="threePt" dir="t"/>
+    </dgm:scene3d>
+    <dgm:sp3d/>
+    <dgm:txPr/>
+    <dgm:style>
+      <a:lnRef idx="2">
+        <a:scrgbClr r="0" g="0" b="0"/>
+      </a:lnRef>
+      <a:fillRef idx="1">
+        <a:scrgbClr r="0" g="0" b="0"/>
+      </a:fillRef>
+      <a:effectRef idx="0">
+        <a:scrgbClr r="0" g="0" b="0"/>
+      </a:effectRef>
+      <a:fontRef idx="minor">
+        <a:schemeClr val="lt1"/>
+      </a:fontRef>
+    </dgm:style>
+  </dgm:styleLbl>
+  <dgm:styleLbl name="parChTrans2D3">
+    <dgm:scene3d>
+      <a:camera prst="orthographicFront"/>
+      <a:lightRig rig="threePt" dir="t"/>
+    </dgm:scene3d>
+    <dgm:sp3d/>
+    <dgm:txPr/>
+    <dgm:style>
+      <a:lnRef idx="2">
+        <a:scrgbClr r="0" g="0" b="0"/>
+      </a:lnRef>
+      <a:fillRef idx="1">
+        <a:scrgbClr r="0" g="0" b="0"/>
+      </a:fillRef>
+      <a:effectRef idx="0">
+        <a:scrgbClr r="0" g="0" b="0"/>
+      </a:effectRef>
+      <a:fontRef idx="minor">
+        <a:schemeClr val="lt1"/>
+      </a:fontRef>
+    </dgm:style>
+  </dgm:styleLbl>
+  <dgm:styleLbl name="parChTrans2D4">
+    <dgm:scene3d>
+      <a:camera prst="orthographicFront"/>
+      <a:lightRig rig="threePt" dir="t"/>
+    </dgm:scene3d>
+    <dgm:sp3d/>
+    <dgm:txPr/>
+    <dgm:style>
+      <a:lnRef idx="2">
+        <a:scrgbClr r="0" g="0" b="0"/>
+      </a:lnRef>
+      <a:fillRef idx="1">
+        <a:scrgbClr r="0" g="0" b="0"/>
+      </a:fillRef>
+      <a:effectRef idx="0">
+        <a:scrgbClr r="0" g="0" b="0"/>
+      </a:effectRef>
+      <a:fontRef idx="minor">
+        <a:schemeClr val="lt1"/>
+      </a:fontRef>
+    </dgm:style>
+  </dgm:styleLbl>
+  <dgm:styleLbl name="parChTrans1D1">
+    <dgm:scene3d>
+      <a:camera prst="orthographicFront"/>
+      <a:lightRig rig="threePt" dir="t"/>
+    </dgm:scene3d>
+    <dgm:sp3d/>
+    <dgm:txPr/>
+    <dgm:style>
+      <a:lnRef idx="2">
+        <a:scrgbClr r="0" g="0" b="0"/>
+      </a:lnRef>
+      <a:fillRef idx="0">
+        <a:scrgbClr r="0" g="0" b="0"/>
+      </a:fillRef>
+      <a:effectRef idx="0">
+        <a:scrgbClr r="0" g="0" b="0"/>
+      </a:effectRef>
+      <a:fontRef idx="minor"/>
+    </dgm:style>
+  </dgm:styleLbl>
+  <dgm:styleLbl name="parChTrans1D2">
+    <dgm:scene3d>
+      <a:camera prst="orthographicFront"/>
+      <a:lightRig rig="threePt" dir="t"/>
+    </dgm:scene3d>
+    <dgm:sp3d/>
+    <dgm:txPr/>
+    <dgm:style>
+      <a:lnRef idx="2">
+        <a:scrgbClr r="0" g="0" b="0"/>
+      </a:lnRef>
+      <a:fillRef idx="0">
+        <a:scrgbClr r="0" g="0" b="0"/>
+      </a:fillRef>
+      <a:effectRef idx="0">
+        <a:scrgbClr r="0" g="0" b="0"/>
+      </a:effectRef>
+      <a:fontRef idx="minor"/>
+    </dgm:style>
+  </dgm:styleLbl>
+  <dgm:styleLbl name="parChTrans1D3">
+    <dgm:scene3d>
+      <a:camera prst="orthographicFront"/>
+      <a:lightRig rig="threePt" dir="t"/>
+    </dgm:scene3d>
+    <dgm:sp3d/>
+    <dgm:txPr/>
+    <dgm:style>
+      <a:lnRef idx="2">
+        <a:scrgbClr r="0" g="0" b="0"/>
+      </a:lnRef>
+      <a:fillRef idx="0">
+        <a:scrgbClr r="0" g="0" b="0"/>
+      </a:fillRef>
+      <a:effectRef idx="0">
+        <a:scrgbClr r="0" g="0" b="0"/>
+      </a:effectRef>
+      <a:fontRef idx="minor"/>
+    </dgm:style>
+  </dgm:styleLbl>
+  <dgm:styleLbl name="parChTrans1D4">
+    <dgm:scene3d>
+      <a:camera prst="orthographicFront"/>
+      <a:lightRig rig="threePt" dir="t"/>
+    </dgm:scene3d>
+    <dgm:sp3d/>
+    <dgm:txPr/>
+    <dgm:style>
+      <a:lnRef idx="2">
+        <a:scrgbClr r="0" g="0" b="0"/>
+      </a:lnRef>
+      <a:fillRef idx="0">
+        <a:scrgbClr r="0" g="0" b="0"/>
+      </a:fillRef>
+      <a:effectRef idx="0">
+        <a:scrgbClr r="0" g="0" b="0"/>
+      </a:effectRef>
+      <a:fontRef idx="minor"/>
+    </dgm:style>
+  </dgm:styleLbl>
+  <dgm:styleLbl name="fgAcc1">
+    <dgm:scene3d>
+      <a:camera prst="orthographicFront"/>
+      <a:lightRig rig="threePt" dir="t"/>
+    </dgm:scene3d>
+    <dgm:sp3d/>
+    <dgm:txPr/>
+    <dgm:style>
+      <a:lnRef idx="2">
+        <a:scrgbClr r="0" g="0" b="0"/>
+      </a:lnRef>
+      <a:fillRef idx="1">
+        <a:scrgbClr r="0" g="0" b="0"/>
+      </a:fillRef>
+      <a:effectRef idx="0">
+        <a:scrgbClr r="0" g="0" b="0"/>
+      </a:effectRef>
+      <a:fontRef idx="minor"/>
+    </dgm:style>
+  </dgm:styleLbl>
+  <dgm:styleLbl name="conFgAcc1">
+    <dgm:scene3d>
+      <a:camera prst="orthographicFront"/>
+      <a:lightRig rig="threePt" dir="t"/>
+    </dgm:scene3d>
+    <dgm:sp3d/>
+    <dgm:txPr/>
+    <dgm:style>
+      <a:lnRef idx="2">
+        <a:scrgbClr r="0" g="0" b="0"/>
+      </a:lnRef>
+      <a:fillRef idx="1">
+        <a:scrgbClr r="0" g="0" b="0"/>
+      </a:fillRef>
+      <a:effectRef idx="0">
+        <a:scrgbClr r="0" g="0" b="0"/>
+      </a:effectRef>
+      <a:fontRef idx="minor"/>
+    </dgm:style>
+  </dgm:styleLbl>
+  <dgm:styleLbl name="alignAcc1">
+    <dgm:scene3d>
+      <a:camera prst="orthographicFront"/>
+      <a:lightRig rig="threePt" dir="t"/>
+    </dgm:scene3d>
+    <dgm:sp3d/>
+    <dgm:txPr/>
+    <dgm:style>
+      <a:lnRef idx="2">
+        <a:scrgbClr r="0" g="0" b="0"/>
+      </a:lnRef>
+      <a:fillRef idx="1">
+        <a:scrgbClr r="0" g="0" b="0"/>
+      </a:fillRef>
+      <a:effectRef idx="0">
+        <a:scrgbClr r="0" g="0" b="0"/>
+      </a:effectRef>
+      <a:fontRef idx="minor"/>
+    </dgm:style>
+  </dgm:styleLbl>
+  <dgm:styleLbl name="trAlignAcc1">
+    <dgm:scene3d>
+      <a:camera prst="orthographicFront"/>
+      <a:lightRig rig="threePt" dir="t"/>
+    </dgm:scene3d>
+    <dgm:sp3d/>
+    <dgm:txPr/>
+    <dgm:style>
+      <a:lnRef idx="1">
+        <a:scrgbClr r="0" g="0" b="0"/>
+      </a:lnRef>
+      <a:fillRef idx="1">
+        <a:scrgbClr r="0" g="0" b="0"/>
+      </a:fillRef>
+      <a:effectRef idx="0">
+        <a:scrgbClr r="0" g="0" b="0"/>
+      </a:effectRef>
+      <a:fontRef idx="minor"/>
+    </dgm:style>
+  </dgm:styleLbl>
+  <dgm:styleLbl name="bgAcc1">
+    <dgm:scene3d>
+      <a:camera prst="orthographicFront"/>
+      <a:lightRig rig="threePt" dir="t"/>
+    </dgm:scene3d>
+    <dgm:sp3d/>
+    <dgm:txPr/>
+    <dgm:style>
+      <a:lnRef idx="2">
+        <a:scrgbClr r="0" g="0" b="0"/>
+      </a:lnRef>
+      <a:fillRef idx="1">
+        <a:scrgbClr r="0" g="0" b="0"/>
+      </a:fillRef>
+      <a:effectRef idx="0">
+        <a:scrgbClr r="0" g="0" b="0"/>
+      </a:effectRef>
+      <a:fontRef idx="minor"/>
+    </dgm:style>
+  </dgm:styleLbl>
+  <dgm:styleLbl name="solidFgAcc1">
+    <dgm:scene3d>
+      <a:camera prst="orthographicFront"/>
+      <a:lightRig rig="threePt" dir="t"/>
+    </dgm:scene3d>
+    <dgm:sp3d/>
+    <dgm:txPr/>
+    <dgm:style>
+      <a:lnRef idx="2">
+        <a:scrgbClr r="0" g="0" b="0"/>
+      </a:lnRef>
+      <a:fillRef idx="1">
+        <a:scrgbClr r="0" g="0" b="0"/>
+      </a:fillRef>
+      <a:effectRef idx="0">
+        <a:scrgbClr r="0" g="0" b="0"/>
+      </a:effectRef>
+      <a:fontRef idx="minor"/>
+    </dgm:style>
+  </dgm:styleLbl>
+  <dgm:styleLbl name="solidAlignAcc1">
+    <dgm:scene3d>
+      <a:camera prst="orthographicFront"/>
+      <a:lightRig rig="threePt" dir="t"/>
+    </dgm:scene3d>
+    <dgm:sp3d/>
+    <dgm:txPr/>
+    <dgm:style>
+      <a:lnRef idx="2">
+        <a:scrgbClr r="0" g="0" b="0"/>
+      </a:lnRef>
+      <a:fillRef idx="1">
+        <a:scrgbClr r="0" g="0" b="0"/>
+      </a:fillRef>
+      <a:effectRef idx="0">
+        <a:scrgbClr r="0" g="0" b="0"/>
+      </a:effectRef>
+      <a:fontRef idx="minor"/>
+    </dgm:style>
+  </dgm:styleLbl>
+  <dgm:styleLbl name="solidBgAcc1">
+    <dgm:scene3d>
+      <a:camera prst="orthographicFront"/>
+      <a:lightRig rig="threePt" dir="t"/>
+    </dgm:scene3d>
+    <dgm:sp3d/>
+    <dgm:txPr/>
+    <dgm:style>
+      <a:lnRef idx="2">
+        <a:scrgbClr r="0" g="0" b="0"/>
+      </a:lnRef>
+      <a:fillRef idx="1">
+        <a:scrgbClr r="0" g="0" b="0"/>
+      </a:fillRef>
+      <a:effectRef idx="0">
+        <a:scrgbClr r="0" g="0" b="0"/>
+      </a:effectRef>
+      <a:fontRef idx="minor"/>
+    </dgm:style>
+  </dgm:styleLbl>
+  <dgm:styleLbl name="fgAccFollowNode1">
+    <dgm:scene3d>
+      <a:camera prst="orthographicFront"/>
+      <a:lightRig rig="threePt" dir="t"/>
+    </dgm:scene3d>
+    <dgm:sp3d/>
+    <dgm:txPr/>
+    <dgm:style>
+      <a:lnRef idx="2">
+        <a:scrgbClr r="0" g="0" b="0"/>
+      </a:lnRef>
+      <a:fillRef idx="1">
+        <a:scrgbClr r="0" g="0" b="0"/>
+      </a:fillRef>
+      <a:effectRef idx="0">
+        <a:scrgbClr r="0" g="0" b="0"/>
+      </a:effectRef>
+      <a:fontRef idx="minor"/>
+    </dgm:style>
+  </dgm:styleLbl>
+  <dgm:styleLbl name="alignAccFollowNode1">
+    <dgm:scene3d>
+      <a:camera prst="orthographicFront"/>
+      <a:lightRig rig="threePt" dir="t"/>
+    </dgm:scene3d>
+    <dgm:sp3d/>
+    <dgm:txPr/>
+    <dgm:style>
+      <a:lnRef idx="2">
+        <a:scrgbClr r="0" g="0" b="0"/>
+      </a:lnRef>
+      <a:fillRef idx="1">
+        <a:scrgbClr r="0" g="0" b="0"/>
+      </a:fillRef>
+      <a:effectRef idx="0">
+        <a:scrgbClr r="0" g="0" b="0"/>
+      </a:effectRef>
+      <a:fontRef idx="minor"/>
+    </dgm:style>
+  </dgm:styleLbl>
+  <dgm:styleLbl name="bgAccFollowNode1">
+    <dgm:scene3d>
+      <a:camera prst="orthographicFront"/>
+      <a:lightRig rig="threePt" dir="t"/>
+    </dgm:scene3d>
+    <dgm:sp3d/>
+    <dgm:txPr/>
+    <dgm:style>
+      <a:lnRef idx="2">
+        <a:scrgbClr r="0" g="0" b="0"/>
+      </a:lnRef>
+      <a:fillRef idx="1">
+        <a:scrgbClr r="0" g="0" b="0"/>
+      </a:fillRef>
+      <a:effectRef idx="0">
+        <a:scrgbClr r="0" g="0" b="0"/>
+      </a:effectRef>
+      <a:fontRef idx="minor"/>
+    </dgm:style>
+  </dgm:styleLbl>
+  <dgm:styleLbl name="fgAcc0">
+    <dgm:scene3d>
+      <a:camera prst="orthographicFront"/>
+      <a:lightRig rig="threePt" dir="t"/>
+    </dgm:scene3d>
+    <dgm:sp3d/>
+    <dgm:txPr/>
+    <dgm:style>
+      <a:lnRef idx="2">
+        <a:scrgbClr r="0" g="0" b="0"/>
+      </a:lnRef>
+      <a:fillRef idx="1">
+        <a:scrgbClr r="0" g="0" b="0"/>
+      </a:fillRef>
+      <a:effectRef idx="0">
+        <a:scrgbClr r="0" g="0" b="0"/>
+      </a:effectRef>
+      <a:fontRef idx="minor"/>
+    </dgm:style>
+  </dgm:styleLbl>
+  <dgm:styleLbl name="fgAcc2">
+    <dgm:scene3d>
+      <a:camera prst="orthographicFront"/>
+      <a:lightRig rig="threePt" dir="t"/>
+    </dgm:scene3d>
+    <dgm:sp3d/>
+    <dgm:txPr/>
+    <dgm:style>
+      <a:lnRef idx="2">
+        <a:scrgbClr r="0" g="0" b="0"/>
+      </a:lnRef>
+      <a:fillRef idx="1">
+        <a:scrgbClr r="0" g="0" b="0"/>
+      </a:fillRef>
+      <a:effectRef idx="0">
+        <a:scrgbClr r="0" g="0" b="0"/>
+      </a:effectRef>
+      <a:fontRef idx="minor"/>
+    </dgm:style>
+  </dgm:styleLbl>
+  <dgm:styleLbl name="fgAcc3">
+    <dgm:scene3d>
+      <a:camera prst="orthographicFront"/>
+      <a:lightRig rig="threePt" dir="t"/>
+    </dgm:scene3d>
+    <dgm:sp3d/>
+    <dgm:txPr/>
+    <dgm:style>
+      <a:lnRef idx="2">
+        <a:scrgbClr r="0" g="0" b="0"/>
+      </a:lnRef>
+      <a:fillRef idx="1">
+        <a:scrgbClr r="0" g="0" b="0"/>
+      </a:fillRef>
+      <a:effectRef idx="0">
+        <a:scrgbClr r="0" g="0" b="0"/>
+      </a:effectRef>
+      <a:fontRef idx="minor"/>
+    </dgm:style>
+  </dgm:styleLbl>
+  <dgm:styleLbl name="fgAcc4">
+    <dgm:scene3d>
+      <a:camera prst="orthographicFront"/>
+      <a:lightRig rig="threePt" dir="t"/>
+    </dgm:scene3d>
+    <dgm:sp3d/>
+    <dgm:txPr/>
+    <dgm:style>
+      <a:lnRef idx="2">
+        <a:scrgbClr r="0" g="0" b="0"/>
+      </a:lnRef>
+      <a:fillRef idx="1">
+        <a:scrgbClr r="0" g="0" b="0"/>
+      </a:fillRef>
+      <a:effectRef idx="0">
+        <a:scrgbClr r="0" g="0" b="0"/>
+      </a:effectRef>
+      <a:fontRef idx="minor"/>
+    </dgm:style>
+  </dgm:styleLbl>
+  <dgm:styleLbl name="bgShp">
+    <dgm:scene3d>
+      <a:camera prst="orthographicFront"/>
+      <a:lightRig rig="threePt" dir="t"/>
+    </dgm:scene3d>
+    <dgm:sp3d/>
+    <dgm:txPr/>
+    <dgm:style>
+      <a:lnRef idx="0">
+        <a:scrgbClr r="0" g="0" b="0"/>
+      </a:lnRef>
+      <a:fillRef idx="1">
+        <a:scrgbClr r="0" g="0" b="0"/>
+      </a:fillRef>
+      <a:effectRef idx="0">
+        <a:scrgbClr r="0" g="0" b="0"/>
+      </a:effectRef>
+      <a:fontRef idx="minor"/>
+    </dgm:style>
+  </dgm:styleLbl>
+  <dgm:styleLbl name="dkBgShp">
+    <dgm:scene3d>
+      <a:camera prst="orthographicFront"/>
+      <a:lightRig rig="threePt" dir="t"/>
+    </dgm:scene3d>
+    <dgm:sp3d/>
+    <dgm:txPr/>
+    <dgm:style>
+      <a:lnRef idx="0">
+        <a:scrgbClr r="0" g="0" b="0"/>
+      </a:lnRef>
+      <a:fillRef idx="1">
+        <a:scrgbClr r="0" g="0" b="0"/>
+      </a:fillRef>
+      <a:effectRef idx="0">
+        <a:scrgbClr r="0" g="0" b="0"/>
+      </a:effectRef>
+      <a:fontRef idx="minor"/>
+    </dgm:style>
+  </dgm:styleLbl>
+  <dgm:styleLbl name="trBgShp">
+    <dgm:scene3d>
+      <a:camera prst="orthographicFront"/>
+      <a:lightRig rig="threePt" dir="t"/>
+    </dgm:scene3d>
+    <dgm:sp3d/>
+    <dgm:txPr/>
+    <dgm:style>
+      <a:lnRef idx="0">
+        <a:scrgbClr r="0" g="0" b="0"/>
+      </a:lnRef>
+      <a:fillRef idx="1">
+        <a:scrgbClr r="0" g="0" b="0"/>
+      </a:fillRef>
+      <a:effectRef idx="0">
+        <a:scrgbClr r="0" g="0" b="0"/>
+      </a:effectRef>
+      <a:fontRef idx="minor"/>
+    </dgm:style>
+  </dgm:styleLbl>
+  <dgm:styleLbl name="fgShp">
+    <dgm:scene3d>
+      <a:camera prst="orthographicFront"/>
+      <a:lightRig rig="threePt" dir="t"/>
+    </dgm:scene3d>
+    <dgm:sp3d/>
+    <dgm:txPr/>
+    <dgm:style>
+      <a:lnRef idx="2">
+        <a:scrgbClr r="0" g="0" b="0"/>
+      </a:lnRef>
+      <a:fillRef idx="1">
+        <a:scrgbClr r="0" g="0" b="0"/>
+      </a:fillRef>
+      <a:effectRef idx="0">
+        <a:scrgbClr r="0" g="0" b="0"/>
+      </a:effectRef>
+      <a:fontRef idx="minor"/>
+    </dgm:style>
+  </dgm:styleLbl>
+  <dgm:styleLbl name="revTx">
+    <dgm:scene3d>
+      <a:camera prst="orthographicFront"/>
+      <a:lightRig rig="threePt" dir="t"/>
+    </dgm:scene3d>
+    <dgm:sp3d/>
+    <dgm:txPr/>
+    <dgm:style>
+      <a:lnRef idx="0">
+        <a:scrgbClr r="0" g="0" b="0"/>
+      </a:lnRef>
+      <a:fillRef idx="0">
+        <a:scrgbClr r="0" g="0" b="0"/>
+      </a:fillRef>
+      <a:effectRef idx="0">
+        <a:scrgbClr r="0" g="0" b="0"/>
+      </a:effectRef>
+      <a:fontRef idx="minor"/>
+    </dgm:style>
+  </dgm:styleLbl>
+</dgm:styleDef>
+</file>
+
+<file path=ppt/notesMasters/notesMaster1.xml><?xml version="1.0" encoding="utf-8"?>
+<p:notesMaster xmlns:a="http://schemas.openxmlformats.org/drawingml/2006/main" xmlns:r="http://schemas.openxmlformats.org/officeDocument/2006/relationships" xmlns:p="http://schemas.openxmlformats.org/presentationml/2006/main">
+  <p:cSld>
+    <p:bg>
+      <p:bgRef idx="1001">
+        <a:schemeClr val="bg1"/>
+      </p:bgRef>
+    </p:bg>
+    <p:spTree>
+      <p:nvGrpSpPr>
+        <p:cNvPr id="1" name=""/>
+        <p:cNvGrpSpPr/>
+        <p:nvPr/>
+      </p:nvGrpSpPr>
+      <p:grpSpPr>
+        <a:xfrm>
+          <a:off x="0" y="0"/>
+          <a:ext cx="0" cy="0"/>
+          <a:chOff x="0" y="0"/>
+          <a:chExt cx="0" cy="0"/>
+        </a:xfrm>
+      </p:grpSpPr>
+      <p:sp>
+        <p:nvSpPr>
+          <p:cNvPr id="2" name="Header Placeholder 1"/>
+          <p:cNvSpPr>
+            <a:spLocks noGrp="1"/>
+          </p:cNvSpPr>
+          <p:nvPr>
+            <p:ph type="hdr" sz="quarter"/>
+          </p:nvPr>
+        </p:nvSpPr>
+        <p:spPr>
+          <a:xfrm>
+            <a:off x="0" y="0"/>
+            <a:ext cx="2971800" cy="458788"/>
+          </a:xfrm>
+          <a:prstGeom prst="rect">
+            <a:avLst/>
+          </a:prstGeom>
+        </p:spPr>
+        <p:txBody>
+          <a:bodyPr vert="horz" lIns="91440" tIns="45720" rIns="91440" bIns="45720" rtlCol="0"/>
+          <a:lstStyle>
+            <a:lvl1pPr algn="l">
+              <a:defRPr sz="1200"/>
+            </a:lvl1pPr>
+          </a:lstStyle>
+          <a:p>
+            <a:endParaRPr lang="en-US"/>
+          </a:p>
+        </p:txBody>
+      </p:sp>
+      <p:sp>
+        <p:nvSpPr>
+          <p:cNvPr id="3" name="Date Placeholder 2"/>
+          <p:cNvSpPr>
+            <a:spLocks noGrp="1"/>
+          </p:cNvSpPr>
+          <p:nvPr>
+            <p:ph type="dt" idx="1"/>
+          </p:nvPr>
+        </p:nvSpPr>
+        <p:spPr>
+          <a:xfrm>
+            <a:off x="3884613" y="0"/>
+            <a:ext cx="2971800" cy="458788"/>
+          </a:xfrm>
+          <a:prstGeom prst="rect">
+            <a:avLst/>
+          </a:prstGeom>
+        </p:spPr>
+        <p:txBody>
+          <a:bodyPr vert="horz" lIns="91440" tIns="45720" rIns="91440" bIns="45720" rtlCol="0"/>
+          <a:lstStyle>
+            <a:lvl1pPr algn="r">
+              <a:defRPr sz="1200"/>
+            </a:lvl1pPr>
+          </a:lstStyle>
+          <a:p>
+            <a:fld id="{006FB954-9EEF-4066-9944-4878242E7067}" type="datetimeFigureOut">
+              <a:rPr lang="en-US" smtClean="0"/>
+              <a:t>3/5/2026</a:t>
+            </a:fld>
+            <a:endParaRPr lang="en-US"/>
+          </a:p>
+        </p:txBody>
+      </p:sp>
+      <p:sp>
+        <p:nvSpPr>
+          <p:cNvPr id="4" name="Slide Image Placeholder 3"/>
+          <p:cNvSpPr>
+            <a:spLocks noGrp="1" noRot="1" noChangeAspect="1"/>
+          </p:cNvSpPr>
+          <p:nvPr>
+            <p:ph type="sldImg" idx="2"/>
+          </p:nvPr>
+        </p:nvSpPr>
+        <p:spPr>
+          <a:xfrm>
+            <a:off x="685800" y="1143000"/>
+            <a:ext cx="5486400" cy="3086100"/>
+          </a:xfrm>
+          <a:prstGeom prst="rect">
+            <a:avLst/>
+          </a:prstGeom>
+          <a:noFill/>
+          <a:ln w="12700">
+            <a:solidFill>
+              <a:prstClr val="black"/>
+            </a:solidFill>
+          </a:ln>
+        </p:spPr>
+        <p:txBody>
+          <a:bodyPr vert="horz" lIns="91440" tIns="45720" rIns="91440" bIns="45720" rtlCol="0" anchor="ctr"/>
+          <a:lstStyle/>
+          <a:p>
+            <a:endParaRPr lang="en-US"/>
+          </a:p>
+        </p:txBody>
+      </p:sp>
+      <p:sp>
+        <p:nvSpPr>
+          <p:cNvPr id="5" name="Notes Placeholder 4"/>
+          <p:cNvSpPr>
+            <a:spLocks noGrp="1"/>
+          </p:cNvSpPr>
+          <p:nvPr>
+            <p:ph type="body" sz="quarter" idx="3"/>
+          </p:nvPr>
+        </p:nvSpPr>
+        <p:spPr>
+          <a:xfrm>
+            <a:off x="685800" y="4400550"/>
+            <a:ext cx="5486400" cy="3600450"/>
+          </a:xfrm>
+          <a:prstGeom prst="rect">
+            <a:avLst/>
+          </a:prstGeom>
+        </p:spPr>
+        <p:txBody>
+          <a:bodyPr vert="horz" lIns="91440" tIns="45720" rIns="91440" bIns="45720" rtlCol="0"/>
+          <a:lstStyle/>
+          <a:p>
+            <a:pPr lvl="0"/>
+            <a:r>
+              <a:rPr lang="en-US"/>
+              <a:t>Click to edit Master text styles</a:t>
+            </a:r>
+          </a:p>
+          <a:p>
+            <a:pPr lvl="1"/>
+            <a:r>
+              <a:rPr lang="en-US"/>
+              <a:t>Second level</a:t>
+            </a:r>
+          </a:p>
+          <a:p>
+            <a:pPr lvl="2"/>
+            <a:r>
+              <a:rPr lang="en-US"/>
+              <a:t>Third level</a:t>
+            </a:r>
+          </a:p>
+          <a:p>
+            <a:pPr lvl="3"/>
+            <a:r>
+              <a:rPr lang="en-US"/>
+              <a:t>Fourth level</a:t>
+            </a:r>
+          </a:p>
+          <a:p>
+            <a:pPr lvl="4"/>
+            <a:r>
+              <a:rPr lang="en-US"/>
+              <a:t>Fifth level</a:t>
+            </a:r>
+          </a:p>
+        </p:txBody>
+      </p:sp>
+      <p:sp>
+        <p:nvSpPr>
+          <p:cNvPr id="6" name="Footer Placeholder 5"/>
+          <p:cNvSpPr>
+            <a:spLocks noGrp="1"/>
+          </p:cNvSpPr>
+          <p:nvPr>
+            <p:ph type="ftr" sz="quarter" idx="4"/>
+          </p:nvPr>
+        </p:nvSpPr>
+        <p:spPr>
+          <a:xfrm>
+            <a:off x="0" y="8685213"/>
+            <a:ext cx="2971800" cy="458787"/>
+          </a:xfrm>
+          <a:prstGeom prst="rect">
+            <a:avLst/>
+          </a:prstGeom>
+        </p:spPr>
+        <p:txBody>
+          <a:bodyPr vert="horz" lIns="91440" tIns="45720" rIns="91440" bIns="45720" rtlCol="0" anchor="b"/>
+          <a:lstStyle>
+            <a:lvl1pPr algn="l">
+              <a:defRPr sz="1200"/>
+            </a:lvl1pPr>
+          </a:lstStyle>
+          <a:p>
+            <a:endParaRPr lang="en-US"/>
+          </a:p>
+        </p:txBody>
+      </p:sp>
+      <p:sp>
+        <p:nvSpPr>
+          <p:cNvPr id="7" name="Slide Number Placeholder 6"/>
+          <p:cNvSpPr>
+            <a:spLocks noGrp="1"/>
+          </p:cNvSpPr>
+          <p:nvPr>
+            <p:ph type="sldNum" sz="quarter" idx="5"/>
+          </p:nvPr>
+        </p:nvSpPr>
+        <p:spPr>
+          <a:xfrm>
+            <a:off x="3884613" y="8685213"/>
+            <a:ext cx="2971800" cy="458787"/>
+          </a:xfrm>
+          <a:prstGeom prst="rect">
+            <a:avLst/>
+          </a:prstGeom>
+        </p:spPr>
+        <p:txBody>
+          <a:bodyPr vert="horz" lIns="91440" tIns="45720" rIns="91440" bIns="45720" rtlCol="0" anchor="b"/>
+          <a:lstStyle>
+            <a:lvl1pPr algn="r">
+              <a:defRPr sz="1200"/>
+            </a:lvl1pPr>
+          </a:lstStyle>
+          <a:p>
+            <a:fld id="{6BB7875C-9068-4E3A-A084-8798A05B51C5}" type="slidenum">
+              <a:rPr lang="en-US" smtClean="0"/>
+              <a:t>‹#›</a:t>
+            </a:fld>
+            <a:endParaRPr lang="en-US"/>
+          </a:p>
+        </p:txBody>
+      </p:sp>
+    </p:spTree>
+    <p:extLst>
+      <p:ext uri="{BB962C8B-B14F-4D97-AF65-F5344CB8AC3E}">
+        <p14:creationId xmlns:p14="http://schemas.microsoft.com/office/powerpoint/2010/main" val="82150377"/>
+      </p:ext>
+    </p:extLst>
+  </p:cSld>
+  <p:clrMap bg1="lt1" tx1="dk1" bg2="lt2" tx2="dk2" accent1="accent1" accent2="accent2" accent3="accent3" accent4="accent4" accent5="accent5" accent6="accent6" hlink="hlink" folHlink="folHlink"/>
+  <p:notesStyle>
+    <a:lvl1pPr marL="0" algn="l" defTabSz="914400" rtl="0" eaLnBrk="1" latinLnBrk="0" hangingPunct="1">
+      <a:defRPr sz="1200" kern="1200">
+        <a:solidFill>
+          <a:schemeClr val="tx1"/>
+        </a:solidFill>
+        <a:latin typeface="+mn-lt"/>
+        <a:ea typeface="+mn-ea"/>
+        <a:cs typeface="+mn-cs"/>
+      </a:defRPr>
+    </a:lvl1pPr>
+    <a:lvl2pPr marL="457200" algn="l" defTabSz="914400" rtl="0" eaLnBrk="1" latinLnBrk="0" hangingPunct="1">
+      <a:defRPr sz="1200" kern="1200">
+        <a:solidFill>
+          <a:schemeClr val="tx1"/>
+        </a:solidFill>
+        <a:latin typeface="+mn-lt"/>
+        <a:ea typeface="+mn-ea"/>
+        <a:cs typeface="+mn-cs"/>
+      </a:defRPr>
+    </a:lvl2pPr>
+    <a:lvl3pPr marL="914400" algn="l" defTabSz="914400" rtl="0" eaLnBrk="1" latinLnBrk="0" hangingPunct="1">
+      <a:defRPr sz="1200" kern="1200">
+        <a:solidFill>
+          <a:schemeClr val="tx1"/>
+        </a:solidFill>
+        <a:latin typeface="+mn-lt"/>
+        <a:ea typeface="+mn-ea"/>
+        <a:cs typeface="+mn-cs"/>
+      </a:defRPr>
+    </a:lvl3pPr>
+    <a:lvl4pPr marL="1371600" algn="l" defTabSz="914400" rtl="0" eaLnBrk="1" latinLnBrk="0" hangingPunct="1">
+      <a:defRPr sz="1200" kern="1200">
+        <a:solidFill>
+          <a:schemeClr val="tx1"/>
+        </a:solidFill>
+        <a:latin typeface="+mn-lt"/>
+        <a:ea typeface="+mn-ea"/>
+        <a:cs typeface="+mn-cs"/>
+      </a:defRPr>
+    </a:lvl4pPr>
+    <a:lvl5pPr marL="1828800" algn="l" defTabSz="914400" rtl="0" eaLnBrk="1" latinLnBrk="0" hangingPunct="1">
+      <a:defRPr sz="1200" kern="1200">
+        <a:solidFill>
+          <a:schemeClr val="tx1"/>
+        </a:solidFill>
+        <a:latin typeface="+mn-lt"/>
+        <a:ea typeface="+mn-ea"/>
+        <a:cs typeface="+mn-cs"/>
+      </a:defRPr>
+    </a:lvl5pPr>
+    <a:lvl6pPr marL="2286000" algn="l" defTabSz="914400" rtl="0" eaLnBrk="1" latinLnBrk="0" hangingPunct="1">
+      <a:defRPr sz="1200" kern="1200">
+        <a:solidFill>
+          <a:schemeClr val="tx1"/>
+        </a:solidFill>
+        <a:latin typeface="+mn-lt"/>
+        <a:ea typeface="+mn-ea"/>
+        <a:cs typeface="+mn-cs"/>
+      </a:defRPr>
+    </a:lvl6pPr>
+    <a:lvl7pPr marL="2743200" algn="l" defTabSz="914400" rtl="0" eaLnBrk="1" latinLnBrk="0" hangingPunct="1">
+      <a:defRPr sz="1200" kern="1200">
+        <a:solidFill>
+          <a:schemeClr val="tx1"/>
+        </a:solidFill>
+        <a:latin typeface="+mn-lt"/>
+        <a:ea typeface="+mn-ea"/>
+        <a:cs typeface="+mn-cs"/>
+      </a:defRPr>
+    </a:lvl7pPr>
+    <a:lvl8pPr marL="3200400" algn="l" defTabSz="914400" rtl="0" eaLnBrk="1" latinLnBrk="0" hangingPunct="1">
+      <a:defRPr sz="1200" kern="1200">
+        <a:solidFill>
+          <a:schemeClr val="tx1"/>
+        </a:solidFill>
+        <a:latin typeface="+mn-lt"/>
+        <a:ea typeface="+mn-ea"/>
+        <a:cs typeface="+mn-cs"/>
+      </a:defRPr>
+    </a:lvl8pPr>
+    <a:lvl9pPr marL="3657600" algn="l" defTabSz="914400" rtl="0" eaLnBrk="1" latinLnBrk="0" hangingPunct="1">
+      <a:defRPr sz="1200" kern="1200">
+        <a:solidFill>
+          <a:schemeClr val="tx1"/>
+        </a:solidFill>
+        <a:latin typeface="+mn-lt"/>
+        <a:ea typeface="+mn-ea"/>
+        <a:cs typeface="+mn-cs"/>
+      </a:defRPr>
+    </a:lvl9pPr>
+  </p:notesStyle>
+</p:notesMaster>
+</file>
+
+<file path=ppt/notesSlides/notesSlide1.xml><?xml version="1.0" encoding="utf-8"?>
+<p:notes xmlns:a="http://schemas.openxmlformats.org/drawingml/2006/main" xmlns:r="http://schemas.openxmlformats.org/officeDocument/2006/relationships" xmlns:p="http://schemas.openxmlformats.org/presentationml/2006/main">
+  <p:cSld>
+    <p:spTree>
+      <p:nvGrpSpPr>
+        <p:cNvPr id="1" name=""/>
+        <p:cNvGrpSpPr/>
+        <p:nvPr/>
+      </p:nvGrpSpPr>
+      <p:grpSpPr>
+        <a:xfrm>
+          <a:off x="0" y="0"/>
+          <a:ext cx="0" cy="0"/>
+          <a:chOff x="0" y="0"/>
+          <a:chExt cx="0" cy="0"/>
+        </a:xfrm>
+      </p:grpSpPr>
+      <p:sp>
+        <p:nvSpPr>
+          <p:cNvPr id="2" name="Slide Image Placeholder 1"/>
+          <p:cNvSpPr>
+            <a:spLocks noGrp="1" noRot="1" noChangeAspect="1"/>
+          </p:cNvSpPr>
+          <p:nvPr>
+            <p:ph type="sldImg"/>
+          </p:nvPr>
+        </p:nvSpPr>
+        <p:spPr/>
+      </p:sp>
+      <p:sp>
+        <p:nvSpPr>
+          <p:cNvPr id="3" name="Notes Placeholder 2"/>
+          <p:cNvSpPr>
+            <a:spLocks noGrp="1"/>
+          </p:cNvSpPr>
+          <p:nvPr>
+            <p:ph type="body" idx="1"/>
+          </p:nvPr>
+        </p:nvSpPr>
+        <p:spPr/>
+        <p:txBody>
+          <a:bodyPr/>
+          <a:lstStyle/>
+          <a:p>
+            <a:endParaRPr lang="en-US" dirty="0"/>
+          </a:p>
+        </p:txBody>
+      </p:sp>
+      <p:sp>
+        <p:nvSpPr>
+          <p:cNvPr id="4" name="Slide Number Placeholder 3"/>
+          <p:cNvSpPr>
+            <a:spLocks noGrp="1"/>
+          </p:cNvSpPr>
+          <p:nvPr>
+            <p:ph type="sldNum" sz="quarter" idx="5"/>
+          </p:nvPr>
+        </p:nvSpPr>
+        <p:spPr/>
+        <p:txBody>
+          <a:bodyPr/>
+          <a:lstStyle/>
+          <a:p>
+            <a:fld id="{6BB7875C-9068-4E3A-A084-8798A05B51C5}" type="slidenum">
+              <a:rPr lang="en-US" smtClean="0"/>
+              <a:t>12</a:t>
+            </a:fld>
+            <a:endParaRPr lang="en-US"/>
+          </a:p>
+        </p:txBody>
+      </p:sp>
+    </p:spTree>
+    <p:extLst>
+      <p:ext uri="{BB962C8B-B14F-4D97-AF65-F5344CB8AC3E}">
+        <p14:creationId xmlns:p14="http://schemas.microsoft.com/office/powerpoint/2010/main" val="1951856176"/>
+      </p:ext>
+    </p:extLst>
+  </p:cSld>
+  <p:clrMapOvr>
+    <a:masterClrMapping/>
+  </p:clrMapOvr>
+</p:notes>
 </file>
 
 <file path=ppt/slideLayouts/slideLayout1.xml><?xml version="1.0" encoding="utf-8"?>
@@ -5953,6 +8982,192 @@
           <p:cNvPr id="2" name="Title 1">
             <a:extLst>
               <a:ext uri="{FF2B5EF4-FFF2-40B4-BE49-F238E27FC236}">
+                <a16:creationId xmlns:a16="http://schemas.microsoft.com/office/drawing/2014/main" id="{BFE25160-FB9B-1CE7-188D-9321428C207C}"/>
+              </a:ext>
+            </a:extLst>
+          </p:cNvPr>
+          <p:cNvSpPr>
+            <a:spLocks noGrp="1"/>
+          </p:cNvSpPr>
+          <p:nvPr>
+            <p:ph type="title"/>
+          </p:nvPr>
+        </p:nvSpPr>
+        <p:spPr/>
+        <p:txBody>
+          <a:bodyPr/>
+          <a:lstStyle/>
+          <a:p>
+            <a:endParaRPr lang="en-US"/>
+          </a:p>
+        </p:txBody>
+      </p:sp>
+      <p:pic>
+        <p:nvPicPr>
+          <p:cNvPr id="5" name="Content Placeholder 4">
+            <a:extLst>
+              <a:ext uri="{FF2B5EF4-FFF2-40B4-BE49-F238E27FC236}">
+                <a16:creationId xmlns:a16="http://schemas.microsoft.com/office/drawing/2014/main" id="{21112ADE-A8F0-F93D-E71A-0BAAC2C37CAC}"/>
+              </a:ext>
+            </a:extLst>
+          </p:cNvPr>
+          <p:cNvPicPr>
+            <a:picLocks noGrp="1" noChangeAspect="1"/>
+          </p:cNvPicPr>
+          <p:nvPr>
+            <p:ph idx="1"/>
+          </p:nvPr>
+        </p:nvPicPr>
+        <p:blipFill>
+          <a:blip r:embed="rId2">
+            <a:extLst>
+              <a:ext uri="{28A0092B-C50C-407E-A947-70E740481C1C}">
+                <a14:useLocalDpi xmlns:a14="http://schemas.microsoft.com/office/drawing/2010/main" val="0"/>
+              </a:ext>
+            </a:extLst>
+          </a:blip>
+          <a:stretch>
+            <a:fillRect/>
+          </a:stretch>
+        </p:blipFill>
+        <p:spPr>
+          <a:xfrm>
+            <a:off x="0" y="0"/>
+            <a:ext cx="12192000" cy="6840012"/>
+          </a:xfrm>
+          <a:prstGeom prst="rect">
+            <a:avLst/>
+          </a:prstGeom>
+        </p:spPr>
+      </p:pic>
+    </p:spTree>
+    <p:extLst>
+      <p:ext uri="{BB962C8B-B14F-4D97-AF65-F5344CB8AC3E}">
+        <p14:creationId xmlns:p14="http://schemas.microsoft.com/office/powerpoint/2010/main" val="505542708"/>
+      </p:ext>
+    </p:extLst>
+  </p:cSld>
+  <p:clrMapOvr>
+    <a:masterClrMapping/>
+  </p:clrMapOvr>
+</p:sld>
+</file>
+
+<file path=ppt/slides/slide12.xml><?xml version="1.0" encoding="utf-8"?>
+<p:sld xmlns:a="http://schemas.openxmlformats.org/drawingml/2006/main" xmlns:r="http://schemas.openxmlformats.org/officeDocument/2006/relationships" xmlns:p="http://schemas.openxmlformats.org/presentationml/2006/main">
+  <p:cSld>
+    <p:spTree>
+      <p:nvGrpSpPr>
+        <p:cNvPr id="1" name=""/>
+        <p:cNvGrpSpPr/>
+        <p:nvPr/>
+      </p:nvGrpSpPr>
+      <p:grpSpPr>
+        <a:xfrm>
+          <a:off x="0" y="0"/>
+          <a:ext cx="0" cy="0"/>
+          <a:chOff x="0" y="0"/>
+          <a:chExt cx="0" cy="0"/>
+        </a:xfrm>
+      </p:grpSpPr>
+      <p:sp>
+        <p:nvSpPr>
+          <p:cNvPr id="2" name="Title 1">
+            <a:extLst>
+              <a:ext uri="{FF2B5EF4-FFF2-40B4-BE49-F238E27FC236}">
+                <a16:creationId xmlns:a16="http://schemas.microsoft.com/office/drawing/2014/main" id="{D84CECBD-1E29-2A6F-98A8-D724FAB3FE8F}"/>
+              </a:ext>
+            </a:extLst>
+          </p:cNvPr>
+          <p:cNvSpPr>
+            <a:spLocks noGrp="1"/>
+          </p:cNvSpPr>
+          <p:nvPr>
+            <p:ph type="title"/>
+          </p:nvPr>
+        </p:nvSpPr>
+        <p:spPr/>
+        <p:txBody>
+          <a:bodyPr/>
+          <a:lstStyle/>
+          <a:p>
+            <a:endParaRPr lang="en-US"/>
+          </a:p>
+        </p:txBody>
+      </p:sp>
+      <p:pic>
+        <p:nvPicPr>
+          <p:cNvPr id="9" name="Content Placeholder 8">
+            <a:extLst>
+              <a:ext uri="{FF2B5EF4-FFF2-40B4-BE49-F238E27FC236}">
+                <a16:creationId xmlns:a16="http://schemas.microsoft.com/office/drawing/2014/main" id="{785920D5-5D9E-81F0-1868-F7AE43AAB9EB}"/>
+              </a:ext>
+            </a:extLst>
+          </p:cNvPr>
+          <p:cNvPicPr>
+            <a:picLocks noGrp="1" noChangeAspect="1"/>
+          </p:cNvPicPr>
+          <p:nvPr>
+            <p:ph idx="1"/>
+          </p:nvPr>
+        </p:nvPicPr>
+        <p:blipFill>
+          <a:blip r:embed="rId3">
+            <a:extLst>
+              <a:ext uri="{28A0092B-C50C-407E-A947-70E740481C1C}">
+                <a14:useLocalDpi xmlns:a14="http://schemas.microsoft.com/office/drawing/2010/main" val="0"/>
+              </a:ext>
+            </a:extLst>
+          </a:blip>
+          <a:stretch>
+            <a:fillRect/>
+          </a:stretch>
+        </p:blipFill>
+        <p:spPr>
+          <a:xfrm>
+            <a:off x="0" y="0"/>
+            <a:ext cx="12192000" cy="6858000"/>
+          </a:xfrm>
+          <a:prstGeom prst="rect">
+            <a:avLst/>
+          </a:prstGeom>
+        </p:spPr>
+      </p:pic>
+    </p:spTree>
+    <p:extLst>
+      <p:ext uri="{BB962C8B-B14F-4D97-AF65-F5344CB8AC3E}">
+        <p14:creationId xmlns:p14="http://schemas.microsoft.com/office/powerpoint/2010/main" val="1668359011"/>
+      </p:ext>
+    </p:extLst>
+  </p:cSld>
+  <p:clrMapOvr>
+    <a:masterClrMapping/>
+  </p:clrMapOvr>
+</p:sld>
+</file>
+
+<file path=ppt/slides/slide13.xml><?xml version="1.0" encoding="utf-8"?>
+<p:sld xmlns:a="http://schemas.openxmlformats.org/drawingml/2006/main" xmlns:r="http://schemas.openxmlformats.org/officeDocument/2006/relationships" xmlns:p="http://schemas.openxmlformats.org/presentationml/2006/main">
+  <p:cSld>
+    <p:spTree>
+      <p:nvGrpSpPr>
+        <p:cNvPr id="1" name=""/>
+        <p:cNvGrpSpPr/>
+        <p:nvPr/>
+      </p:nvGrpSpPr>
+      <p:grpSpPr>
+        <a:xfrm>
+          <a:off x="0" y="0"/>
+          <a:ext cx="0" cy="0"/>
+          <a:chOff x="0" y="0"/>
+          <a:chExt cx="0" cy="0"/>
+        </a:xfrm>
+      </p:grpSpPr>
+      <p:sp>
+        <p:nvSpPr>
+          <p:cNvPr id="2" name="Title 1">
+            <a:extLst>
+              <a:ext uri="{FF2B5EF4-FFF2-40B4-BE49-F238E27FC236}">
                 <a16:creationId xmlns:a16="http://schemas.microsoft.com/office/drawing/2014/main" id="{87CC76A8-3F01-5C0D-B40B-3DE65526991C}"/>
               </a:ext>
             </a:extLst>
@@ -6023,6 +9238,14 @@
 <file path=ppt/slides/slide2.xml><?xml version="1.0" encoding="utf-8"?>
 <p:sld xmlns:a="http://schemas.openxmlformats.org/drawingml/2006/main" xmlns:r="http://schemas.openxmlformats.org/officeDocument/2006/relationships" xmlns:p="http://schemas.openxmlformats.org/presentationml/2006/main">
   <p:cSld>
+    <p:bg>
+      <p:bgPr>
+        <a:solidFill>
+          <a:schemeClr val="bg1"/>
+        </a:solidFill>
+        <a:effectLst/>
+      </p:bgPr>
+    </p:bg>
     <p:spTree>
       <p:nvGrpSpPr>
         <p:cNvPr id="1" name=""/>
@@ -6053,13 +9276,21 @@
             <p:ph type="title"/>
           </p:nvPr>
         </p:nvSpPr>
-        <p:spPr/>
-        <p:txBody>
-          <a:bodyPr/>
+        <p:spPr>
+          <a:xfrm>
+            <a:off x="685799" y="764373"/>
+            <a:ext cx="3977639" cy="1600200"/>
+          </a:xfrm>
+        </p:spPr>
+        <p:txBody>
+          <a:bodyPr anchor="b">
+            <a:normAutofit/>
+          </a:bodyPr>
           <a:lstStyle/>
           <a:p>
-            <a:r>
-              <a:rPr lang="en-US" dirty="0"/>
+            <a:pPr algn="l"/>
+            <a:r>
+              <a:rPr lang="en-US" sz="3200"/>
               <a:t>Overview</a:t>
             </a:r>
           </a:p>
@@ -6081,36 +9312,134 @@
             <p:ph idx="1"/>
           </p:nvPr>
         </p:nvSpPr>
-        <p:spPr/>
-        <p:txBody>
-          <a:bodyPr/>
+        <p:spPr>
+          <a:xfrm>
+            <a:off x="685800" y="2364573"/>
+            <a:ext cx="3977639" cy="3854112"/>
+          </a:xfrm>
+        </p:spPr>
+        <p:txBody>
+          <a:bodyPr>
+            <a:normAutofit/>
+          </a:bodyPr>
           <a:lstStyle/>
           <a:p>
             <a:r>
-              <a:rPr lang="en-US" dirty="0"/>
+              <a:rPr lang="en-US" sz="1600"/>
               <a:t>What makes college football teams win?</a:t>
             </a:r>
           </a:p>
           <a:p>
             <a:r>
-              <a:rPr lang="en-US" dirty="0"/>
+              <a:rPr lang="en-US" sz="1600"/>
               <a:t>Why is offense import?</a:t>
             </a:r>
           </a:p>
           <a:p>
             <a:r>
-              <a:rPr lang="en-US" dirty="0"/>
+              <a:rPr lang="en-US" sz="1600"/>
               <a:t>Is offense all that’s important?</a:t>
             </a:r>
           </a:p>
           <a:p>
             <a:r>
-              <a:rPr lang="en-US" dirty="0"/>
+              <a:rPr lang="en-US" sz="1600"/>
               <a:t>Are there any teams that win differently?</a:t>
             </a:r>
           </a:p>
         </p:txBody>
       </p:sp>
+      <p:sp useBgFill="1">
+        <p:nvSpPr>
+          <p:cNvPr id="9" name="Rectangle 8">
+            <a:extLst>
+              <a:ext uri="{FF2B5EF4-FFF2-40B4-BE49-F238E27FC236}">
+                <a16:creationId xmlns:a16="http://schemas.microsoft.com/office/drawing/2014/main" id="{8D25211A-4CA0-4B53-82BB-1EE7C7F3C725}"/>
+              </a:ext>
+              <a:ext uri="{C183D7F6-B498-43B3-948B-1728B52AA6E4}">
+                <adec:decorative xmlns:adec="http://schemas.microsoft.com/office/drawing/2017/decorative" val="1"/>
+              </a:ext>
+            </a:extLst>
+          </p:cNvPr>
+          <p:cNvSpPr>
+            <a:spLocks noGrp="1" noRot="1" noChangeAspect="1" noMove="1" noResize="1" noEditPoints="1" noAdjustHandles="1" noChangeArrowheads="1" noChangeShapeType="1" noTextEdit="1"/>
+          </p:cNvSpPr>
+          <p:nvPr>
+            <p:extLst>
+              <p:ext uri="{386F3935-93C4-4BCD-93E2-E3B085C9AB24}">
+                <p16:designElem xmlns:p16="http://schemas.microsoft.com/office/powerpoint/2015/main" val="1"/>
+              </p:ext>
+            </p:extLst>
+          </p:nvPr>
+        </p:nvSpPr>
+        <p:spPr>
+          <a:xfrm>
+            <a:off x="4951379" y="0"/>
+            <a:ext cx="7240615" cy="6858000"/>
+          </a:xfrm>
+          <a:prstGeom prst="rect">
+            <a:avLst/>
+          </a:prstGeom>
+          <a:ln>
+            <a:noFill/>
+          </a:ln>
+        </p:spPr>
+        <p:style>
+          <a:lnRef idx="2">
+            <a:schemeClr val="accent1">
+              <a:shade val="50000"/>
+            </a:schemeClr>
+          </a:lnRef>
+          <a:fillRef idx="1">
+            <a:schemeClr val="accent1"/>
+          </a:fillRef>
+          <a:effectRef idx="0">
+            <a:schemeClr val="accent1"/>
+          </a:effectRef>
+          <a:fontRef idx="minor">
+            <a:schemeClr val="lt1"/>
+          </a:fontRef>
+        </p:style>
+        <p:txBody>
+          <a:bodyPr rtlCol="0" anchor="ctr"/>
+          <a:lstStyle/>
+          <a:p>
+            <a:pPr algn="ctr"/>
+            <a:endParaRPr lang="en-US"/>
+          </a:p>
+        </p:txBody>
+      </p:sp>
+      <p:pic>
+        <p:nvPicPr>
+          <p:cNvPr id="5" name="Picture 4" descr="Football line of scrimmage">
+            <a:extLst>
+              <a:ext uri="{FF2B5EF4-FFF2-40B4-BE49-F238E27FC236}">
+                <a16:creationId xmlns:a16="http://schemas.microsoft.com/office/drawing/2014/main" id="{712A89C0-2A4E-9C69-4365-52DED82B516B}"/>
+              </a:ext>
+            </a:extLst>
+          </p:cNvPr>
+          <p:cNvPicPr>
+            <a:picLocks noChangeAspect="1"/>
+          </p:cNvPicPr>
+          <p:nvPr/>
+        </p:nvPicPr>
+        <p:blipFill>
+          <a:blip r:embed="rId2"/>
+          <a:srcRect l="24332" r="7874"/>
+          <a:stretch>
+            <a:fillRect/>
+          </a:stretch>
+        </p:blipFill>
+        <p:spPr>
+          <a:xfrm>
+            <a:off x="5304147" y="10"/>
+            <a:ext cx="6887853" cy="6857990"/>
+          </a:xfrm>
+          <a:prstGeom prst="rect">
+            <a:avLst/>
+          </a:prstGeom>
+        </p:spPr>
+      </p:pic>
     </p:spTree>
     <p:extLst>
       <p:ext uri="{BB962C8B-B14F-4D97-AF65-F5344CB8AC3E}">
@@ -6729,6 +10058,14 @@
 <file path=ppt/slides/slide9.xml><?xml version="1.0" encoding="utf-8"?>
 <p:sld xmlns:a="http://schemas.openxmlformats.org/drawingml/2006/main" xmlns:r="http://schemas.openxmlformats.org/officeDocument/2006/relationships" xmlns:p="http://schemas.openxmlformats.org/presentationml/2006/main">
   <p:cSld>
+    <p:bg>
+      <p:bgPr>
+        <a:solidFill>
+          <a:schemeClr val="bg1"/>
+        </a:solidFill>
+        <a:effectLst/>
+      </p:bgPr>
+    </p:bg>
     <p:spTree>
       <p:nvGrpSpPr>
         <p:cNvPr id="1" name=""/>
@@ -6761,56 +10098,55 @@
         </p:nvSpPr>
         <p:spPr>
           <a:xfrm>
-            <a:off x="1524000" y="639315"/>
+            <a:off x="2895600" y="764373"/>
             <a:ext cx="8610600" cy="1293028"/>
           </a:xfrm>
         </p:spPr>
         <p:txBody>
-          <a:bodyPr/>
+          <a:bodyPr>
+            <a:normAutofit/>
+          </a:bodyPr>
           <a:lstStyle/>
           <a:p>
-            <a:pPr algn="ctr"/>
             <a:r>
               <a:rPr lang="en-US" dirty="0"/>
               <a:t>WIN PERCENTAGE</a:t>
             </a:r>
-          </a:p>
-        </p:txBody>
-      </p:sp>
-      <p:sp>
-        <p:nvSpPr>
-          <p:cNvPr id="3" name="Content Placeholder 2">
+            <a:endParaRPr lang="en-US"/>
+          </a:p>
+        </p:txBody>
+      </p:sp>
+      <p:graphicFrame>
+        <p:nvGraphicFramePr>
+          <p:cNvPr id="5" name="Content Placeholder 2">
             <a:extLst>
               <a:ext uri="{FF2B5EF4-FFF2-40B4-BE49-F238E27FC236}">
-                <a16:creationId xmlns:a16="http://schemas.microsoft.com/office/drawing/2014/main" id="{7E0BE363-136E-6CD3-E649-453F7876FD59}"/>
+                <a16:creationId xmlns:a16="http://schemas.microsoft.com/office/drawing/2014/main" id="{60AB4781-8E8D-8D81-C926-D0A6720028C4}"/>
               </a:ext>
             </a:extLst>
           </p:cNvPr>
-          <p:cNvSpPr>
-            <a:spLocks noGrp="1"/>
-          </p:cNvSpPr>
+          <p:cNvGraphicFramePr>
+            <a:graphicFrameLocks noGrp="1"/>
+          </p:cNvGraphicFramePr>
           <p:nvPr>
             <p:ph idx="1"/>
-          </p:nvPr>
-        </p:nvSpPr>
-        <p:spPr/>
-        <p:txBody>
-          <a:bodyPr/>
-          <a:lstStyle/>
-          <a:p>
-            <a:r>
-              <a:rPr lang="en-US" dirty="0"/>
-              <a:t>Median Win Percentage is 52.09%</a:t>
-            </a:r>
-          </a:p>
-          <a:p>
-            <a:r>
-              <a:rPr lang="en-US" dirty="0"/>
-              <a:t>Iowa’s is 68.03%</a:t>
-            </a:r>
-          </a:p>
-        </p:txBody>
-      </p:sp>
+            <p:extLst>
+              <p:ext uri="{D42A27DB-BD31-4B8C-83A1-F6EECF244321}">
+                <p14:modId xmlns:p14="http://schemas.microsoft.com/office/powerpoint/2010/main" val="39303818"/>
+              </p:ext>
+            </p:extLst>
+          </p:nvPr>
+        </p:nvGraphicFramePr>
+        <p:xfrm>
+          <a:off x="685800" y="2441051"/>
+          <a:ext cx="10820400" cy="3530062"/>
+        </p:xfrm>
+        <a:graphic>
+          <a:graphicData uri="http://schemas.openxmlformats.org/drawingml/2006/diagram">
+            <dgm:relIds xmlns:dgm="http://schemas.openxmlformats.org/drawingml/2006/diagram" xmlns:r="http://schemas.openxmlformats.org/officeDocument/2006/relationships" r:dm="rId2" r:lo="rId3" r:qs="rId4" r:cs="rId5"/>
+          </a:graphicData>
+        </a:graphic>
+      </p:graphicFrame>
     </p:spTree>
     <p:extLst>
       <p:ext uri="{BB962C8B-B14F-4D97-AF65-F5344CB8AC3E}">
@@ -7092,4 +10428,319 @@
     </a:ext>
   </a:extLst>
 </a:theme>
+</file>
+
+<file path=ppt/theme/theme2.xml><?xml version="1.0" encoding="utf-8"?>
+<a:theme xmlns:a="http://schemas.openxmlformats.org/drawingml/2006/main" name="Office Theme">
+  <a:themeElements>
+    <a:clrScheme name="Office">
+      <a:dk1>
+        <a:sysClr val="windowText" lastClr="000000"/>
+      </a:dk1>
+      <a:lt1>
+        <a:sysClr val="window" lastClr="FFFFFF"/>
+      </a:lt1>
+      <a:dk2>
+        <a:srgbClr val="0E2841"/>
+      </a:dk2>
+      <a:lt2>
+        <a:srgbClr val="E8E8E8"/>
+      </a:lt2>
+      <a:accent1>
+        <a:srgbClr val="156082"/>
+      </a:accent1>
+      <a:accent2>
+        <a:srgbClr val="E97132"/>
+      </a:accent2>
+      <a:accent3>
+        <a:srgbClr val="196B24"/>
+      </a:accent3>
+      <a:accent4>
+        <a:srgbClr val="0F9ED5"/>
+      </a:accent4>
+      <a:accent5>
+        <a:srgbClr val="A02B93"/>
+      </a:accent5>
+      <a:accent6>
+        <a:srgbClr val="4EA72E"/>
+      </a:accent6>
+      <a:hlink>
+        <a:srgbClr val="467886"/>
+      </a:hlink>
+      <a:folHlink>
+        <a:srgbClr val="96607D"/>
+      </a:folHlink>
+    </a:clrScheme>
+    <a:fontScheme name="Office">
+      <a:majorFont>
+        <a:latin typeface="Aptos Display" panose="02110004020202020204"/>
+        <a:ea typeface=""/>
+        <a:cs typeface=""/>
+        <a:font script="Jpan" typeface="游ゴシック Light"/>
+        <a:font script="Hang" typeface="맑은 고딕"/>
+        <a:font script="Hans" typeface="等线 Light"/>
+        <a:font script="Hant" typeface="新細明體"/>
+        <a:font script="Arab" typeface="Times New Roman"/>
+        <a:font script="Hebr" typeface="Times New Roman"/>
+        <a:font script="Thai" typeface="Angsana New"/>
+        <a:font script="Ethi" typeface="Nyala"/>
+        <a:font script="Beng" typeface="Vrinda"/>
+        <a:font script="Gujr" typeface="Shruti"/>
+        <a:font script="Khmr" typeface="MoolBoran"/>
+        <a:font script="Knda" typeface="Tunga"/>
+        <a:font script="Guru" typeface="Raavi"/>
+        <a:font script="Cans" typeface="Euphemia"/>
+        <a:font script="Cher" typeface="Plantagenet Cherokee"/>
+        <a:font script="Yiii" typeface="Microsoft Yi Baiti"/>
+        <a:font script="Tibt" typeface="Microsoft Himalaya"/>
+        <a:font script="Thaa" typeface="MV Boli"/>
+        <a:font script="Deva" typeface="Mangal"/>
+        <a:font script="Telu" typeface="Gautami"/>
+        <a:font script="Taml" typeface="Latha"/>
+        <a:font script="Syrc" typeface="Estrangelo Edessa"/>
+        <a:font script="Orya" typeface="Kalinga"/>
+        <a:font script="Mlym" typeface="Kartika"/>
+        <a:font script="Laoo" typeface="DokChampa"/>
+        <a:font script="Sinh" typeface="Iskoola Pota"/>
+        <a:font script="Mong" typeface="Mongolian Baiti"/>
+        <a:font script="Viet" typeface="Times New Roman"/>
+        <a:font script="Uigh" typeface="Microsoft Uighur"/>
+        <a:font script="Geor" typeface="Sylfaen"/>
+        <a:font script="Armn" typeface="Arial"/>
+        <a:font script="Bugi" typeface="Leelawadee UI"/>
+        <a:font script="Bopo" typeface="Microsoft JhengHei"/>
+        <a:font script="Java" typeface="Javanese Text"/>
+        <a:font script="Lisu" typeface="Segoe UI"/>
+        <a:font script="Mymr" typeface="Myanmar Text"/>
+        <a:font script="Nkoo" typeface="Ebrima"/>
+        <a:font script="Olck" typeface="Nirmala UI"/>
+        <a:font script="Osma" typeface="Ebrima"/>
+        <a:font script="Phag" typeface="Phagspa"/>
+        <a:font script="Syrn" typeface="Estrangelo Edessa"/>
+        <a:font script="Syrj" typeface="Estrangelo Edessa"/>
+        <a:font script="Syre" typeface="Estrangelo Edessa"/>
+        <a:font script="Sora" typeface="Nirmala UI"/>
+        <a:font script="Tale" typeface="Microsoft Tai Le"/>
+        <a:font script="Talu" typeface="Microsoft New Tai Lue"/>
+        <a:font script="Tfng" typeface="Ebrima"/>
+      </a:majorFont>
+      <a:minorFont>
+        <a:latin typeface="Aptos" panose="02110004020202020204"/>
+        <a:ea typeface=""/>
+        <a:cs typeface=""/>
+        <a:font script="Jpan" typeface="游ゴシック"/>
+        <a:font script="Hang" typeface="맑은 고딕"/>
+        <a:font script="Hans" typeface="等线"/>
+        <a:font script="Hant" typeface="新細明體"/>
+        <a:font script="Arab" typeface="Arial"/>
+        <a:font script="Hebr" typeface="Arial"/>
+        <a:font script="Thai" typeface="Cordia New"/>
+        <a:font script="Ethi" typeface="Nyala"/>
+        <a:font script="Beng" typeface="Vrinda"/>
+        <a:font script="Gujr" typeface="Shruti"/>
+        <a:font script="Khmr" typeface="DaunPenh"/>
+        <a:font script="Knda" typeface="Tunga"/>
+        <a:font script="Guru" typeface="Raavi"/>
+        <a:font script="Cans" typeface="Euphemia"/>
+        <a:font script="Cher" typeface="Plantagenet Cherokee"/>
+        <a:font script="Yiii" typeface="Microsoft Yi Baiti"/>
+        <a:font script="Tibt" typeface="Microsoft Himalaya"/>
+        <a:font script="Thaa" typeface="MV Boli"/>
+        <a:font script="Deva" typeface="Mangal"/>
+        <a:font script="Telu" typeface="Gautami"/>
+        <a:font script="Taml" typeface="Latha"/>
+        <a:font script="Syrc" typeface="Estrangelo Edessa"/>
+        <a:font script="Orya" typeface="Kalinga"/>
+        <a:font script="Mlym" typeface="Kartika"/>
+        <a:font script="Laoo" typeface="DokChampa"/>
+        <a:font script="Sinh" typeface="Iskoola Pota"/>
+        <a:font script="Mong" typeface="Mongolian Baiti"/>
+        <a:font script="Viet" typeface="Arial"/>
+        <a:font script="Uigh" typeface="Microsoft Uighur"/>
+        <a:font script="Geor" typeface="Sylfaen"/>
+        <a:font script="Armn" typeface="Arial"/>
+        <a:font script="Bugi" typeface="Leelawadee UI"/>
+        <a:font script="Bopo" typeface="Microsoft JhengHei"/>
+        <a:font script="Java" typeface="Javanese Text"/>
+        <a:font script="Lisu" typeface="Segoe UI"/>
+        <a:font script="Mymr" typeface="Myanmar Text"/>
+        <a:font script="Nkoo" typeface="Ebrima"/>
+        <a:font script="Olck" typeface="Nirmala UI"/>
+        <a:font script="Osma" typeface="Ebrima"/>
+        <a:font script="Phag" typeface="Phagspa"/>
+        <a:font script="Syrn" typeface="Estrangelo Edessa"/>
+        <a:font script="Syrj" typeface="Estrangelo Edessa"/>
+        <a:font script="Syre" typeface="Estrangelo Edessa"/>
+        <a:font script="Sora" typeface="Nirmala UI"/>
+        <a:font script="Tale" typeface="Microsoft Tai Le"/>
+        <a:font script="Talu" typeface="Microsoft New Tai Lue"/>
+        <a:font script="Tfng" typeface="Ebrima"/>
+      </a:minorFont>
+    </a:fontScheme>
+    <a:fmtScheme name="Office">
+      <a:fillStyleLst>
+        <a:solidFill>
+          <a:schemeClr val="phClr"/>
+        </a:solidFill>
+        <a:gradFill rotWithShape="1">
+          <a:gsLst>
+            <a:gs pos="0">
+              <a:schemeClr val="phClr">
+                <a:lumMod val="110000"/>
+                <a:satMod val="105000"/>
+                <a:tint val="67000"/>
+              </a:schemeClr>
+            </a:gs>
+            <a:gs pos="50000">
+              <a:schemeClr val="phClr">
+                <a:lumMod val="105000"/>
+                <a:satMod val="103000"/>
+                <a:tint val="73000"/>
+              </a:schemeClr>
+            </a:gs>
+            <a:gs pos="100000">
+              <a:schemeClr val="phClr">
+                <a:lumMod val="105000"/>
+                <a:satMod val="109000"/>
+                <a:tint val="81000"/>
+              </a:schemeClr>
+            </a:gs>
+          </a:gsLst>
+          <a:lin ang="5400000" scaled="0"/>
+        </a:gradFill>
+        <a:gradFill rotWithShape="1">
+          <a:gsLst>
+            <a:gs pos="0">
+              <a:schemeClr val="phClr">
+                <a:satMod val="103000"/>
+                <a:lumMod val="102000"/>
+                <a:tint val="94000"/>
+              </a:schemeClr>
+            </a:gs>
+            <a:gs pos="50000">
+              <a:schemeClr val="phClr">
+                <a:satMod val="110000"/>
+                <a:lumMod val="100000"/>
+                <a:shade val="100000"/>
+              </a:schemeClr>
+            </a:gs>
+            <a:gs pos="100000">
+              <a:schemeClr val="phClr">
+                <a:lumMod val="99000"/>
+                <a:satMod val="120000"/>
+                <a:shade val="78000"/>
+              </a:schemeClr>
+            </a:gs>
+          </a:gsLst>
+          <a:lin ang="5400000" scaled="0"/>
+        </a:gradFill>
+      </a:fillStyleLst>
+      <a:lnStyleLst>
+        <a:ln w="12700" cap="flat" cmpd="sng" algn="ctr">
+          <a:solidFill>
+            <a:schemeClr val="phClr"/>
+          </a:solidFill>
+          <a:prstDash val="solid"/>
+          <a:miter lim="800000"/>
+        </a:ln>
+        <a:ln w="19050" cap="flat" cmpd="sng" algn="ctr">
+          <a:solidFill>
+            <a:schemeClr val="phClr"/>
+          </a:solidFill>
+          <a:prstDash val="solid"/>
+          <a:miter lim="800000"/>
+        </a:ln>
+        <a:ln w="25400" cap="flat" cmpd="sng" algn="ctr">
+          <a:solidFill>
+            <a:schemeClr val="phClr"/>
+          </a:solidFill>
+          <a:prstDash val="solid"/>
+          <a:miter lim="800000"/>
+        </a:ln>
+      </a:lnStyleLst>
+      <a:effectStyleLst>
+        <a:effectStyle>
+          <a:effectLst/>
+        </a:effectStyle>
+        <a:effectStyle>
+          <a:effectLst/>
+        </a:effectStyle>
+        <a:effectStyle>
+          <a:effectLst>
+            <a:outerShdw blurRad="57150" dist="19050" dir="5400000" algn="ctr" rotWithShape="0">
+              <a:srgbClr val="000000">
+                <a:alpha val="63000"/>
+              </a:srgbClr>
+            </a:outerShdw>
+          </a:effectLst>
+        </a:effectStyle>
+      </a:effectStyleLst>
+      <a:bgFillStyleLst>
+        <a:solidFill>
+          <a:schemeClr val="phClr"/>
+        </a:solidFill>
+        <a:solidFill>
+          <a:schemeClr val="phClr">
+            <a:tint val="95000"/>
+            <a:satMod val="170000"/>
+          </a:schemeClr>
+        </a:solidFill>
+        <a:gradFill rotWithShape="1">
+          <a:gsLst>
+            <a:gs pos="0">
+              <a:schemeClr val="phClr">
+                <a:tint val="93000"/>
+                <a:satMod val="150000"/>
+                <a:shade val="98000"/>
+                <a:lumMod val="102000"/>
+              </a:schemeClr>
+            </a:gs>
+            <a:gs pos="50000">
+              <a:schemeClr val="phClr">
+                <a:tint val="98000"/>
+                <a:satMod val="130000"/>
+                <a:shade val="90000"/>
+                <a:lumMod val="103000"/>
+              </a:schemeClr>
+            </a:gs>
+            <a:gs pos="100000">
+              <a:schemeClr val="phClr">
+                <a:shade val="63000"/>
+                <a:satMod val="120000"/>
+              </a:schemeClr>
+            </a:gs>
+          </a:gsLst>
+          <a:lin ang="5400000" scaled="0"/>
+        </a:gradFill>
+      </a:bgFillStyleLst>
+    </a:fmtScheme>
+  </a:themeElements>
+  <a:objectDefaults>
+    <a:lnDef>
+      <a:spPr/>
+      <a:bodyPr/>
+      <a:lstStyle/>
+      <a:style>
+        <a:lnRef idx="2">
+          <a:schemeClr val="accent1"/>
+        </a:lnRef>
+        <a:fillRef idx="0">
+          <a:schemeClr val="accent1"/>
+        </a:fillRef>
+        <a:effectRef idx="1">
+          <a:schemeClr val="accent1"/>
+        </a:effectRef>
+        <a:fontRef idx="minor">
+          <a:schemeClr val="tx1"/>
+        </a:fontRef>
+      </a:style>
+    </a:lnDef>
+  </a:objectDefaults>
+  <a:extraClrSchemeLst/>
+  <a:extLst>
+    <a:ext uri="{05A4C25C-085E-4340-85A3-A5531E510DB2}">
+      <thm15:themeFamily xmlns:thm15="http://schemas.microsoft.com/office/thememl/2012/main" name="Office Theme" id="{2E142A2C-CD16-42D6-873A-C26D2A0506FA}" vid="{1BDDFF52-6CD6-40A5-AB3C-68EB2F1E4D0A}"/>
+    </a:ext>
+  </a:extLst>
+</a:theme>
 </file>
--- a/DDI COLLEGE FOOTBALL PRESENTATION.pptx
+++ b/DDI COLLEGE FOOTBALL PRESENTATION.pptx
@@ -1106,8 +1106,8 @@
         <a:lstStyle/>
         <a:p>
           <a:r>
-            <a:rPr lang="en-US"/>
-            <a:t>Iowa’s is 68.03%</a:t>
+            <a:rPr lang="en-US" dirty="0"/>
+            <a:t>Iowa’s is 68.1%</a:t>
           </a:r>
         </a:p>
       </dgm:t>
@@ -1480,8 +1480,8 @@
             <a:buNone/>
           </a:pPr>
           <a:r>
-            <a:rPr lang="en-US" sz="2500" kern="1200"/>
-            <a:t>Iowa’s is 68.03%</a:t>
+            <a:rPr lang="en-US" sz="2500" kern="1200" dirty="0"/>
+            <a:t>Iowa’s is 68.1%</a:t>
           </a:r>
         </a:p>
       </dsp:txBody>
@@ -8899,13 +8899,8 @@
             <a:pPr algn="ctr"/>
             <a:r>
               <a:rPr lang="en-US" dirty="0"/>
-              <a:t>Iowa vs </a:t>
-            </a:r>
-            <a:r>
-              <a:rPr lang="en-US" dirty="0" err="1"/>
-              <a:t>nebraska</a:t>
-            </a:r>
-            <a:endParaRPr lang="en-US" dirty="0"/>
+              <a:t>Iowa vs Nebraska</a:t>
+            </a:r>
           </a:p>
         </p:txBody>
       </p:sp>
@@ -10132,7 +10127,7 @@
             <p:ph idx="1"/>
             <p:extLst>
               <p:ext uri="{D42A27DB-BD31-4B8C-83A1-F6EECF244321}">
-                <p14:modId xmlns:p14="http://schemas.microsoft.com/office/powerpoint/2010/main" val="39303818"/>
+                <p14:modId xmlns:p14="http://schemas.microsoft.com/office/powerpoint/2010/main" val="1780709183"/>
               </p:ext>
             </p:extLst>
           </p:nvPr>

--- a/DDI COLLEGE FOOTBALL PRESENTATION.pptx
+++ b/DDI COLLEGE FOOTBALL PRESENTATION.pptx
@@ -5,7 +5,7 @@
     <p:sldMasterId id="2147483672" r:id="rId1"/>
   </p:sldMasterIdLst>
   <p:notesMasterIdLst>
-    <p:notesMasterId r:id="rId15"/>
+    <p:notesMasterId r:id="rId14"/>
   </p:notesMasterIdLst>
   <p:sldIdLst>
     <p:sldId id="256" r:id="rId2"/>
@@ -19,8 +19,7 @@
     <p:sldId id="263" r:id="rId10"/>
     <p:sldId id="264" r:id="rId11"/>
     <p:sldId id="267" r:id="rId12"/>
-    <p:sldId id="268" r:id="rId13"/>
-    <p:sldId id="265" r:id="rId14"/>
+    <p:sldId id="265" r:id="rId13"/>
   </p:sldIdLst>
   <p:sldSz cx="12192000" cy="6858000"/>
   <p:notesSz cx="6858000" cy="9144000"/>
@@ -1254,7 +1253,9 @@
     <dgm:cxn modelId="{C19B39DB-4C74-49FF-B346-B3B0A1B3E45E}" type="presParOf" srcId="{6619B34D-1FC0-46AD-ADD3-9FC1355DAF97}" destId="{F0F88C58-F5EF-42DE-9992-45EDD10CA27A}" srcOrd="1" destOrd="0" presId="urn:microsoft.com/office/officeart/2018/2/layout/IconLabelList"/>
     <dgm:cxn modelId="{94D3E02A-7DE7-430E-BBDB-4F79E1C3ECFB}" type="presParOf" srcId="{6619B34D-1FC0-46AD-ADD3-9FC1355DAF97}" destId="{812A46B1-7C12-4421-B290-901E6D9096E4}" srcOrd="2" destOrd="0" presId="urn:microsoft.com/office/officeart/2018/2/layout/IconLabelList"/>
   </dgm:cxnLst>
-  <dgm:bg/>
+  <dgm:bg>
+    <a:noFill/>
+  </dgm:bg>
   <dgm:whole/>
   <dgm:extLst>
     <a:ext uri="http://schemas.microsoft.com/office/drawing/2008/diagram">
@@ -3132,7 +3133,7 @@
           <a:p>
             <a:fld id="{6BB7875C-9068-4E3A-A084-8798A05B51C5}" type="slidenum">
               <a:rPr lang="en-US" smtClean="0"/>
-              <a:t>12</a:t>
+              <a:t>11</a:t>
             </a:fld>
             <a:endParaRPr lang="en-US"/>
           </a:p>
@@ -3141,7 +3142,7 @@
     </p:spTree>
     <p:extLst>
       <p:ext uri="{BB962C8B-B14F-4D97-AF65-F5344CB8AC3E}">
-        <p14:creationId xmlns:p14="http://schemas.microsoft.com/office/powerpoint/2010/main" val="1951856176"/>
+        <p14:creationId xmlns:p14="http://schemas.microsoft.com/office/powerpoint/2010/main" val="2718702286"/>
       </p:ext>
     </p:extLst>
   </p:cSld>
@@ -8942,6 +8943,100 @@
           </a:prstGeom>
         </p:spPr>
       </p:pic>
+      <p:pic>
+        <p:nvPicPr>
+          <p:cNvPr id="3074" name="Picture 2" descr="🔥 [50+] Iowa Hawkeye Wallpapers Screensavers | WallpaperSafari">
+            <a:extLst>
+              <a:ext uri="{FF2B5EF4-FFF2-40B4-BE49-F238E27FC236}">
+                <a16:creationId xmlns:a16="http://schemas.microsoft.com/office/drawing/2014/main" id="{E0AD162E-811E-B550-E014-FBE5053C7C77}"/>
+              </a:ext>
+            </a:extLst>
+          </p:cNvPr>
+          <p:cNvPicPr>
+            <a:picLocks noChangeAspect="1" noChangeArrowheads="1"/>
+          </p:cNvPicPr>
+          <p:nvPr/>
+        </p:nvPicPr>
+        <p:blipFill>
+          <a:blip r:embed="rId3">
+            <a:extLst>
+              <a:ext uri="{28A0092B-C50C-407E-A947-70E740481C1C}">
+                <a14:useLocalDpi xmlns:a14="http://schemas.microsoft.com/office/drawing/2010/main" val="0"/>
+              </a:ext>
+            </a:extLst>
+          </a:blip>
+          <a:srcRect/>
+          <a:stretch>
+            <a:fillRect/>
+          </a:stretch>
+        </p:blipFill>
+        <p:spPr bwMode="auto">
+          <a:xfrm>
+            <a:off x="706505" y="145334"/>
+            <a:ext cx="2017490" cy="1513906"/>
+          </a:xfrm>
+          <a:prstGeom prst="rect">
+            <a:avLst/>
+          </a:prstGeom>
+          <a:noFill/>
+          <a:extLst>
+            <a:ext uri="{909E8E84-426E-40DD-AFC4-6F175D3DCCD1}">
+              <a14:hiddenFill xmlns:a14="http://schemas.microsoft.com/office/drawing/2010/main">
+                <a:solidFill>
+                  <a:srgbClr val="FFFFFF"/>
+                </a:solidFill>
+              </a14:hiddenFill>
+            </a:ext>
+          </a:extLst>
+        </p:spPr>
+      </p:pic>
+      <p:pic>
+        <p:nvPicPr>
+          <p:cNvPr id="3076" name="Picture 4" descr="Pin by Laine Greblunas on nebraska life | Nebraska cornhuskers, Nebraska, Blackshirts">
+            <a:extLst>
+              <a:ext uri="{FF2B5EF4-FFF2-40B4-BE49-F238E27FC236}">
+                <a16:creationId xmlns:a16="http://schemas.microsoft.com/office/drawing/2014/main" id="{52D238D2-D2C5-A2FC-2B85-E1406C16D02A}"/>
+              </a:ext>
+            </a:extLst>
+          </p:cNvPr>
+          <p:cNvPicPr>
+            <a:picLocks noChangeAspect="1" noChangeArrowheads="1"/>
+          </p:cNvPicPr>
+          <p:nvPr/>
+        </p:nvPicPr>
+        <p:blipFill>
+          <a:blip r:embed="rId4">
+            <a:extLst>
+              <a:ext uri="{28A0092B-C50C-407E-A947-70E740481C1C}">
+                <a14:useLocalDpi xmlns:a14="http://schemas.microsoft.com/office/drawing/2010/main" val="0"/>
+              </a:ext>
+            </a:extLst>
+          </a:blip>
+          <a:srcRect/>
+          <a:stretch>
+            <a:fillRect/>
+          </a:stretch>
+        </p:blipFill>
+        <p:spPr bwMode="auto">
+          <a:xfrm>
+            <a:off x="9135876" y="145334"/>
+            <a:ext cx="2264288" cy="1499462"/>
+          </a:xfrm>
+          <a:prstGeom prst="rect">
+            <a:avLst/>
+          </a:prstGeom>
+          <a:noFill/>
+          <a:extLst>
+            <a:ext uri="{909E8E84-426E-40DD-AFC4-6F175D3DCCD1}">
+              <a14:hiddenFill xmlns:a14="http://schemas.microsoft.com/office/drawing/2010/main">
+                <a:solidFill>
+                  <a:srgbClr val="FFFFFF"/>
+                </a:solidFill>
+              </a14:hiddenFill>
+            </a:ext>
+          </a:extLst>
+        </p:spPr>
+      </p:pic>
     </p:spTree>
     <p:extLst>
       <p:ext uri="{BB962C8B-B14F-4D97-AF65-F5344CB8AC3E}">
@@ -9014,7 +9109,7 @@
           </p:nvPr>
         </p:nvPicPr>
         <p:blipFill>
-          <a:blip r:embed="rId2">
+          <a:blip r:embed="rId3">
             <a:extLst>
               <a:ext uri="{28A0092B-C50C-407E-A947-70E740481C1C}">
                 <a14:useLocalDpi xmlns:a14="http://schemas.microsoft.com/office/drawing/2010/main" val="0"/>
@@ -9049,99 +9144,6 @@
 </file>
 
 <file path=ppt/slides/slide12.xml><?xml version="1.0" encoding="utf-8"?>
-<p:sld xmlns:a="http://schemas.openxmlformats.org/drawingml/2006/main" xmlns:r="http://schemas.openxmlformats.org/officeDocument/2006/relationships" xmlns:p="http://schemas.openxmlformats.org/presentationml/2006/main">
-  <p:cSld>
-    <p:spTree>
-      <p:nvGrpSpPr>
-        <p:cNvPr id="1" name=""/>
-        <p:cNvGrpSpPr/>
-        <p:nvPr/>
-      </p:nvGrpSpPr>
-      <p:grpSpPr>
-        <a:xfrm>
-          <a:off x="0" y="0"/>
-          <a:ext cx="0" cy="0"/>
-          <a:chOff x="0" y="0"/>
-          <a:chExt cx="0" cy="0"/>
-        </a:xfrm>
-      </p:grpSpPr>
-      <p:sp>
-        <p:nvSpPr>
-          <p:cNvPr id="2" name="Title 1">
-            <a:extLst>
-              <a:ext uri="{FF2B5EF4-FFF2-40B4-BE49-F238E27FC236}">
-                <a16:creationId xmlns:a16="http://schemas.microsoft.com/office/drawing/2014/main" id="{D84CECBD-1E29-2A6F-98A8-D724FAB3FE8F}"/>
-              </a:ext>
-            </a:extLst>
-          </p:cNvPr>
-          <p:cNvSpPr>
-            <a:spLocks noGrp="1"/>
-          </p:cNvSpPr>
-          <p:nvPr>
-            <p:ph type="title"/>
-          </p:nvPr>
-        </p:nvSpPr>
-        <p:spPr/>
-        <p:txBody>
-          <a:bodyPr/>
-          <a:lstStyle/>
-          <a:p>
-            <a:endParaRPr lang="en-US"/>
-          </a:p>
-        </p:txBody>
-      </p:sp>
-      <p:pic>
-        <p:nvPicPr>
-          <p:cNvPr id="9" name="Content Placeholder 8">
-            <a:extLst>
-              <a:ext uri="{FF2B5EF4-FFF2-40B4-BE49-F238E27FC236}">
-                <a16:creationId xmlns:a16="http://schemas.microsoft.com/office/drawing/2014/main" id="{785920D5-5D9E-81F0-1868-F7AE43AAB9EB}"/>
-              </a:ext>
-            </a:extLst>
-          </p:cNvPr>
-          <p:cNvPicPr>
-            <a:picLocks noGrp="1" noChangeAspect="1"/>
-          </p:cNvPicPr>
-          <p:nvPr>
-            <p:ph idx="1"/>
-          </p:nvPr>
-        </p:nvPicPr>
-        <p:blipFill>
-          <a:blip r:embed="rId3">
-            <a:extLst>
-              <a:ext uri="{28A0092B-C50C-407E-A947-70E740481C1C}">
-                <a14:useLocalDpi xmlns:a14="http://schemas.microsoft.com/office/drawing/2010/main" val="0"/>
-              </a:ext>
-            </a:extLst>
-          </a:blip>
-          <a:stretch>
-            <a:fillRect/>
-          </a:stretch>
-        </p:blipFill>
-        <p:spPr>
-          <a:xfrm>
-            <a:off x="0" y="0"/>
-            <a:ext cx="12192000" cy="6858000"/>
-          </a:xfrm>
-          <a:prstGeom prst="rect">
-            <a:avLst/>
-          </a:prstGeom>
-        </p:spPr>
-      </p:pic>
-    </p:spTree>
-    <p:extLst>
-      <p:ext uri="{BB962C8B-B14F-4D97-AF65-F5344CB8AC3E}">
-        <p14:creationId xmlns:p14="http://schemas.microsoft.com/office/powerpoint/2010/main" val="1668359011"/>
-      </p:ext>
-    </p:extLst>
-  </p:cSld>
-  <p:clrMapOvr>
-    <a:masterClrMapping/>
-  </p:clrMapOvr>
-</p:sld>
-</file>
-
-<file path=ppt/slides/slide13.xml><?xml version="1.0" encoding="utf-8"?>
 <p:sld xmlns:a="http://schemas.openxmlformats.org/drawingml/2006/main" xmlns:r="http://schemas.openxmlformats.org/officeDocument/2006/relationships" xmlns:p="http://schemas.openxmlformats.org/presentationml/2006/main">
   <p:cSld>
     <p:spTree>
@@ -9835,6 +9837,100 @@
           </a:prstGeom>
         </p:spPr>
       </p:pic>
+      <p:pic>
+        <p:nvPicPr>
+          <p:cNvPr id="1026" name="Picture 2" descr="Liberty University Football Logo">
+            <a:extLst>
+              <a:ext uri="{FF2B5EF4-FFF2-40B4-BE49-F238E27FC236}">
+                <a16:creationId xmlns:a16="http://schemas.microsoft.com/office/drawing/2014/main" id="{8FEEB0C4-A973-6DD4-5696-C35E6F25F369}"/>
+              </a:ext>
+            </a:extLst>
+          </p:cNvPr>
+          <p:cNvPicPr>
+            <a:picLocks noChangeAspect="1" noChangeArrowheads="1"/>
+          </p:cNvPicPr>
+          <p:nvPr/>
+        </p:nvPicPr>
+        <p:blipFill>
+          <a:blip r:embed="rId3">
+            <a:extLst>
+              <a:ext uri="{28A0092B-C50C-407E-A947-70E740481C1C}">
+                <a14:useLocalDpi xmlns:a14="http://schemas.microsoft.com/office/drawing/2010/main" val="0"/>
+              </a:ext>
+            </a:extLst>
+          </a:blip>
+          <a:srcRect/>
+          <a:stretch>
+            <a:fillRect/>
+          </a:stretch>
+        </p:blipFill>
+        <p:spPr bwMode="auto">
+          <a:xfrm flipH="1">
+            <a:off x="182877" y="146985"/>
+            <a:ext cx="2800125" cy="1750078"/>
+          </a:xfrm>
+          <a:prstGeom prst="rect">
+            <a:avLst/>
+          </a:prstGeom>
+          <a:noFill/>
+          <a:extLst>
+            <a:ext uri="{909E8E84-426E-40DD-AFC4-6F175D3DCCD1}">
+              <a14:hiddenFill xmlns:a14="http://schemas.microsoft.com/office/drawing/2010/main">
+                <a:solidFill>
+                  <a:srgbClr val="FFFFFF"/>
+                </a:solidFill>
+              </a14:hiddenFill>
+            </a:ext>
+          </a:extLst>
+        </p:spPr>
+      </p:pic>
+      <p:pic>
+        <p:nvPicPr>
+          <p:cNvPr id="1028" name="Picture 4" descr="AKedOLQEbKYxSW15dUfZJmyBOaOF7e4zfvXI1taXh3mHYQ=s900-c-k-c0x00ffffff-no-rj">
+            <a:extLst>
+              <a:ext uri="{FF2B5EF4-FFF2-40B4-BE49-F238E27FC236}">
+                <a16:creationId xmlns:a16="http://schemas.microsoft.com/office/drawing/2014/main" id="{D33054E0-84C4-6E66-F5C1-5930CD80E243}"/>
+              </a:ext>
+            </a:extLst>
+          </p:cNvPr>
+          <p:cNvPicPr>
+            <a:picLocks noChangeAspect="1" noChangeArrowheads="1"/>
+          </p:cNvPicPr>
+          <p:nvPr/>
+        </p:nvPicPr>
+        <p:blipFill>
+          <a:blip r:embed="rId4">
+            <a:extLst>
+              <a:ext uri="{28A0092B-C50C-407E-A947-70E740481C1C}">
+                <a14:useLocalDpi xmlns:a14="http://schemas.microsoft.com/office/drawing/2010/main" val="0"/>
+              </a:ext>
+            </a:extLst>
+          </a:blip>
+          <a:srcRect/>
+          <a:stretch>
+            <a:fillRect/>
+          </a:stretch>
+        </p:blipFill>
+        <p:spPr bwMode="auto">
+          <a:xfrm>
+            <a:off x="9687817" y="139627"/>
+            <a:ext cx="2046803" cy="2046803"/>
+          </a:xfrm>
+          <a:prstGeom prst="rect">
+            <a:avLst/>
+          </a:prstGeom>
+          <a:noFill/>
+          <a:extLst>
+            <a:ext uri="{909E8E84-426E-40DD-AFC4-6F175D3DCCD1}">
+              <a14:hiddenFill xmlns:a14="http://schemas.microsoft.com/office/drawing/2010/main">
+                <a:solidFill>
+                  <a:srgbClr val="FFFFFF"/>
+                </a:solidFill>
+              </a14:hiddenFill>
+            </a:ext>
+          </a:extLst>
+        </p:spPr>
+      </p:pic>
     </p:spTree>
     <p:extLst>
       <p:ext uri="{BB962C8B-B14F-4D97-AF65-F5344CB8AC3E}">
@@ -10035,6 +10131,98 @@
           <a:prstGeom prst="rect">
             <a:avLst/>
           </a:prstGeom>
+        </p:spPr>
+      </p:pic>
+      <p:sp>
+        <p:nvSpPr>
+          <p:cNvPr id="3" name="AutoShape 2" descr="Iowa Hawkeyes full logo transparent PNG - StickPNG">
+            <a:extLst>
+              <a:ext uri="{FF2B5EF4-FFF2-40B4-BE49-F238E27FC236}">
+                <a16:creationId xmlns:a16="http://schemas.microsoft.com/office/drawing/2014/main" id="{DF1CD587-B66B-3CAE-96AA-BD8C93623674}"/>
+              </a:ext>
+            </a:extLst>
+          </p:cNvPr>
+          <p:cNvSpPr>
+            <a:spLocks noChangeAspect="1" noChangeArrowheads="1"/>
+          </p:cNvSpPr>
+          <p:nvPr/>
+        </p:nvSpPr>
+        <p:spPr bwMode="auto">
+          <a:xfrm>
+            <a:off x="5943600" y="3276600"/>
+            <a:ext cx="304800" cy="304800"/>
+          </a:xfrm>
+          <a:prstGeom prst="rect">
+            <a:avLst/>
+          </a:prstGeom>
+          <a:noFill/>
+          <a:extLst>
+            <a:ext uri="{909E8E84-426E-40DD-AFC4-6F175D3DCCD1}">
+              <a14:hiddenFill xmlns:a14="http://schemas.microsoft.com/office/drawing/2010/main">
+                <a:solidFill>
+                  <a:srgbClr val="FFFFFF"/>
+                </a:solidFill>
+              </a14:hiddenFill>
+            </a:ext>
+          </a:extLst>
+        </p:spPr>
+        <p:txBody>
+          <a:bodyPr vert="horz" wrap="square" lIns="91440" tIns="45720" rIns="91440" bIns="45720" numCol="1" anchor="t" anchorCtr="0" compatLnSpc="1">
+            <a:prstTxWarp prst="textNoShape">
+              <a:avLst/>
+            </a:prstTxWarp>
+          </a:bodyPr>
+          <a:lstStyle/>
+          <a:p>
+            <a:endParaRPr lang="en-US"/>
+          </a:p>
+        </p:txBody>
+      </p:sp>
+      <p:pic>
+        <p:nvPicPr>
+          <p:cNvPr id="2054" name="Picture 6" descr="🔥 [50+] Iowa Hawkeye Wallpapers Screensavers | WallpaperSafari">
+            <a:extLst>
+              <a:ext uri="{FF2B5EF4-FFF2-40B4-BE49-F238E27FC236}">
+                <a16:creationId xmlns:a16="http://schemas.microsoft.com/office/drawing/2014/main" id="{F8A1117F-DCBF-345D-B748-719C8C92BF37}"/>
+              </a:ext>
+            </a:extLst>
+          </p:cNvPr>
+          <p:cNvPicPr>
+            <a:picLocks noChangeAspect="1" noChangeArrowheads="1"/>
+          </p:cNvPicPr>
+          <p:nvPr/>
+        </p:nvPicPr>
+        <p:blipFill>
+          <a:blip r:embed="rId3">
+            <a:extLst>
+              <a:ext uri="{28A0092B-C50C-407E-A947-70E740481C1C}">
+                <a14:useLocalDpi xmlns:a14="http://schemas.microsoft.com/office/drawing/2010/main" val="0"/>
+              </a:ext>
+            </a:extLst>
+          </a:blip>
+          <a:srcRect/>
+          <a:stretch>
+            <a:fillRect/>
+          </a:stretch>
+        </p:blipFill>
+        <p:spPr bwMode="auto">
+          <a:xfrm>
+            <a:off x="7809662" y="385130"/>
+            <a:ext cx="2061876" cy="1547213"/>
+          </a:xfrm>
+          <a:prstGeom prst="rect">
+            <a:avLst/>
+          </a:prstGeom>
+          <a:noFill/>
+          <a:extLst>
+            <a:ext uri="{909E8E84-426E-40DD-AFC4-6F175D3DCCD1}">
+              <a14:hiddenFill xmlns:a14="http://schemas.microsoft.com/office/drawing/2010/main">
+                <a:solidFill>
+                  <a:srgbClr val="FFFFFF"/>
+                </a:solidFill>
+              </a14:hiddenFill>
+            </a:ext>
+          </a:extLst>
         </p:spPr>
       </p:pic>
     </p:spTree>
@@ -10142,6 +10330,53 @@
           </a:graphicData>
         </a:graphic>
       </p:graphicFrame>
+      <p:pic>
+        <p:nvPicPr>
+          <p:cNvPr id="4" name="Picture 6" descr="🔥 [50+] Iowa Hawkeye Wallpapers Screensavers | WallpaperSafari">
+            <a:extLst>
+              <a:ext uri="{FF2B5EF4-FFF2-40B4-BE49-F238E27FC236}">
+                <a16:creationId xmlns:a16="http://schemas.microsoft.com/office/drawing/2014/main" id="{0E9A6B8A-7F48-F6FD-82FB-C7045762E1EA}"/>
+              </a:ext>
+            </a:extLst>
+          </p:cNvPr>
+          <p:cNvPicPr>
+            <a:picLocks noChangeAspect="1" noChangeArrowheads="1"/>
+          </p:cNvPicPr>
+          <p:nvPr/>
+        </p:nvPicPr>
+        <p:blipFill>
+          <a:blip r:embed="rId7">
+            <a:extLst>
+              <a:ext uri="{28A0092B-C50C-407E-A947-70E740481C1C}">
+                <a14:useLocalDpi xmlns:a14="http://schemas.microsoft.com/office/drawing/2010/main" val="0"/>
+              </a:ext>
+            </a:extLst>
+          </a:blip>
+          <a:srcRect/>
+          <a:stretch>
+            <a:fillRect/>
+          </a:stretch>
+        </p:blipFill>
+        <p:spPr bwMode="auto">
+          <a:xfrm>
+            <a:off x="7403935" y="2658869"/>
+            <a:ext cx="2525302" cy="1894964"/>
+          </a:xfrm>
+          <a:prstGeom prst="rect">
+            <a:avLst/>
+          </a:prstGeom>
+          <a:noFill/>
+          <a:extLst>
+            <a:ext uri="{909E8E84-426E-40DD-AFC4-6F175D3DCCD1}">
+              <a14:hiddenFill xmlns:a14="http://schemas.microsoft.com/office/drawing/2010/main">
+                <a:solidFill>
+                  <a:srgbClr val="FFFFFF"/>
+                </a:solidFill>
+              </a14:hiddenFill>
+            </a:ext>
+          </a:extLst>
+        </p:spPr>
+      </p:pic>
     </p:spTree>
     <p:extLst>
       <p:ext uri="{BB962C8B-B14F-4D97-AF65-F5344CB8AC3E}">
